--- a/hr-notes/powerpoint/hr-notes.pptx
+++ b/hr-notes/powerpoint/hr-notes.pptx
@@ -7387,7 +7387,7 @@
         <p:spPr>
           <a:xfrm>
             <a:off x="12436074" y="6348263"/>
-            <a:ext cx="5588001" cy="3404886"/>
+            <a:ext cx="5588001" cy="3221292"/>
           </a:xfrm>
           <a:prstGeom prst="rect">
             <a:avLst/>
@@ -7639,27 +7639,6 @@
             </a:pPr>
             <a:r>
               <a:t>“Lead is lost.”</a:t>
-            </a:r>
-          </a:p>
-          <a:p>
-            <a:pPr marL="254000" indent="-254000" algn="l">
-              <a:buClr>
-                <a:srgbClr val="000000"/>
-              </a:buClr>
-              <a:buSzPct val="100000"/>
-              <a:buAutoNum type="arabicPeriod" startAt="1"/>
-              <a:defRPr sz="1400">
-                <a:solidFill>
-                  <a:srgbClr val="000000"/>
-                </a:solidFill>
-                <a:latin typeface="Lucida Grande"/>
-                <a:ea typeface="Lucida Grande"/>
-                <a:cs typeface="Lucida Grande"/>
-                <a:sym typeface="Lucida Grande"/>
-              </a:defRPr>
-            </a:pPr>
-            <a:r>
-              <a:t>“Do not allow a player to leave the penalty box.”</a:t>
             </a:r>
           </a:p>
           <a:p>
@@ -7956,37 +7935,6 @@
           <p:nvPr/>
         </p:nvSpPr>
         <p:spPr>
-          <a:xfrm flipV="1">
-            <a:off x="-1" y="6465261"/>
-            <a:ext cx="24384002" cy="1"/>
-          </a:xfrm>
-          <a:prstGeom prst="line">
-            <a:avLst/>
-          </a:prstGeom>
-          <a:ln w="25400" cap="rnd">
-            <a:solidFill>
-              <a:srgbClr val="000000"/>
-            </a:solidFill>
-            <a:custDash>
-              <a:ds d="100000" sp="200000"/>
-            </a:custDash>
-          </a:ln>
-        </p:spPr>
-        <p:txBody>
-          <a:bodyPr lIns="50800" tIns="50800" rIns="50800" bIns="50800" anchor="ctr"/>
-          <a:lstStyle/>
-          <a:p>
-            <a:pPr/>
-          </a:p>
-        </p:txBody>
-      </p:sp>
-      <p:sp>
-        <p:nvSpPr>
-          <p:cNvPr id="181" name="Line"/>
-          <p:cNvSpPr/>
-          <p:nvPr/>
-        </p:nvSpPr>
-        <p:spPr>
           <a:xfrm flipH="1">
             <a:off x="12191999" y="0"/>
             <a:ext cx="2" cy="13716000"/>
@@ -8013,7 +7961,7 @@
       </p:sp>
       <p:sp>
         <p:nvSpPr>
-          <p:cNvPr id="182" name="Rectangle"/>
+          <p:cNvPr id="181" name="Rectangle"/>
           <p:cNvSpPr/>
           <p:nvPr/>
         </p:nvSpPr>
@@ -8055,7 +8003,7 @@
       </p:sp>
       <p:sp>
         <p:nvSpPr>
-          <p:cNvPr id="183" name="Rectangle"/>
+          <p:cNvPr id="182" name="Rectangle"/>
           <p:cNvSpPr/>
           <p:nvPr/>
         </p:nvSpPr>
@@ -8097,7 +8045,7 @@
       </p:sp>
       <p:sp>
         <p:nvSpPr>
-          <p:cNvPr id="184" name="Coaches &amp; Captains Meeting"/>
+          <p:cNvPr id="183" name="Coaches &amp; Captains Meeting"/>
           <p:cNvSpPr txBox="1"/>
           <p:nvPr/>
         </p:nvSpPr>
@@ -8143,7 +8091,7 @@
       </p:sp>
       <p:sp>
         <p:nvSpPr>
-          <p:cNvPr id="185" name="Coaches &amp; Captains Meeting Continued"/>
+          <p:cNvPr id="184" name="Coaches &amp; Captains Meeting Continued"/>
           <p:cNvSpPr txBox="1"/>
           <p:nvPr/>
         </p:nvSpPr>
@@ -8189,7 +8137,7 @@
       </p:sp>
       <p:sp>
         <p:nvSpPr>
-          <p:cNvPr id="186" name="Medical benches…"/>
+          <p:cNvPr id="185" name="Medical benches…"/>
           <p:cNvSpPr txBox="1"/>
           <p:nvPr/>
         </p:nvSpPr>
@@ -8392,7 +8340,7 @@
       </p:sp>
       <p:sp>
         <p:nvSpPr>
-          <p:cNvPr id="187" name="Game Administration"/>
+          <p:cNvPr id="186" name="Game Administration"/>
           <p:cNvSpPr txBox="1"/>
           <p:nvPr/>
         </p:nvSpPr>
@@ -8438,7 +8386,7 @@
       </p:sp>
       <p:sp>
         <p:nvSpPr>
-          <p:cNvPr id="188" name="If you have an official review available, I will ask you if you want to use it at the end of each period.…"/>
+          <p:cNvPr id="187" name="If you have an official review available, I will ask you if you want to use it at the end of each period.…"/>
           <p:cNvSpPr txBox="1"/>
           <p:nvPr/>
         </p:nvSpPr>
@@ -8511,7 +8459,7 @@
       </p:sp>
       <p:sp>
         <p:nvSpPr>
-          <p:cNvPr id="189" name="End-of-Period and Game Procedures"/>
+          <p:cNvPr id="188" name="End-of-Period and Game Procedures"/>
           <p:cNvSpPr txBox="1"/>
           <p:nvPr/>
         </p:nvSpPr>
@@ -8557,7 +8505,7 @@
       </p:sp>
       <p:sp>
         <p:nvSpPr>
-          <p:cNvPr id="190" name="Penalty avoidance:…"/>
+          <p:cNvPr id="189" name="Penalty avoidance:…"/>
           <p:cNvSpPr txBox="1"/>
           <p:nvPr/>
         </p:nvSpPr>
@@ -9014,7 +8962,7 @@
       </p:sp>
       <p:sp>
         <p:nvSpPr>
-          <p:cNvPr id="191" name="Gameplay Support"/>
+          <p:cNvPr id="190" name="Gameplay Support"/>
           <p:cNvSpPr txBox="1"/>
           <p:nvPr/>
         </p:nvSpPr>
@@ -9060,7 +9008,7 @@
       </p:sp>
       <p:sp>
         <p:nvSpPr>
-          <p:cNvPr id="192" name="Captains and Alternates only for both teams, please meet at the designated official review area.…"/>
+          <p:cNvPr id="191" name="Captains and Alternates only for both teams, please meet at the designated official review area.…"/>
           <p:cNvSpPr txBox="1"/>
           <p:nvPr/>
         </p:nvSpPr>
@@ -9164,7 +9112,7 @@
       </p:sp>
       <p:sp>
         <p:nvSpPr>
-          <p:cNvPr id="193" name="Official Reviews"/>
+          <p:cNvPr id="192" name="Official Reviews"/>
           <p:cNvSpPr txBox="1"/>
           <p:nvPr/>
         </p:nvSpPr>
@@ -9210,7 +9158,7 @@
       </p:sp>
       <p:sp>
         <p:nvSpPr>
-          <p:cNvPr id="194" name="Players and coaches may ask any SO short, clarifying questions (≈5-8 seconds) during lineups, timeouts, etc.…"/>
+          <p:cNvPr id="193" name="Players and coaches may ask any SO short, clarifying questions (≈5-8 seconds) during lineups, timeouts, etc.…"/>
           <p:cNvSpPr txBox="1"/>
           <p:nvPr/>
         </p:nvSpPr>
@@ -9307,7 +9255,7 @@
       </p:sp>
       <p:sp>
         <p:nvSpPr>
-          <p:cNvPr id="195" name="Communication With Officials"/>
+          <p:cNvPr id="194" name="Communication With Officials"/>
           <p:cNvSpPr txBox="1"/>
           <p:nvPr/>
         </p:nvSpPr>
@@ -9353,7 +9301,7 @@
       </p:sp>
       <p:sp>
         <p:nvSpPr>
-          <p:cNvPr id="196" name="If the scoreboard indicates a tie score at the end of regulation after the JRs check in with their SKs, the SBO will immediately start a one-minute lineup clock (counting up).…"/>
+          <p:cNvPr id="195" name="If the scoreboard indicates a tie score at the end of regulation after the JRs check in with their SKs, the SBO will immediately start a one-minute lineup clock (counting up).…"/>
           <p:cNvSpPr txBox="1"/>
           <p:nvPr/>
         </p:nvSpPr>
@@ -9513,7 +9461,7 @@
       </p:sp>
       <p:sp>
         <p:nvSpPr>
-          <p:cNvPr id="197" name="Overtime Procedures"/>
+          <p:cNvPr id="196" name="Overtime Procedures"/>
           <p:cNvSpPr txBox="1"/>
           <p:nvPr/>
         </p:nvSpPr>
@@ -9559,28 +9507,1183 @@
       </p:sp>
       <p:grpSp>
         <p:nvGrpSpPr>
-          <p:cNvPr id="217" name="Track"/>
+          <p:cNvPr id="232" name="Group"/>
           <p:cNvGrpSpPr/>
           <p:nvPr/>
         </p:nvGrpSpPr>
         <p:grpSpPr>
-          <a:xfrm rot="16199601">
-            <a:off x="11863616" y="3131864"/>
-            <a:ext cx="12422788" cy="8468256"/>
-            <a:chOff x="0" y="-1"/>
-            <a:chExt cx="12422786" cy="8468254"/>
+          <a:xfrm rot="16197861">
+            <a:off x="12554669" y="2114214"/>
+            <a:ext cx="12596172" cy="9894238"/>
+            <a:chOff x="-18" y="4"/>
+            <a:chExt cx="12596170" cy="9894236"/>
           </a:xfrm>
         </p:grpSpPr>
+        <p:grpSp>
+          <p:nvGrpSpPr>
+            <p:cNvPr id="216" name="Track"/>
+            <p:cNvGrpSpPr/>
+            <p:nvPr/>
+          </p:nvGrpSpPr>
+          <p:grpSpPr>
+            <a:xfrm rot="10799600">
+              <a:off x="481" y="738"/>
+              <a:ext cx="12595170" cy="8596202"/>
+              <a:chOff x="-1" y="-2"/>
+              <a:chExt cx="12595169" cy="8596200"/>
+            </a:xfrm>
+          </p:grpSpPr>
+          <p:sp>
+            <p:nvSpPr>
+              <p:cNvPr id="197" name="Bumpers"/>
+              <p:cNvSpPr/>
+              <p:nvPr/>
+            </p:nvSpPr>
+            <p:spPr>
+              <a:xfrm rot="21600000">
+                <a:off x="-1" y="-1"/>
+                <a:ext cx="12595168" cy="8596199"/>
+              </a:xfrm>
+              <a:custGeom>
+                <a:avLst/>
+                <a:gdLst/>
+                <a:ahLst/>
+                <a:cxnLst>
+                  <a:cxn ang="0">
+                    <a:pos x="wd2" y="hd2"/>
+                  </a:cxn>
+                  <a:cxn ang="5400000">
+                    <a:pos x="wd2" y="hd2"/>
+                  </a:cxn>
+                  <a:cxn ang="10800000">
+                    <a:pos x="wd2" y="hd2"/>
+                  </a:cxn>
+                  <a:cxn ang="16200000">
+                    <a:pos x="wd2" y="hd2"/>
+                  </a:cxn>
+                </a:cxnLst>
+                <a:rect l="0" t="0" r="r" b="b"/>
+                <a:pathLst>
+                  <a:path w="21486" h="21591" fill="norm" stroke="1" extrusionOk="0">
+                    <a:moveTo>
+                      <a:pt x="14355" y="1"/>
+                    </a:moveTo>
+                    <a:cubicBezTo>
+                      <a:pt x="14184" y="3"/>
+                      <a:pt x="14013" y="11"/>
+                      <a:pt x="13843" y="26"/>
+                    </a:cubicBezTo>
+                    <a:cubicBezTo>
+                      <a:pt x="13835" y="30"/>
+                      <a:pt x="13826" y="34"/>
+                      <a:pt x="13818" y="38"/>
+                    </a:cubicBezTo>
+                    <a:cubicBezTo>
+                      <a:pt x="13810" y="41"/>
+                      <a:pt x="13802" y="46"/>
+                      <a:pt x="13793" y="49"/>
+                    </a:cubicBezTo>
+                    <a:lnTo>
+                      <a:pt x="13792" y="32"/>
+                    </a:lnTo>
+                    <a:lnTo>
+                      <a:pt x="7548" y="539"/>
+                    </a:lnTo>
+                    <a:cubicBezTo>
+                      <a:pt x="6643" y="569"/>
+                      <a:pt x="5744" y="784"/>
+                      <a:pt x="4872" y="1174"/>
+                    </a:cubicBezTo>
+                    <a:cubicBezTo>
+                      <a:pt x="3433" y="1816"/>
+                      <a:pt x="2050" y="2938"/>
+                      <a:pt x="1143" y="4895"/>
+                    </a:cubicBezTo>
+                    <a:cubicBezTo>
+                      <a:pt x="94" y="7158"/>
+                      <a:pt x="-113" y="10020"/>
+                      <a:pt x="50" y="12758"/>
+                    </a:cubicBezTo>
+                    <a:cubicBezTo>
+                      <a:pt x="129" y="14081"/>
+                      <a:pt x="295" y="15418"/>
+                      <a:pt x="650" y="16641"/>
+                    </a:cubicBezTo>
+                    <a:cubicBezTo>
+                      <a:pt x="969" y="17743"/>
+                      <a:pt x="1437" y="18729"/>
+                      <a:pt x="2030" y="19522"/>
+                    </a:cubicBezTo>
+                    <a:cubicBezTo>
+                      <a:pt x="2668" y="20376"/>
+                      <a:pt x="3375" y="20932"/>
+                      <a:pt x="4119" y="21234"/>
+                    </a:cubicBezTo>
+                    <a:cubicBezTo>
+                      <a:pt x="4856" y="21534"/>
+                      <a:pt x="5617" y="21582"/>
+                      <a:pt x="6345" y="21591"/>
+                    </a:cubicBezTo>
+                    <a:cubicBezTo>
+                      <a:pt x="7075" y="21599"/>
+                      <a:pt x="7808" y="21561"/>
+                      <a:pt x="8544" y="21466"/>
+                    </a:cubicBezTo>
+                    <a:lnTo>
+                      <a:pt x="14566" y="21002"/>
+                    </a:lnTo>
+                    <a:lnTo>
+                      <a:pt x="14566" y="21002"/>
+                    </a:lnTo>
+                    <a:cubicBezTo>
+                      <a:pt x="14676" y="21007"/>
+                      <a:pt x="14786" y="20988"/>
+                      <a:pt x="14896" y="20966"/>
+                    </a:cubicBezTo>
+                    <a:cubicBezTo>
+                      <a:pt x="15005" y="20944"/>
+                      <a:pt x="15114" y="20919"/>
+                      <a:pt x="15224" y="20894"/>
+                    </a:cubicBezTo>
+                    <a:cubicBezTo>
+                      <a:pt x="16033" y="20716"/>
+                      <a:pt x="16838" y="20385"/>
+                      <a:pt x="17608" y="19879"/>
+                    </a:cubicBezTo>
+                    <a:cubicBezTo>
+                      <a:pt x="18367" y="19381"/>
+                      <a:pt x="19101" y="18707"/>
+                      <a:pt x="19717" y="17744"/>
+                    </a:cubicBezTo>
+                    <a:cubicBezTo>
+                      <a:pt x="20970" y="15786"/>
+                      <a:pt x="21485" y="13153"/>
+                      <a:pt x="21486" y="10553"/>
+                    </a:cubicBezTo>
+                    <a:cubicBezTo>
+                      <a:pt x="21487" y="7871"/>
+                      <a:pt x="20944" y="5084"/>
+                      <a:pt x="19644" y="3018"/>
+                    </a:cubicBezTo>
+                    <a:cubicBezTo>
+                      <a:pt x="18371" y="996"/>
+                      <a:pt x="16615" y="141"/>
+                      <a:pt x="14866" y="16"/>
+                    </a:cubicBezTo>
+                    <a:cubicBezTo>
+                      <a:pt x="14696" y="4"/>
+                      <a:pt x="14525" y="-1"/>
+                      <a:pt x="14355" y="1"/>
+                    </a:cubicBezTo>
+                    <a:close/>
+                  </a:path>
+                </a:pathLst>
+              </a:custGeom>
+              <a:noFill/>
+              <a:ln w="63500" cap="flat">
+                <a:solidFill>
+                  <a:srgbClr val="000000"/>
+                </a:solidFill>
+                <a:prstDash val="solid"/>
+                <a:miter lim="400000"/>
+              </a:ln>
+              <a:effectLst/>
+              <a:extLst>
+                <a:ext uri="{C572A759-6A51-4108-AA02-DFA0A04FC94B}">
+                  <ma14:wrappingTextBoxFlag xmlns:ma14="http://schemas.microsoft.com/office/mac/drawingml/2011/main" val="1"/>
+                </a:ext>
+              </a:extLst>
+            </p:spPr>
+            <p:txBody>
+              <a:bodyPr wrap="square" lIns="50800" tIns="50800" rIns="50800" bIns="50800" numCol="1" anchor="ctr">
+                <a:noAutofit/>
+              </a:bodyPr>
+              <a:lstStyle>
+                <a:lvl1pPr defTabSz="825500">
+                  <a:defRPr sz="3200">
+                    <a:solidFill>
+                      <a:srgbClr val="FFFFFF"/>
+                    </a:solidFill>
+                    <a:latin typeface="Helvetica Neue Medium"/>
+                    <a:ea typeface="Helvetica Neue Medium"/>
+                    <a:cs typeface="Helvetica Neue Medium"/>
+                    <a:sym typeface="Helvetica Neue Medium"/>
+                  </a:defRPr>
+                </a:lvl1pPr>
+              </a:lstStyle>
+              <a:p>
+                <a:pPr/>
+                <a:r>
+                  <a:t>]\</a:t>
+                </a:r>
+              </a:p>
+            </p:txBody>
+          </p:sp>
+          <p:sp>
+            <p:nvSpPr>
+              <p:cNvPr id="198" name="Outside Boundary"/>
+              <p:cNvSpPr/>
+              <p:nvPr/>
+            </p:nvSpPr>
+            <p:spPr>
+              <a:xfrm rot="21600000">
+                <a:off x="1178232" y="1092415"/>
+                <a:ext cx="10238702" cy="6411367"/>
+              </a:xfrm>
+              <a:custGeom>
+                <a:avLst/>
+                <a:gdLst/>
+                <a:ahLst/>
+                <a:cxnLst>
+                  <a:cxn ang="0">
+                    <a:pos x="wd2" y="hd2"/>
+                  </a:cxn>
+                  <a:cxn ang="5400000">
+                    <a:pos x="wd2" y="hd2"/>
+                  </a:cxn>
+                  <a:cxn ang="10800000">
+                    <a:pos x="wd2" y="hd2"/>
+                  </a:cxn>
+                  <a:cxn ang="16200000">
+                    <a:pos x="wd2" y="hd2"/>
+                  </a:cxn>
+                </a:cxnLst>
+                <a:rect l="0" t="0" r="r" b="b"/>
+                <a:pathLst>
+                  <a:path w="21482" h="21591" fill="norm" stroke="1" extrusionOk="0">
+                    <a:moveTo>
+                      <a:pt x="14352" y="1"/>
+                    </a:moveTo>
+                    <a:cubicBezTo>
+                      <a:pt x="14182" y="3"/>
+                      <a:pt x="14011" y="11"/>
+                      <a:pt x="13841" y="26"/>
+                    </a:cubicBezTo>
+                    <a:cubicBezTo>
+                      <a:pt x="13824" y="33"/>
+                      <a:pt x="13808" y="42"/>
+                      <a:pt x="13791" y="49"/>
+                    </a:cubicBezTo>
+                    <a:lnTo>
+                      <a:pt x="13790" y="32"/>
+                    </a:lnTo>
+                    <a:lnTo>
+                      <a:pt x="7547" y="538"/>
+                    </a:lnTo>
+                    <a:cubicBezTo>
+                      <a:pt x="6642" y="569"/>
+                      <a:pt x="5743" y="784"/>
+                      <a:pt x="4871" y="1173"/>
+                    </a:cubicBezTo>
+                    <a:cubicBezTo>
+                      <a:pt x="3432" y="1816"/>
+                      <a:pt x="2050" y="2937"/>
+                      <a:pt x="1143" y="4895"/>
+                    </a:cubicBezTo>
+                    <a:cubicBezTo>
+                      <a:pt x="94" y="7158"/>
+                      <a:pt x="-113" y="10020"/>
+                      <a:pt x="50" y="12758"/>
+                    </a:cubicBezTo>
+                    <a:cubicBezTo>
+                      <a:pt x="129" y="14081"/>
+                      <a:pt x="295" y="15418"/>
+                      <a:pt x="650" y="16641"/>
+                    </a:cubicBezTo>
+                    <a:cubicBezTo>
+                      <a:pt x="969" y="17743"/>
+                      <a:pt x="1437" y="18729"/>
+                      <a:pt x="2029" y="19522"/>
+                    </a:cubicBezTo>
+                    <a:cubicBezTo>
+                      <a:pt x="2667" y="20376"/>
+                      <a:pt x="3374" y="20932"/>
+                      <a:pt x="4118" y="21234"/>
+                    </a:cubicBezTo>
+                    <a:cubicBezTo>
+                      <a:pt x="4855" y="21534"/>
+                      <a:pt x="5616" y="21582"/>
+                      <a:pt x="6344" y="21591"/>
+                    </a:cubicBezTo>
+                    <a:cubicBezTo>
+                      <a:pt x="7074" y="21599"/>
+                      <a:pt x="7807" y="21561"/>
+                      <a:pt x="8543" y="21466"/>
+                    </a:cubicBezTo>
+                    <a:lnTo>
+                      <a:pt x="14563" y="21002"/>
+                    </a:lnTo>
+                    <a:cubicBezTo>
+                      <a:pt x="14563" y="21002"/>
+                      <a:pt x="14564" y="21002"/>
+                      <a:pt x="14564" y="21002"/>
+                    </a:cubicBezTo>
+                    <a:cubicBezTo>
+                      <a:pt x="14789" y="21013"/>
+                      <a:pt x="15015" y="21000"/>
+                      <a:pt x="15241" y="20966"/>
+                    </a:cubicBezTo>
+                    <a:cubicBezTo>
+                      <a:pt x="16054" y="20843"/>
+                      <a:pt x="16844" y="20420"/>
+                      <a:pt x="17605" y="19879"/>
+                    </a:cubicBezTo>
+                    <a:cubicBezTo>
+                      <a:pt x="18351" y="19349"/>
+                      <a:pt x="19091" y="18698"/>
+                      <a:pt x="19714" y="17744"/>
+                    </a:cubicBezTo>
+                    <a:cubicBezTo>
+                      <a:pt x="20982" y="15803"/>
+                      <a:pt x="21487" y="13156"/>
+                      <a:pt x="21483" y="10553"/>
+                    </a:cubicBezTo>
+                    <a:cubicBezTo>
+                      <a:pt x="21478" y="7873"/>
+                      <a:pt x="20939" y="5084"/>
+                      <a:pt x="19640" y="3018"/>
+                    </a:cubicBezTo>
+                    <a:cubicBezTo>
+                      <a:pt x="18369" y="994"/>
+                      <a:pt x="16612" y="141"/>
+                      <a:pt x="14863" y="16"/>
+                    </a:cubicBezTo>
+                    <a:cubicBezTo>
+                      <a:pt x="14693" y="4"/>
+                      <a:pt x="14523" y="-1"/>
+                      <a:pt x="14352" y="1"/>
+                    </a:cubicBezTo>
+                    <a:close/>
+                  </a:path>
+                </a:pathLst>
+              </a:custGeom>
+              <a:solidFill>
+                <a:srgbClr val="FFFFFF"/>
+              </a:solidFill>
+              <a:ln w="63500" cap="flat">
+                <a:solidFill>
+                  <a:srgbClr val="0433FF"/>
+                </a:solidFill>
+                <a:prstDash val="solid"/>
+                <a:miter lim="400000"/>
+              </a:ln>
+              <a:effectLst/>
+            </p:spPr>
+            <p:txBody>
+              <a:bodyPr wrap="square" lIns="50800" tIns="50800" rIns="50800" bIns="50800" numCol="1" anchor="ctr">
+                <a:noAutofit/>
+              </a:bodyPr>
+              <a:lstStyle/>
+              <a:p>
+                <a:pPr defTabSz="825500">
+                  <a:defRPr sz="3200">
+                    <a:solidFill>
+                      <a:srgbClr val="FFFFFF"/>
+                    </a:solidFill>
+                    <a:latin typeface="Helvetica Neue Medium"/>
+                    <a:ea typeface="Helvetica Neue Medium"/>
+                    <a:cs typeface="Helvetica Neue Medium"/>
+                    <a:sym typeface="Helvetica Neue Medium"/>
+                  </a:defRPr>
+                </a:pPr>
+              </a:p>
+            </p:txBody>
+          </p:sp>
+          <p:sp>
+            <p:nvSpPr>
+              <p:cNvPr id="199" name="Inside Boundary"/>
+              <p:cNvSpPr/>
+              <p:nvPr/>
+            </p:nvSpPr>
+            <p:spPr>
+              <a:xfrm rot="21600000">
+                <a:off x="2777755" y="2839253"/>
+                <a:ext cx="7003570" cy="2908559"/>
+              </a:xfrm>
+              <a:prstGeom prst="roundRect">
+                <a:avLst>
+                  <a:gd name="adj" fmla="val 48362"/>
+                </a:avLst>
+              </a:prstGeom>
+              <a:solidFill>
+                <a:srgbClr val="D6D6D6"/>
+              </a:solidFill>
+              <a:ln w="63500" cap="flat">
+                <a:solidFill>
+                  <a:srgbClr val="0433FF"/>
+                </a:solidFill>
+                <a:prstDash val="solid"/>
+                <a:miter lim="400000"/>
+              </a:ln>
+              <a:effectLst/>
+            </p:spPr>
+            <p:txBody>
+              <a:bodyPr wrap="square" lIns="50800" tIns="50800" rIns="50800" bIns="50800" numCol="1" anchor="ctr">
+                <a:noAutofit/>
+              </a:bodyPr>
+              <a:lstStyle/>
+              <a:p>
+                <a:pPr defTabSz="825500">
+                  <a:defRPr sz="3200">
+                    <a:solidFill>
+                      <a:srgbClr val="FFFFFF"/>
+                    </a:solidFill>
+                    <a:latin typeface="Helvetica Neue Medium"/>
+                    <a:ea typeface="Helvetica Neue Medium"/>
+                    <a:cs typeface="Helvetica Neue Medium"/>
+                    <a:sym typeface="Helvetica Neue Medium"/>
+                  </a:defRPr>
+                </a:pPr>
+              </a:p>
+            </p:txBody>
+          </p:sp>
+          <p:sp>
+            <p:nvSpPr>
+              <p:cNvPr id="200" name="Pivot Line"/>
+              <p:cNvSpPr/>
+              <p:nvPr/>
+            </p:nvSpPr>
+            <p:spPr>
+              <a:xfrm flipV="1">
+                <a:off x="4273128" y="1273770"/>
+                <a:ext cx="1" cy="1567505"/>
+              </a:xfrm>
+              <a:prstGeom prst="line">
+                <a:avLst/>
+              </a:prstGeom>
+              <a:noFill/>
+              <a:ln w="63500" cap="flat">
+                <a:solidFill>
+                  <a:srgbClr val="0433FF"/>
+                </a:solidFill>
+                <a:prstDash val="solid"/>
+                <a:miter lim="400000"/>
+              </a:ln>
+              <a:effectLst/>
+            </p:spPr>
+            <p:txBody>
+              <a:bodyPr wrap="square" lIns="50800" tIns="50800" rIns="50800" bIns="50800" numCol="1" anchor="ctr">
+                <a:noAutofit/>
+              </a:bodyPr>
+              <a:lstStyle/>
+              <a:p>
+                <a:pPr algn="l">
+                  <a:lnSpc>
+                    <a:spcPct val="90000"/>
+                  </a:lnSpc>
+                  <a:spcBef>
+                    <a:spcPts val="4500"/>
+                  </a:spcBef>
+                  <a:defRPr sz="4800">
+                    <a:solidFill>
+                      <a:srgbClr val="000000"/>
+                    </a:solidFill>
+                  </a:defRPr>
+                </a:pPr>
+              </a:p>
+            </p:txBody>
+          </p:sp>
+          <p:sp>
+            <p:nvSpPr>
+              <p:cNvPr id="201" name="Jammer Line"/>
+              <p:cNvSpPr/>
+              <p:nvPr/>
+            </p:nvSpPr>
+            <p:spPr>
+              <a:xfrm flipV="1">
+                <a:off x="7752241" y="1094227"/>
+                <a:ext cx="2" cy="1724143"/>
+              </a:xfrm>
+              <a:prstGeom prst="line">
+                <a:avLst/>
+              </a:prstGeom>
+              <a:noFill/>
+              <a:ln w="63500" cap="flat">
+                <a:solidFill>
+                  <a:srgbClr val="0433FF"/>
+                </a:solidFill>
+                <a:prstDash val="solid"/>
+                <a:miter lim="400000"/>
+              </a:ln>
+              <a:effectLst/>
+            </p:spPr>
+            <p:txBody>
+              <a:bodyPr wrap="square" lIns="50800" tIns="50800" rIns="50800" bIns="50800" numCol="1" anchor="ctr">
+                <a:noAutofit/>
+              </a:bodyPr>
+              <a:lstStyle/>
+              <a:p>
+                <a:pPr algn="l">
+                  <a:lnSpc>
+                    <a:spcPct val="90000"/>
+                  </a:lnSpc>
+                  <a:spcBef>
+                    <a:spcPts val="4500"/>
+                  </a:spcBef>
+                  <a:defRPr sz="4800">
+                    <a:solidFill>
+                      <a:srgbClr val="000000"/>
+                    </a:solidFill>
+                  </a:defRPr>
+                </a:pPr>
+              </a:p>
+            </p:txBody>
+          </p:sp>
+          <p:sp>
+            <p:nvSpPr>
+              <p:cNvPr id="202" name="Line"/>
+              <p:cNvSpPr/>
+              <p:nvPr/>
+            </p:nvSpPr>
+            <p:spPr>
+              <a:xfrm flipH="1" flipV="1">
+                <a:off x="2972724" y="2285423"/>
+                <a:ext cx="236214" cy="331828"/>
+              </a:xfrm>
+              <a:prstGeom prst="line">
+                <a:avLst/>
+              </a:prstGeom>
+              <a:noFill/>
+              <a:ln w="63500" cap="flat">
+                <a:solidFill>
+                  <a:srgbClr val="0433FF"/>
+                </a:solidFill>
+                <a:prstDash val="solid"/>
+                <a:miter lim="400000"/>
+              </a:ln>
+              <a:effectLst/>
+            </p:spPr>
+            <p:txBody>
+              <a:bodyPr wrap="square" lIns="50800" tIns="50800" rIns="50800" bIns="50800" numCol="1" anchor="ctr">
+                <a:noAutofit/>
+              </a:bodyPr>
+              <a:lstStyle/>
+              <a:p>
+                <a:pPr algn="l">
+                  <a:lnSpc>
+                    <a:spcPct val="90000"/>
+                  </a:lnSpc>
+                  <a:spcBef>
+                    <a:spcPts val="4500"/>
+                  </a:spcBef>
+                  <a:defRPr sz="4800">
+                    <a:solidFill>
+                      <a:srgbClr val="000000"/>
+                    </a:solidFill>
+                  </a:defRPr>
+                </a:pPr>
+              </a:p>
+            </p:txBody>
+          </p:sp>
+          <p:sp>
+            <p:nvSpPr>
+              <p:cNvPr id="203" name="Line"/>
+              <p:cNvSpPr/>
+              <p:nvPr/>
+            </p:nvSpPr>
+            <p:spPr>
+              <a:xfrm flipH="1" flipV="1">
+                <a:off x="1938741" y="3581983"/>
+                <a:ext cx="367218" cy="175524"/>
+              </a:xfrm>
+              <a:prstGeom prst="line">
+                <a:avLst/>
+              </a:prstGeom>
+              <a:noFill/>
+              <a:ln w="63500" cap="flat">
+                <a:solidFill>
+                  <a:srgbClr val="0433FF"/>
+                </a:solidFill>
+                <a:prstDash val="solid"/>
+                <a:miter lim="400000"/>
+              </a:ln>
+              <a:effectLst/>
+            </p:spPr>
+            <p:txBody>
+              <a:bodyPr wrap="square" lIns="50800" tIns="50800" rIns="50800" bIns="50800" numCol="1" anchor="ctr">
+                <a:noAutofit/>
+              </a:bodyPr>
+              <a:lstStyle/>
+              <a:p>
+                <a:pPr algn="l">
+                  <a:lnSpc>
+                    <a:spcPct val="90000"/>
+                  </a:lnSpc>
+                  <a:spcBef>
+                    <a:spcPts val="4500"/>
+                  </a:spcBef>
+                  <a:defRPr sz="4800">
+                    <a:solidFill>
+                      <a:srgbClr val="000000"/>
+                    </a:solidFill>
+                  </a:defRPr>
+                </a:pPr>
+              </a:p>
+            </p:txBody>
+          </p:sp>
+          <p:sp>
+            <p:nvSpPr>
+              <p:cNvPr id="204" name="Line"/>
+              <p:cNvSpPr/>
+              <p:nvPr/>
+            </p:nvSpPr>
+            <p:spPr>
+              <a:xfrm flipH="1">
+                <a:off x="1807593" y="4913212"/>
+                <a:ext cx="403421" cy="53111"/>
+              </a:xfrm>
+              <a:prstGeom prst="line">
+                <a:avLst/>
+              </a:prstGeom>
+              <a:noFill/>
+              <a:ln w="63500" cap="flat">
+                <a:solidFill>
+                  <a:srgbClr val="0433FF"/>
+                </a:solidFill>
+                <a:prstDash val="solid"/>
+                <a:miter lim="400000"/>
+              </a:ln>
+              <a:effectLst/>
+            </p:spPr>
+            <p:txBody>
+              <a:bodyPr wrap="square" lIns="50800" tIns="50800" rIns="50800" bIns="50800" numCol="1" anchor="ctr">
+                <a:noAutofit/>
+              </a:bodyPr>
+              <a:lstStyle/>
+              <a:p>
+                <a:pPr algn="l">
+                  <a:lnSpc>
+                    <a:spcPct val="90000"/>
+                  </a:lnSpc>
+                  <a:spcBef>
+                    <a:spcPts val="4500"/>
+                  </a:spcBef>
+                  <a:defRPr sz="4800">
+                    <a:solidFill>
+                      <a:srgbClr val="000000"/>
+                    </a:solidFill>
+                  </a:defRPr>
+                </a:pPr>
+              </a:p>
+            </p:txBody>
+          </p:sp>
+          <p:sp>
+            <p:nvSpPr>
+              <p:cNvPr id="205" name="Line"/>
+              <p:cNvSpPr/>
+              <p:nvPr/>
+            </p:nvSpPr>
+            <p:spPr>
+              <a:xfrm flipV="1">
+                <a:off x="2326198" y="6036457"/>
+                <a:ext cx="295090" cy="280589"/>
+              </a:xfrm>
+              <a:prstGeom prst="line">
+                <a:avLst/>
+              </a:prstGeom>
+              <a:noFill/>
+              <a:ln w="63500" cap="flat">
+                <a:solidFill>
+                  <a:srgbClr val="0433FF"/>
+                </a:solidFill>
+                <a:prstDash val="solid"/>
+                <a:miter lim="400000"/>
+              </a:ln>
+              <a:effectLst/>
+            </p:spPr>
+            <p:txBody>
+              <a:bodyPr wrap="square" lIns="50800" tIns="50800" rIns="50800" bIns="50800" numCol="1" anchor="ctr">
+                <a:noAutofit/>
+              </a:bodyPr>
+              <a:lstStyle/>
+              <a:p>
+                <a:pPr algn="l">
+                  <a:lnSpc>
+                    <a:spcPct val="90000"/>
+                  </a:lnSpc>
+                  <a:spcBef>
+                    <a:spcPts val="4500"/>
+                  </a:spcBef>
+                  <a:defRPr sz="4800">
+                    <a:solidFill>
+                      <a:srgbClr val="000000"/>
+                    </a:solidFill>
+                  </a:defRPr>
+                </a:pPr>
+              </a:p>
+            </p:txBody>
+          </p:sp>
+          <p:sp>
+            <p:nvSpPr>
+              <p:cNvPr id="206" name="Line"/>
+              <p:cNvSpPr/>
+              <p:nvPr/>
+            </p:nvSpPr>
+            <p:spPr>
+              <a:xfrm flipV="1">
+                <a:off x="3562137" y="6402810"/>
+                <a:ext cx="60060" cy="403069"/>
+              </a:xfrm>
+              <a:prstGeom prst="line">
+                <a:avLst/>
+              </a:prstGeom>
+              <a:noFill/>
+              <a:ln w="63500" cap="flat">
+                <a:solidFill>
+                  <a:srgbClr val="0433FF"/>
+                </a:solidFill>
+                <a:prstDash val="solid"/>
+                <a:miter lim="400000"/>
+              </a:ln>
+              <a:effectLst/>
+            </p:spPr>
+            <p:txBody>
+              <a:bodyPr wrap="square" lIns="50800" tIns="50800" rIns="50800" bIns="50800" numCol="1" anchor="ctr">
+                <a:noAutofit/>
+              </a:bodyPr>
+              <a:lstStyle/>
+              <a:p>
+                <a:pPr algn="l">
+                  <a:lnSpc>
+                    <a:spcPct val="90000"/>
+                  </a:lnSpc>
+                  <a:spcBef>
+                    <a:spcPts val="4500"/>
+                  </a:spcBef>
+                  <a:defRPr sz="4800">
+                    <a:solidFill>
+                      <a:srgbClr val="000000"/>
+                    </a:solidFill>
+                  </a:defRPr>
+                </a:pPr>
+              </a:p>
+            </p:txBody>
+          </p:sp>
+          <p:sp>
+            <p:nvSpPr>
+              <p:cNvPr id="207" name="Line"/>
+              <p:cNvSpPr/>
+              <p:nvPr/>
+            </p:nvSpPr>
+            <p:spPr>
+              <a:xfrm flipV="1">
+                <a:off x="4827424" y="6436111"/>
+                <a:ext cx="1" cy="407534"/>
+              </a:xfrm>
+              <a:prstGeom prst="line">
+                <a:avLst/>
+              </a:prstGeom>
+              <a:noFill/>
+              <a:ln w="63500" cap="flat">
+                <a:solidFill>
+                  <a:srgbClr val="0433FF"/>
+                </a:solidFill>
+                <a:prstDash val="solid"/>
+                <a:miter lim="400000"/>
+              </a:ln>
+              <a:effectLst/>
+            </p:spPr>
+            <p:txBody>
+              <a:bodyPr wrap="square" lIns="50800" tIns="50800" rIns="50800" bIns="50800" numCol="1" anchor="ctr">
+                <a:noAutofit/>
+              </a:bodyPr>
+              <a:lstStyle/>
+              <a:p>
+                <a:pPr algn="l">
+                  <a:lnSpc>
+                    <a:spcPct val="90000"/>
+                  </a:lnSpc>
+                  <a:spcBef>
+                    <a:spcPts val="4500"/>
+                  </a:spcBef>
+                  <a:defRPr sz="4800">
+                    <a:solidFill>
+                      <a:srgbClr val="000000"/>
+                    </a:solidFill>
+                  </a:defRPr>
+                </a:pPr>
+              </a:p>
+            </p:txBody>
+          </p:sp>
+          <p:sp>
+            <p:nvSpPr>
+              <p:cNvPr id="208" name="Line"/>
+              <p:cNvSpPr/>
+              <p:nvPr/>
+            </p:nvSpPr>
+            <p:spPr>
+              <a:xfrm flipV="1">
+                <a:off x="5985975" y="6400578"/>
+                <a:ext cx="1" cy="407533"/>
+              </a:xfrm>
+              <a:prstGeom prst="line">
+                <a:avLst/>
+              </a:prstGeom>
+              <a:noFill/>
+              <a:ln w="63500" cap="flat">
+                <a:solidFill>
+                  <a:srgbClr val="0433FF"/>
+                </a:solidFill>
+                <a:prstDash val="solid"/>
+                <a:miter lim="400000"/>
+              </a:ln>
+              <a:effectLst/>
+            </p:spPr>
+            <p:txBody>
+              <a:bodyPr wrap="square" lIns="50800" tIns="50800" rIns="50800" bIns="50800" numCol="1" anchor="ctr">
+                <a:noAutofit/>
+              </a:bodyPr>
+              <a:lstStyle/>
+              <a:p>
+                <a:pPr algn="l">
+                  <a:lnSpc>
+                    <a:spcPct val="90000"/>
+                  </a:lnSpc>
+                  <a:spcBef>
+                    <a:spcPts val="4500"/>
+                  </a:spcBef>
+                  <a:defRPr sz="4800">
+                    <a:solidFill>
+                      <a:srgbClr val="000000"/>
+                    </a:solidFill>
+                  </a:defRPr>
+                </a:pPr>
+              </a:p>
+            </p:txBody>
+          </p:sp>
+          <p:sp>
+            <p:nvSpPr>
+              <p:cNvPr id="209" name="Line"/>
+              <p:cNvSpPr/>
+              <p:nvPr/>
+            </p:nvSpPr>
+            <p:spPr>
+              <a:xfrm flipV="1">
+                <a:off x="7162455" y="6400577"/>
+                <a:ext cx="1" cy="407534"/>
+              </a:xfrm>
+              <a:prstGeom prst="line">
+                <a:avLst/>
+              </a:prstGeom>
+              <a:noFill/>
+              <a:ln w="63500" cap="flat">
+                <a:solidFill>
+                  <a:srgbClr val="0433FF"/>
+                </a:solidFill>
+                <a:prstDash val="solid"/>
+                <a:miter lim="400000"/>
+              </a:ln>
+              <a:effectLst/>
+            </p:spPr>
+            <p:txBody>
+              <a:bodyPr wrap="square" lIns="50800" tIns="50800" rIns="50800" bIns="50800" numCol="1" anchor="ctr">
+                <a:noAutofit/>
+              </a:bodyPr>
+              <a:lstStyle/>
+              <a:p>
+                <a:pPr algn="l">
+                  <a:lnSpc>
+                    <a:spcPct val="90000"/>
+                  </a:lnSpc>
+                  <a:spcBef>
+                    <a:spcPts val="4500"/>
+                  </a:spcBef>
+                  <a:defRPr sz="4800">
+                    <a:solidFill>
+                      <a:srgbClr val="000000"/>
+                    </a:solidFill>
+                  </a:defRPr>
+                </a:pPr>
+              </a:p>
+            </p:txBody>
+          </p:sp>
+          <p:sp>
+            <p:nvSpPr>
+              <p:cNvPr id="210" name="Line"/>
+              <p:cNvSpPr/>
+              <p:nvPr/>
+            </p:nvSpPr>
+            <p:spPr>
+              <a:xfrm flipV="1">
+                <a:off x="8306354" y="6310788"/>
+                <a:ext cx="1" cy="407534"/>
+              </a:xfrm>
+              <a:prstGeom prst="line">
+                <a:avLst/>
+              </a:prstGeom>
+              <a:noFill/>
+              <a:ln w="63500" cap="flat">
+                <a:solidFill>
+                  <a:srgbClr val="0433FF"/>
+                </a:solidFill>
+                <a:prstDash val="solid"/>
+                <a:miter lim="400000"/>
+              </a:ln>
+              <a:effectLst/>
+            </p:spPr>
+            <p:txBody>
+              <a:bodyPr wrap="square" lIns="50800" tIns="50800" rIns="50800" bIns="50800" numCol="1" anchor="ctr">
+                <a:noAutofit/>
+              </a:bodyPr>
+              <a:lstStyle/>
+              <a:p>
+                <a:pPr algn="l">
+                  <a:lnSpc>
+                    <a:spcPct val="90000"/>
+                  </a:lnSpc>
+                  <a:spcBef>
+                    <a:spcPts val="4500"/>
+                  </a:spcBef>
+                  <a:defRPr sz="4800">
+                    <a:solidFill>
+                      <a:srgbClr val="000000"/>
+                    </a:solidFill>
+                  </a:defRPr>
+                </a:pPr>
+              </a:p>
+            </p:txBody>
+          </p:sp>
+          <p:sp>
+            <p:nvSpPr>
+              <p:cNvPr id="211" name="Line"/>
+              <p:cNvSpPr/>
+              <p:nvPr/>
+            </p:nvSpPr>
+            <p:spPr>
+              <a:xfrm flipH="1" flipV="1">
+                <a:off x="9386766" y="6025576"/>
+                <a:ext cx="256065" cy="316713"/>
+              </a:xfrm>
+              <a:prstGeom prst="line">
+                <a:avLst/>
+              </a:prstGeom>
+              <a:noFill/>
+              <a:ln w="63500" cap="flat">
+                <a:solidFill>
+                  <a:srgbClr val="0433FF"/>
+                </a:solidFill>
+                <a:prstDash val="solid"/>
+                <a:miter lim="400000"/>
+              </a:ln>
+              <a:effectLst/>
+            </p:spPr>
+            <p:txBody>
+              <a:bodyPr wrap="square" lIns="50800" tIns="50800" rIns="50800" bIns="50800" numCol="1" anchor="ctr">
+                <a:noAutofit/>
+              </a:bodyPr>
+              <a:lstStyle/>
+              <a:p>
+                <a:pPr algn="l">
+                  <a:lnSpc>
+                    <a:spcPct val="90000"/>
+                  </a:lnSpc>
+                  <a:spcBef>
+                    <a:spcPts val="4500"/>
+                  </a:spcBef>
+                  <a:defRPr sz="4800">
+                    <a:solidFill>
+                      <a:srgbClr val="000000"/>
+                    </a:solidFill>
+                  </a:defRPr>
+                </a:pPr>
+              </a:p>
+            </p:txBody>
+          </p:sp>
+          <p:sp>
+            <p:nvSpPr>
+              <p:cNvPr id="212" name="Line"/>
+              <p:cNvSpPr/>
+              <p:nvPr/>
+            </p:nvSpPr>
+            <p:spPr>
+              <a:xfrm flipH="1" flipV="1">
+                <a:off x="10198986" y="5159146"/>
+                <a:ext cx="379865" cy="146048"/>
+              </a:xfrm>
+              <a:prstGeom prst="line">
+                <a:avLst/>
+              </a:prstGeom>
+              <a:noFill/>
+              <a:ln w="63500" cap="flat">
+                <a:solidFill>
+                  <a:srgbClr val="0433FF"/>
+                </a:solidFill>
+                <a:prstDash val="solid"/>
+                <a:miter lim="400000"/>
+              </a:ln>
+              <a:effectLst/>
+            </p:spPr>
+            <p:txBody>
+              <a:bodyPr wrap="square" lIns="50800" tIns="50800" rIns="50800" bIns="50800" numCol="1" anchor="ctr">
+                <a:noAutofit/>
+              </a:bodyPr>
+              <a:lstStyle/>
+              <a:p>
+                <a:pPr algn="l">
+                  <a:lnSpc>
+                    <a:spcPct val="90000"/>
+                  </a:lnSpc>
+                  <a:spcBef>
+                    <a:spcPts val="4500"/>
+                  </a:spcBef>
+                  <a:defRPr sz="4800">
+                    <a:solidFill>
+                      <a:srgbClr val="000000"/>
+                    </a:solidFill>
+                  </a:defRPr>
+                </a:pPr>
+              </a:p>
+            </p:txBody>
+          </p:sp>
+          <p:sp>
+            <p:nvSpPr>
+              <p:cNvPr id="213" name="Line"/>
+              <p:cNvSpPr/>
+              <p:nvPr/>
+            </p:nvSpPr>
+            <p:spPr>
+              <a:xfrm flipH="1">
+                <a:off x="10416597" y="3904146"/>
+                <a:ext cx="396462" cy="91676"/>
+              </a:xfrm>
+              <a:prstGeom prst="line">
+                <a:avLst/>
+              </a:prstGeom>
+              <a:noFill/>
+              <a:ln w="63500" cap="flat">
+                <a:solidFill>
+                  <a:srgbClr val="0433FF"/>
+                </a:solidFill>
+                <a:prstDash val="solid"/>
+                <a:miter lim="400000"/>
+              </a:ln>
+              <a:effectLst/>
+            </p:spPr>
+            <p:txBody>
+              <a:bodyPr wrap="square" lIns="50800" tIns="50800" rIns="50800" bIns="50800" numCol="1" anchor="ctr">
+                <a:noAutofit/>
+              </a:bodyPr>
+              <a:lstStyle/>
+              <a:p>
+                <a:pPr algn="l">
+                  <a:lnSpc>
+                    <a:spcPct val="90000"/>
+                  </a:lnSpc>
+                  <a:spcBef>
+                    <a:spcPts val="4500"/>
+                  </a:spcBef>
+                  <a:defRPr sz="4800">
+                    <a:solidFill>
+                      <a:srgbClr val="000000"/>
+                    </a:solidFill>
+                  </a:defRPr>
+                </a:pPr>
+              </a:p>
+            </p:txBody>
+          </p:sp>
+          <p:sp>
+            <p:nvSpPr>
+              <p:cNvPr id="214" name="Line"/>
+              <p:cNvSpPr/>
+              <p:nvPr/>
+            </p:nvSpPr>
+            <p:spPr>
+              <a:xfrm flipH="1">
+                <a:off x="9898302" y="2649046"/>
+                <a:ext cx="307084" cy="267366"/>
+              </a:xfrm>
+              <a:prstGeom prst="line">
+                <a:avLst/>
+              </a:prstGeom>
+              <a:noFill/>
+              <a:ln w="63500" cap="flat">
+                <a:solidFill>
+                  <a:srgbClr val="0433FF"/>
+                </a:solidFill>
+                <a:prstDash val="solid"/>
+                <a:miter lim="400000"/>
+              </a:ln>
+              <a:effectLst/>
+            </p:spPr>
+            <p:txBody>
+              <a:bodyPr wrap="square" lIns="50800" tIns="50800" rIns="50800" bIns="50800" numCol="1" anchor="ctr">
+                <a:noAutofit/>
+              </a:bodyPr>
+              <a:lstStyle/>
+              <a:p>
+                <a:pPr algn="l">
+                  <a:lnSpc>
+                    <a:spcPct val="90000"/>
+                  </a:lnSpc>
+                  <a:spcBef>
+                    <a:spcPts val="4500"/>
+                  </a:spcBef>
+                  <a:defRPr sz="4800">
+                    <a:solidFill>
+                      <a:srgbClr val="000000"/>
+                    </a:solidFill>
+                  </a:defRPr>
+                </a:pPr>
+              </a:p>
+            </p:txBody>
+          </p:sp>
+          <p:sp>
+            <p:nvSpPr>
+              <p:cNvPr id="215" name="Line"/>
+              <p:cNvSpPr/>
+              <p:nvPr/>
+            </p:nvSpPr>
+            <p:spPr>
+              <a:xfrm flipH="1">
+                <a:off x="8933674" y="1882352"/>
+                <a:ext cx="77639" cy="400046"/>
+              </a:xfrm>
+              <a:prstGeom prst="line">
+                <a:avLst/>
+              </a:prstGeom>
+              <a:noFill/>
+              <a:ln w="63500" cap="flat">
+                <a:solidFill>
+                  <a:srgbClr val="0433FF"/>
+                </a:solidFill>
+                <a:prstDash val="solid"/>
+                <a:miter lim="400000"/>
+              </a:ln>
+              <a:effectLst/>
+            </p:spPr>
+            <p:txBody>
+              <a:bodyPr wrap="square" lIns="50800" tIns="50800" rIns="50800" bIns="50800" numCol="1" anchor="ctr">
+                <a:noAutofit/>
+              </a:bodyPr>
+              <a:lstStyle/>
+              <a:p>
+                <a:pPr algn="l">
+                  <a:lnSpc>
+                    <a:spcPct val="90000"/>
+                  </a:lnSpc>
+                  <a:spcBef>
+                    <a:spcPts val="4500"/>
+                  </a:spcBef>
+                  <a:defRPr sz="4800">
+                    <a:solidFill>
+                      <a:srgbClr val="000000"/>
+                    </a:solidFill>
+                  </a:defRPr>
+                </a:pPr>
+              </a:p>
+            </p:txBody>
+          </p:sp>
+        </p:grpSp>
         <p:sp>
           <p:nvSpPr>
-            <p:cNvPr id="198" name="Bumpers"/>
+            <p:cNvPr id="217" name="Triangle"/>
             <p:cNvSpPr/>
             <p:nvPr/>
           </p:nvSpPr>
           <p:spPr>
-            <a:xfrm rot="21600000">
-              <a:off x="0" y="-1"/>
-              <a:ext cx="12422786" cy="8468254"/>
+            <a:xfrm rot="8756139">
+              <a:off x="8864389" y="5521462"/>
+              <a:ext cx="2535354" cy="1268252"/>
             </a:xfrm>
             <a:custGeom>
               <a:avLst/>
@@ -9602,307 +10705,30 @@
               </a:cxnLst>
               <a:rect l="0" t="0" r="r" b="b"/>
               <a:pathLst>
-                <a:path w="21486" h="21591" fill="norm" stroke="1" extrusionOk="0">
+                <a:path w="21600" h="21600" fill="norm" stroke="1" extrusionOk="0">
                   <a:moveTo>
-                    <a:pt x="14355" y="1"/>
+                    <a:pt x="0" y="0"/>
                   </a:moveTo>
-                  <a:cubicBezTo>
-                    <a:pt x="14184" y="3"/>
-                    <a:pt x="14013" y="11"/>
-                    <a:pt x="13843" y="26"/>
-                  </a:cubicBezTo>
-                  <a:cubicBezTo>
-                    <a:pt x="13835" y="30"/>
-                    <a:pt x="13826" y="34"/>
-                    <a:pt x="13818" y="38"/>
-                  </a:cubicBezTo>
-                  <a:cubicBezTo>
-                    <a:pt x="13810" y="41"/>
-                    <a:pt x="13802" y="46"/>
-                    <a:pt x="13793" y="49"/>
-                  </a:cubicBezTo>
                   <a:lnTo>
-                    <a:pt x="13792" y="32"/>
+                    <a:pt x="10800" y="21600"/>
                   </a:lnTo>
                   <a:lnTo>
-                    <a:pt x="7548" y="539"/>
-                  </a:lnTo>
-                  <a:cubicBezTo>
-                    <a:pt x="6643" y="569"/>
-                    <a:pt x="5744" y="784"/>
-                    <a:pt x="4872" y="1174"/>
-                  </a:cubicBezTo>
-                  <a:cubicBezTo>
-                    <a:pt x="3433" y="1816"/>
-                    <a:pt x="2050" y="2938"/>
-                    <a:pt x="1143" y="4895"/>
-                  </a:cubicBezTo>
-                  <a:cubicBezTo>
-                    <a:pt x="94" y="7158"/>
-                    <a:pt x="-113" y="10020"/>
-                    <a:pt x="50" y="12758"/>
-                  </a:cubicBezTo>
-                  <a:cubicBezTo>
-                    <a:pt x="129" y="14081"/>
-                    <a:pt x="295" y="15418"/>
-                    <a:pt x="650" y="16641"/>
-                  </a:cubicBezTo>
-                  <a:cubicBezTo>
-                    <a:pt x="969" y="17743"/>
-                    <a:pt x="1437" y="18729"/>
-                    <a:pt x="2030" y="19522"/>
-                  </a:cubicBezTo>
-                  <a:cubicBezTo>
-                    <a:pt x="2668" y="20376"/>
-                    <a:pt x="3375" y="20932"/>
-                    <a:pt x="4119" y="21234"/>
-                  </a:cubicBezTo>
-                  <a:cubicBezTo>
-                    <a:pt x="4856" y="21534"/>
-                    <a:pt x="5617" y="21582"/>
-                    <a:pt x="6345" y="21591"/>
-                  </a:cubicBezTo>
-                  <a:cubicBezTo>
-                    <a:pt x="7075" y="21599"/>
-                    <a:pt x="7808" y="21561"/>
-                    <a:pt x="8544" y="21466"/>
-                  </a:cubicBezTo>
-                  <a:lnTo>
-                    <a:pt x="14566" y="21002"/>
+                    <a:pt x="21600" y="0"/>
                   </a:lnTo>
                   <a:lnTo>
-                    <a:pt x="14566" y="21002"/>
+                    <a:pt x="0" y="0"/>
                   </a:lnTo>
-                  <a:cubicBezTo>
-                    <a:pt x="14676" y="21007"/>
-                    <a:pt x="14786" y="20988"/>
-                    <a:pt x="14896" y="20966"/>
-                  </a:cubicBezTo>
-                  <a:cubicBezTo>
-                    <a:pt x="15005" y="20944"/>
-                    <a:pt x="15114" y="20919"/>
-                    <a:pt x="15224" y="20894"/>
-                  </a:cubicBezTo>
-                  <a:cubicBezTo>
-                    <a:pt x="16033" y="20716"/>
-                    <a:pt x="16838" y="20385"/>
-                    <a:pt x="17608" y="19879"/>
-                  </a:cubicBezTo>
-                  <a:cubicBezTo>
-                    <a:pt x="18367" y="19381"/>
-                    <a:pt x="19101" y="18707"/>
-                    <a:pt x="19717" y="17744"/>
-                  </a:cubicBezTo>
-                  <a:cubicBezTo>
-                    <a:pt x="20970" y="15786"/>
-                    <a:pt x="21485" y="13153"/>
-                    <a:pt x="21486" y="10553"/>
-                  </a:cubicBezTo>
-                  <a:cubicBezTo>
-                    <a:pt x="21487" y="7871"/>
-                    <a:pt x="20944" y="5084"/>
-                    <a:pt x="19644" y="3018"/>
-                  </a:cubicBezTo>
-                  <a:cubicBezTo>
-                    <a:pt x="18371" y="996"/>
-                    <a:pt x="16615" y="141"/>
-                    <a:pt x="14866" y="16"/>
-                  </a:cubicBezTo>
-                  <a:cubicBezTo>
-                    <a:pt x="14696" y="4"/>
-                    <a:pt x="14525" y="-1"/>
-                    <a:pt x="14355" y="1"/>
-                  </a:cubicBezTo>
-                  <a:close/>
-                </a:path>
-              </a:pathLst>
-            </a:custGeom>
-            <a:noFill/>
-            <a:ln w="63500" cap="flat">
-              <a:solidFill>
-                <a:srgbClr val="000000"/>
-              </a:solidFill>
-              <a:prstDash val="solid"/>
-              <a:miter lim="400000"/>
-            </a:ln>
-            <a:effectLst/>
-            <a:extLst>
-              <a:ext uri="{C572A759-6A51-4108-AA02-DFA0A04FC94B}">
-                <ma14:wrappingTextBoxFlag xmlns:ma14="http://schemas.microsoft.com/office/mac/drawingml/2011/main" val="1"/>
-              </a:ext>
-            </a:extLst>
-          </p:spPr>
-          <p:txBody>
-            <a:bodyPr wrap="square" lIns="50800" tIns="50800" rIns="50800" bIns="50800" numCol="1" anchor="ctr">
-              <a:noAutofit/>
-            </a:bodyPr>
-            <a:lstStyle>
-              <a:lvl1pPr defTabSz="825500">
-                <a:defRPr sz="3200">
-                  <a:solidFill>
-                    <a:srgbClr val="FFFFFF"/>
-                  </a:solidFill>
-                  <a:latin typeface="Helvetica Neue Medium"/>
-                  <a:ea typeface="Helvetica Neue Medium"/>
-                  <a:cs typeface="Helvetica Neue Medium"/>
-                  <a:sym typeface="Helvetica Neue Medium"/>
-                </a:defRPr>
-              </a:lvl1pPr>
-            </a:lstStyle>
-            <a:p>
-              <a:pPr/>
-              <a:r>
-                <a:t>]\</a:t>
-              </a:r>
-            </a:p>
-          </p:txBody>
-        </p:sp>
-        <p:sp>
-          <p:nvSpPr>
-            <p:cNvPr id="199" name="Outside Boundary"/>
-            <p:cNvSpPr/>
-            <p:nvPr/>
-          </p:nvSpPr>
-          <p:spPr>
-            <a:xfrm rot="21600000">
-              <a:off x="1162107" y="1076156"/>
-              <a:ext cx="10098571" cy="6315940"/>
-            </a:xfrm>
-            <a:custGeom>
-              <a:avLst/>
-              <a:gdLst/>
-              <a:ahLst/>
-              <a:cxnLst>
-                <a:cxn ang="0">
-                  <a:pos x="wd2" y="hd2"/>
-                </a:cxn>
-                <a:cxn ang="5400000">
-                  <a:pos x="wd2" y="hd2"/>
-                </a:cxn>
-                <a:cxn ang="10800000">
-                  <a:pos x="wd2" y="hd2"/>
-                </a:cxn>
-                <a:cxn ang="16200000">
-                  <a:pos x="wd2" y="hd2"/>
-                </a:cxn>
-              </a:cxnLst>
-              <a:rect l="0" t="0" r="r" b="b"/>
-              <a:pathLst>
-                <a:path w="21482" h="21591" fill="norm" stroke="1" extrusionOk="0">
-                  <a:moveTo>
-                    <a:pt x="14352" y="1"/>
-                  </a:moveTo>
-                  <a:cubicBezTo>
-                    <a:pt x="14182" y="3"/>
-                    <a:pt x="14011" y="11"/>
-                    <a:pt x="13841" y="26"/>
-                  </a:cubicBezTo>
-                  <a:cubicBezTo>
-                    <a:pt x="13824" y="33"/>
-                    <a:pt x="13808" y="42"/>
-                    <a:pt x="13791" y="49"/>
-                  </a:cubicBezTo>
-                  <a:lnTo>
-                    <a:pt x="13790" y="32"/>
-                  </a:lnTo>
-                  <a:lnTo>
-                    <a:pt x="7547" y="538"/>
-                  </a:lnTo>
-                  <a:cubicBezTo>
-                    <a:pt x="6642" y="569"/>
-                    <a:pt x="5743" y="784"/>
-                    <a:pt x="4871" y="1173"/>
-                  </a:cubicBezTo>
-                  <a:cubicBezTo>
-                    <a:pt x="3432" y="1816"/>
-                    <a:pt x="2050" y="2937"/>
-                    <a:pt x="1143" y="4895"/>
-                  </a:cubicBezTo>
-                  <a:cubicBezTo>
-                    <a:pt x="94" y="7158"/>
-                    <a:pt x="-113" y="10020"/>
-                    <a:pt x="50" y="12758"/>
-                  </a:cubicBezTo>
-                  <a:cubicBezTo>
-                    <a:pt x="129" y="14081"/>
-                    <a:pt x="295" y="15418"/>
-                    <a:pt x="650" y="16641"/>
-                  </a:cubicBezTo>
-                  <a:cubicBezTo>
-                    <a:pt x="969" y="17743"/>
-                    <a:pt x="1437" y="18729"/>
-                    <a:pt x="2029" y="19522"/>
-                  </a:cubicBezTo>
-                  <a:cubicBezTo>
-                    <a:pt x="2667" y="20376"/>
-                    <a:pt x="3374" y="20932"/>
-                    <a:pt x="4118" y="21234"/>
-                  </a:cubicBezTo>
-                  <a:cubicBezTo>
-                    <a:pt x="4855" y="21534"/>
-                    <a:pt x="5616" y="21582"/>
-                    <a:pt x="6344" y="21591"/>
-                  </a:cubicBezTo>
-                  <a:cubicBezTo>
-                    <a:pt x="7074" y="21599"/>
-                    <a:pt x="7807" y="21561"/>
-                    <a:pt x="8543" y="21466"/>
-                  </a:cubicBezTo>
-                  <a:lnTo>
-                    <a:pt x="14563" y="21002"/>
-                  </a:lnTo>
-                  <a:cubicBezTo>
-                    <a:pt x="14563" y="21002"/>
-                    <a:pt x="14564" y="21002"/>
-                    <a:pt x="14564" y="21002"/>
-                  </a:cubicBezTo>
-                  <a:cubicBezTo>
-                    <a:pt x="14789" y="21013"/>
-                    <a:pt x="15015" y="21000"/>
-                    <a:pt x="15241" y="20966"/>
-                  </a:cubicBezTo>
-                  <a:cubicBezTo>
-                    <a:pt x="16054" y="20843"/>
-                    <a:pt x="16844" y="20420"/>
-                    <a:pt x="17605" y="19879"/>
-                  </a:cubicBezTo>
-                  <a:cubicBezTo>
-                    <a:pt x="18351" y="19349"/>
-                    <a:pt x="19091" y="18698"/>
-                    <a:pt x="19714" y="17744"/>
-                  </a:cubicBezTo>
-                  <a:cubicBezTo>
-                    <a:pt x="20982" y="15803"/>
-                    <a:pt x="21487" y="13156"/>
-                    <a:pt x="21483" y="10553"/>
-                  </a:cubicBezTo>
-                  <a:cubicBezTo>
-                    <a:pt x="21478" y="7873"/>
-                    <a:pt x="20939" y="5084"/>
-                    <a:pt x="19640" y="3018"/>
-                  </a:cubicBezTo>
-                  <a:cubicBezTo>
-                    <a:pt x="18369" y="994"/>
-                    <a:pt x="16612" y="141"/>
-                    <a:pt x="14863" y="16"/>
-                  </a:cubicBezTo>
-                  <a:cubicBezTo>
-                    <a:pt x="14693" y="4"/>
-                    <a:pt x="14523" y="-1"/>
-                    <a:pt x="14352" y="1"/>
-                  </a:cubicBezTo>
                   <a:close/>
                 </a:path>
               </a:pathLst>
             </a:custGeom>
             <a:solidFill>
-              <a:srgbClr val="FFFFFF"/>
+              <a:srgbClr val="009051">
+                <a:alpha val="51345"/>
+              </a:srgbClr>
             </a:solidFill>
-            <a:ln w="63500" cap="flat">
-              <a:solidFill>
-                <a:srgbClr val="0433FF"/>
-              </a:solidFill>
-              <a:prstDash val="solid"/>
+            <a:ln w="12700" cap="flat">
+              <a:noFill/>
               <a:miter lim="400000"/>
             </a:ln>
             <a:effectLst/>
@@ -9929,28 +10755,199 @@
         </p:sp>
         <p:sp>
           <p:nvSpPr>
-            <p:cNvPr id="200" name="Inside Boundary"/>
+            <p:cNvPr id="218" name="Line"/>
             <p:cNvSpPr/>
             <p:nvPr/>
           </p:nvSpPr>
           <p:spPr>
-            <a:xfrm rot="21600000">
-              <a:off x="2739738" y="2796994"/>
-              <a:ext cx="6907716" cy="2865268"/>
+            <a:xfrm rot="18496556">
+              <a:off x="1651203" y="2576918"/>
+              <a:ext cx="4471770" cy="862974"/>
             </a:xfrm>
-            <a:prstGeom prst="roundRect">
-              <a:avLst>
-                <a:gd name="adj" fmla="val 48362"/>
-              </a:avLst>
+            <a:custGeom>
+              <a:avLst/>
+              <a:gdLst/>
+              <a:ahLst/>
+              <a:cxnLst>
+                <a:cxn ang="0">
+                  <a:pos x="wd2" y="hd2"/>
+                </a:cxn>
+                <a:cxn ang="5400000">
+                  <a:pos x="wd2" y="hd2"/>
+                </a:cxn>
+                <a:cxn ang="10800000">
+                  <a:pos x="wd2" y="hd2"/>
+                </a:cxn>
+                <a:cxn ang="16200000">
+                  <a:pos x="wd2" y="hd2"/>
+                </a:cxn>
+              </a:cxnLst>
+              <a:rect l="0" t="0" r="r" b="b"/>
+              <a:pathLst>
+                <a:path w="21600" h="20701" fill="norm" stroke="1" extrusionOk="0">
+                  <a:moveTo>
+                    <a:pt x="0" y="20701"/>
+                  </a:moveTo>
+                  <a:cubicBezTo>
+                    <a:pt x="2097" y="16024"/>
+                    <a:pt x="4259" y="12111"/>
+                    <a:pt x="6470" y="8992"/>
+                  </a:cubicBezTo>
+                  <a:cubicBezTo>
+                    <a:pt x="11386" y="2057"/>
+                    <a:pt x="16495" y="-899"/>
+                    <a:pt x="21600" y="237"/>
+                  </a:cubicBezTo>
+                </a:path>
+              </a:pathLst>
+            </a:custGeom>
+            <a:noFill/>
+            <a:ln w="63500" cap="flat">
+              <a:solidFill>
+                <a:srgbClr val="FF2600"/>
+              </a:solidFill>
+              <a:prstDash val="solid"/>
+              <a:miter lim="400000"/>
+              <a:tailEnd type="triangle" w="med" len="med"/>
+            </a:ln>
+            <a:effectLst/>
+          </p:spPr>
+          <p:txBody>
+            <a:bodyPr wrap="square" lIns="50800" tIns="50800" rIns="50800" bIns="50800" numCol="1" anchor="ctr">
+              <a:noAutofit/>
+            </a:bodyPr>
+            <a:lstStyle/>
+            <a:p>
+              <a:pPr/>
+            </a:p>
+          </p:txBody>
+        </p:sp>
+        <p:sp>
+          <p:nvSpPr>
+            <p:cNvPr id="219" name="Line"/>
+            <p:cNvSpPr/>
+            <p:nvPr/>
+          </p:nvSpPr>
+          <p:spPr>
+            <a:xfrm flipV="1">
+              <a:off x="9760012" y="3298510"/>
+              <a:ext cx="1881248" cy="2396354"/>
+            </a:xfrm>
+            <a:prstGeom prst="line">
+              <a:avLst/>
+            </a:prstGeom>
+            <a:noFill/>
+            <a:ln w="63500" cap="flat">
+              <a:solidFill>
+                <a:schemeClr val="accent4">
+                  <a:hueOff val="-858837"/>
+                  <a:lumOff val="-9791"/>
+                </a:schemeClr>
+              </a:solidFill>
+              <a:prstDash val="solid"/>
+              <a:miter lim="400000"/>
+              <a:tailEnd type="triangle" w="med" len="med"/>
+            </a:ln>
+            <a:effectLst/>
+          </p:spPr>
+          <p:txBody>
+            <a:bodyPr wrap="square" lIns="50800" tIns="50800" rIns="50800" bIns="50800" numCol="1" anchor="ctr">
+              <a:noAutofit/>
+            </a:bodyPr>
+            <a:lstStyle/>
+            <a:p>
+              <a:pPr/>
+            </a:p>
+          </p:txBody>
+        </p:sp>
+        <p:sp>
+          <p:nvSpPr>
+            <p:cNvPr id="220" name="Line"/>
+            <p:cNvSpPr/>
+            <p:nvPr/>
+          </p:nvSpPr>
+          <p:spPr>
+            <a:xfrm rot="16863997">
+              <a:off x="7195720" y="2329150"/>
+              <a:ext cx="4560007" cy="1954342"/>
+            </a:xfrm>
+            <a:custGeom>
+              <a:avLst/>
+              <a:gdLst/>
+              <a:ahLst/>
+              <a:cxnLst>
+                <a:cxn ang="0">
+                  <a:pos x="wd2" y="hd2"/>
+                </a:cxn>
+                <a:cxn ang="5400000">
+                  <a:pos x="wd2" y="hd2"/>
+                </a:cxn>
+                <a:cxn ang="10800000">
+                  <a:pos x="wd2" y="hd2"/>
+                </a:cxn>
+                <a:cxn ang="16200000">
+                  <a:pos x="wd2" y="hd2"/>
+                </a:cxn>
+              </a:cxnLst>
+              <a:rect l="0" t="0" r="r" b="b"/>
+              <a:pathLst>
+                <a:path w="21600" h="20897" fill="norm" stroke="1" extrusionOk="0">
+                  <a:moveTo>
+                    <a:pt x="0" y="18787"/>
+                  </a:moveTo>
+                  <a:cubicBezTo>
+                    <a:pt x="3636" y="21529"/>
+                    <a:pt x="7565" y="21600"/>
+                    <a:pt x="11220" y="18990"/>
+                  </a:cubicBezTo>
+                  <a:cubicBezTo>
+                    <a:pt x="15621" y="15847"/>
+                    <a:pt x="19330" y="9062"/>
+                    <a:pt x="21600" y="0"/>
+                  </a:cubicBezTo>
+                </a:path>
+              </a:pathLst>
+            </a:custGeom>
+            <a:noFill/>
+            <a:ln w="63500" cap="flat">
+              <a:solidFill>
+                <a:srgbClr val="FF2600"/>
+              </a:solidFill>
+              <a:prstDash val="solid"/>
+              <a:miter lim="400000"/>
+              <a:tailEnd type="triangle" w="med" len="med"/>
+            </a:ln>
+            <a:effectLst/>
+          </p:spPr>
+          <p:txBody>
+            <a:bodyPr wrap="square" lIns="50800" tIns="50800" rIns="50800" bIns="50800" numCol="1" anchor="ctr">
+              <a:noAutofit/>
+            </a:bodyPr>
+            <a:lstStyle/>
+            <a:p>
+              <a:pPr/>
+            </a:p>
+          </p:txBody>
+        </p:sp>
+        <p:sp>
+          <p:nvSpPr>
+            <p:cNvPr id="221" name="Circle"/>
+            <p:cNvSpPr/>
+            <p:nvPr/>
+          </p:nvSpPr>
+          <p:spPr>
+            <a:xfrm rot="16200000">
+              <a:off x="9687076" y="5568824"/>
+              <a:ext cx="243141" cy="242846"/>
+            </a:xfrm>
+            <a:prstGeom prst="ellipse">
+              <a:avLst/>
             </a:prstGeom>
             <a:solidFill>
-              <a:srgbClr val="D6D6D6"/>
+              <a:srgbClr val="000000"/>
             </a:solidFill>
-            <a:ln w="63500" cap="flat">
-              <a:solidFill>
-                <a:srgbClr val="0433FF"/>
-              </a:solidFill>
-              <a:prstDash val="solid"/>
+            <a:ln w="12700" cap="flat">
+              <a:noFill/>
               <a:miter lim="400000"/>
             </a:ln>
             <a:effectLst/>
@@ -9977,24 +10974,59 @@
         </p:sp>
         <p:sp>
           <p:nvSpPr>
-            <p:cNvPr id="201" name="Pivot Line"/>
+            <p:cNvPr id="222" name="Triangle"/>
             <p:cNvSpPr/>
             <p:nvPr/>
           </p:nvSpPr>
           <p:spPr>
-            <a:xfrm flipV="1">
-              <a:off x="4214645" y="1254811"/>
-              <a:ext cx="1" cy="1544175"/>
+            <a:xfrm rot="10783748">
+              <a:off x="7199826" y="6507382"/>
+              <a:ext cx="2016095" cy="1023503"/>
             </a:xfrm>
-            <a:prstGeom prst="line">
+            <a:custGeom>
               <a:avLst/>
-            </a:prstGeom>
-            <a:noFill/>
-            <a:ln w="63500" cap="flat">
-              <a:solidFill>
-                <a:srgbClr val="0433FF"/>
-              </a:solidFill>
-              <a:prstDash val="solid"/>
+              <a:gdLst/>
+              <a:ahLst/>
+              <a:cxnLst>
+                <a:cxn ang="0">
+                  <a:pos x="wd2" y="hd2"/>
+                </a:cxn>
+                <a:cxn ang="5400000">
+                  <a:pos x="wd2" y="hd2"/>
+                </a:cxn>
+                <a:cxn ang="10800000">
+                  <a:pos x="wd2" y="hd2"/>
+                </a:cxn>
+                <a:cxn ang="16200000">
+                  <a:pos x="wd2" y="hd2"/>
+                </a:cxn>
+              </a:cxnLst>
+              <a:rect l="0" t="0" r="r" b="b"/>
+              <a:pathLst>
+                <a:path w="21600" h="21600" fill="norm" stroke="1" extrusionOk="0">
+                  <a:moveTo>
+                    <a:pt x="0" y="0"/>
+                  </a:moveTo>
+                  <a:lnTo>
+                    <a:pt x="10800" y="21600"/>
+                  </a:lnTo>
+                  <a:lnTo>
+                    <a:pt x="21600" y="0"/>
+                  </a:lnTo>
+                  <a:lnTo>
+                    <a:pt x="0" y="0"/>
+                  </a:lnTo>
+                  <a:close/>
+                </a:path>
+              </a:pathLst>
+            </a:custGeom>
+            <a:solidFill>
+              <a:srgbClr val="009051">
+                <a:alpha val="51345"/>
+              </a:srgbClr>
+            </a:solidFill>
+            <a:ln w="12700" cap="flat">
+              <a:noFill/>
               <a:miter lim="400000"/>
             </a:ln>
             <a:effectLst/>
@@ -10005,17 +11037,15 @@
             </a:bodyPr>
             <a:lstStyle/>
             <a:p>
-              <a:pPr algn="l">
-                <a:lnSpc>
-                  <a:spcPct val="90000"/>
-                </a:lnSpc>
-                <a:spcBef>
-                  <a:spcPts val="4500"/>
-                </a:spcBef>
-                <a:defRPr sz="4800">
+              <a:pPr defTabSz="825500">
+                <a:defRPr sz="3200">
                   <a:solidFill>
-                    <a:srgbClr val="000000"/>
+                    <a:srgbClr val="FFFFFF"/>
                   </a:solidFill>
+                  <a:latin typeface="Helvetica Neue Medium"/>
+                  <a:ea typeface="Helvetica Neue Medium"/>
+                  <a:cs typeface="Helvetica Neue Medium"/>
+                  <a:sym typeface="Helvetica Neue Medium"/>
                 </a:defRPr>
               </a:pPr>
             </a:p>
@@ -10023,24 +11053,202 @@
         </p:sp>
         <p:sp>
           <p:nvSpPr>
-            <p:cNvPr id="202" name="Jammer Line"/>
+            <p:cNvPr id="223" name="Line"/>
             <p:cNvSpPr/>
             <p:nvPr/>
           </p:nvSpPr>
           <p:spPr>
-            <a:xfrm flipV="1">
-              <a:off x="7646141" y="1077941"/>
-              <a:ext cx="1" cy="1698481"/>
+            <a:xfrm rot="16398358">
+              <a:off x="5554018" y="3006363"/>
+              <a:ext cx="5637645" cy="1417070"/>
             </a:xfrm>
-            <a:prstGeom prst="line">
+            <a:custGeom>
               <a:avLst/>
-            </a:prstGeom>
+              <a:gdLst/>
+              <a:ahLst/>
+              <a:cxnLst>
+                <a:cxn ang="0">
+                  <a:pos x="wd2" y="hd2"/>
+                </a:cxn>
+                <a:cxn ang="5400000">
+                  <a:pos x="wd2" y="hd2"/>
+                </a:cxn>
+                <a:cxn ang="10800000">
+                  <a:pos x="wd2" y="hd2"/>
+                </a:cxn>
+                <a:cxn ang="16200000">
+                  <a:pos x="wd2" y="hd2"/>
+                </a:cxn>
+              </a:cxnLst>
+              <a:rect l="0" t="0" r="r" b="b"/>
+              <a:pathLst>
+                <a:path w="21600" h="20638" fill="norm" stroke="1" extrusionOk="0">
+                  <a:moveTo>
+                    <a:pt x="0" y="10385"/>
+                  </a:moveTo>
+                  <a:cubicBezTo>
+                    <a:pt x="3136" y="18074"/>
+                    <a:pt x="6855" y="21600"/>
+                    <a:pt x="10575" y="20412"/>
+                  </a:cubicBezTo>
+                  <a:cubicBezTo>
+                    <a:pt x="14792" y="19066"/>
+                    <a:pt x="18724" y="11786"/>
+                    <a:pt x="21600" y="0"/>
+                  </a:cubicBezTo>
+                </a:path>
+              </a:pathLst>
+            </a:custGeom>
             <a:noFill/>
             <a:ln w="63500" cap="flat">
               <a:solidFill>
-                <a:srgbClr val="0433FF"/>
+                <a:srgbClr val="FF2600"/>
               </a:solidFill>
               <a:prstDash val="solid"/>
+              <a:miter lim="400000"/>
+              <a:tailEnd type="triangle" w="med" len="med"/>
+            </a:ln>
+            <a:effectLst/>
+          </p:spPr>
+          <p:txBody>
+            <a:bodyPr wrap="square" lIns="50800" tIns="50800" rIns="50800" bIns="50800" numCol="1" anchor="ctr">
+              <a:noAutofit/>
+            </a:bodyPr>
+            <a:lstStyle/>
+            <a:p>
+              <a:pPr/>
+            </a:p>
+          </p:txBody>
+        </p:sp>
+        <p:sp>
+          <p:nvSpPr>
+            <p:cNvPr id="224" name="Line"/>
+            <p:cNvSpPr/>
+            <p:nvPr/>
+          </p:nvSpPr>
+          <p:spPr>
+            <a:xfrm rot="10516140">
+              <a:off x="2648831" y="6784532"/>
+              <a:ext cx="5636283" cy="592712"/>
+            </a:xfrm>
+            <a:custGeom>
+              <a:avLst/>
+              <a:gdLst/>
+              <a:ahLst/>
+              <a:cxnLst>
+                <a:cxn ang="0">
+                  <a:pos x="wd2" y="hd2"/>
+                </a:cxn>
+                <a:cxn ang="5400000">
+                  <a:pos x="wd2" y="hd2"/>
+                </a:cxn>
+                <a:cxn ang="10800000">
+                  <a:pos x="wd2" y="hd2"/>
+                </a:cxn>
+                <a:cxn ang="16200000">
+                  <a:pos x="wd2" y="hd2"/>
+                </a:cxn>
+              </a:cxnLst>
+              <a:rect l="0" t="0" r="r" b="b"/>
+              <a:pathLst>
+                <a:path w="21600" h="21600" fill="norm" stroke="1" extrusionOk="0">
+                  <a:moveTo>
+                    <a:pt x="0" y="21600"/>
+                  </a:moveTo>
+                  <a:cubicBezTo>
+                    <a:pt x="3226" y="18731"/>
+                    <a:pt x="6459" y="16514"/>
+                    <a:pt x="9695" y="14949"/>
+                  </a:cubicBezTo>
+                  <a:cubicBezTo>
+                    <a:pt x="11840" y="13913"/>
+                    <a:pt x="13988" y="13161"/>
+                    <a:pt x="16119" y="10621"/>
+                  </a:cubicBezTo>
+                  <a:cubicBezTo>
+                    <a:pt x="17972" y="8414"/>
+                    <a:pt x="19804" y="4863"/>
+                    <a:pt x="21600" y="0"/>
+                  </a:cubicBezTo>
+                </a:path>
+              </a:pathLst>
+            </a:custGeom>
+            <a:noFill/>
+            <a:ln w="63500" cap="flat">
+              <a:solidFill>
+                <a:srgbClr val="FF2600"/>
+              </a:solidFill>
+              <a:prstDash val="solid"/>
+              <a:miter lim="400000"/>
+              <a:tailEnd type="triangle" w="med" len="med"/>
+            </a:ln>
+            <a:effectLst/>
+          </p:spPr>
+          <p:txBody>
+            <a:bodyPr wrap="square" lIns="50800" tIns="50800" rIns="50800" bIns="50800" numCol="1" anchor="ctr">
+              <a:noAutofit/>
+            </a:bodyPr>
+            <a:lstStyle/>
+            <a:p>
+              <a:pPr/>
+            </a:p>
+          </p:txBody>
+        </p:sp>
+        <p:sp>
+          <p:nvSpPr>
+            <p:cNvPr id="225" name="Triangle"/>
+            <p:cNvSpPr/>
+            <p:nvPr/>
+          </p:nvSpPr>
+          <p:spPr>
+            <a:xfrm rot="15176208">
+              <a:off x="1285740" y="4695252"/>
+              <a:ext cx="2087165" cy="1104659"/>
+            </a:xfrm>
+            <a:custGeom>
+              <a:avLst/>
+              <a:gdLst/>
+              <a:ahLst/>
+              <a:cxnLst>
+                <a:cxn ang="0">
+                  <a:pos x="wd2" y="hd2"/>
+                </a:cxn>
+                <a:cxn ang="5400000">
+                  <a:pos x="wd2" y="hd2"/>
+                </a:cxn>
+                <a:cxn ang="10800000">
+                  <a:pos x="wd2" y="hd2"/>
+                </a:cxn>
+                <a:cxn ang="16200000">
+                  <a:pos x="wd2" y="hd2"/>
+                </a:cxn>
+              </a:cxnLst>
+              <a:rect l="0" t="0" r="r" b="b"/>
+              <a:pathLst>
+                <a:path w="21600" h="21600" fill="norm" stroke="1" extrusionOk="0">
+                  <a:moveTo>
+                    <a:pt x="0" y="0"/>
+                  </a:moveTo>
+                  <a:lnTo>
+                    <a:pt x="10800" y="21600"/>
+                  </a:lnTo>
+                  <a:lnTo>
+                    <a:pt x="21600" y="0"/>
+                  </a:lnTo>
+                  <a:lnTo>
+                    <a:pt x="0" y="0"/>
+                  </a:lnTo>
+                  <a:close/>
+                </a:path>
+              </a:pathLst>
+            </a:custGeom>
+            <a:solidFill>
+              <a:srgbClr val="009051">
+                <a:alpha val="51345"/>
+              </a:srgbClr>
+            </a:solidFill>
+            <a:ln w="12700" cap="flat">
+              <a:noFill/>
               <a:miter lim="400000"/>
             </a:ln>
             <a:effectLst/>
@@ -10051,17 +11259,15 @@
             </a:bodyPr>
             <a:lstStyle/>
             <a:p>
-              <a:pPr algn="l">
-                <a:lnSpc>
-                  <a:spcPct val="90000"/>
-                </a:lnSpc>
-                <a:spcBef>
-                  <a:spcPts val="4500"/>
-                </a:spcBef>
-                <a:defRPr sz="4800">
+              <a:pPr defTabSz="825500">
+                <a:defRPr sz="3200">
                   <a:solidFill>
-                    <a:srgbClr val="000000"/>
+                    <a:srgbClr val="FFFFFF"/>
                   </a:solidFill>
+                  <a:latin typeface="Helvetica Neue Medium"/>
+                  <a:ea typeface="Helvetica Neue Medium"/>
+                  <a:cs typeface="Helvetica Neue Medium"/>
+                  <a:sym typeface="Helvetica Neue Medium"/>
                 </a:defRPr>
               </a:pPr>
             </a:p>
@@ -10069,24 +11275,92 @@
         </p:sp>
         <p:sp>
           <p:nvSpPr>
-            <p:cNvPr id="203" name="Line"/>
+            <p:cNvPr id="226" name="Line"/>
             <p:cNvSpPr/>
             <p:nvPr/>
           </p:nvSpPr>
           <p:spPr>
-            <a:xfrm flipH="1" flipV="1">
-              <a:off x="2932039" y="2251406"/>
-              <a:ext cx="232981" cy="326890"/>
+            <a:xfrm rot="16185042">
+              <a:off x="995173" y="2713267"/>
+              <a:ext cx="3904029" cy="731151"/>
             </a:xfrm>
-            <a:prstGeom prst="line">
+            <a:custGeom>
               <a:avLst/>
-            </a:prstGeom>
+              <a:gdLst/>
+              <a:ahLst/>
+              <a:cxnLst>
+                <a:cxn ang="0">
+                  <a:pos x="wd2" y="hd2"/>
+                </a:cxn>
+                <a:cxn ang="5400000">
+                  <a:pos x="wd2" y="hd2"/>
+                </a:cxn>
+                <a:cxn ang="10800000">
+                  <a:pos x="wd2" y="hd2"/>
+                </a:cxn>
+                <a:cxn ang="16200000">
+                  <a:pos x="wd2" y="hd2"/>
+                </a:cxn>
+              </a:cxnLst>
+              <a:rect l="0" t="0" r="r" b="b"/>
+              <a:pathLst>
+                <a:path w="21600" h="19741" fill="norm" stroke="1" extrusionOk="0">
+                  <a:moveTo>
+                    <a:pt x="0" y="6760"/>
+                  </a:moveTo>
+                  <a:cubicBezTo>
+                    <a:pt x="4112" y="-287"/>
+                    <a:pt x="8535" y="-1859"/>
+                    <a:pt x="12812" y="2205"/>
+                  </a:cubicBezTo>
+                  <a:cubicBezTo>
+                    <a:pt x="15949" y="5185"/>
+                    <a:pt x="18935" y="11143"/>
+                    <a:pt x="21600" y="19741"/>
+                  </a:cubicBezTo>
+                </a:path>
+              </a:pathLst>
+            </a:custGeom>
             <a:noFill/>
             <a:ln w="63500" cap="flat">
               <a:solidFill>
-                <a:srgbClr val="0433FF"/>
+                <a:srgbClr val="FF2600"/>
               </a:solidFill>
               <a:prstDash val="solid"/>
+              <a:miter lim="400000"/>
+              <a:tailEnd type="triangle" w="med" len="med"/>
+            </a:ln>
+            <a:effectLst/>
+          </p:spPr>
+          <p:txBody>
+            <a:bodyPr wrap="square" lIns="50800" tIns="50800" rIns="50800" bIns="50800" numCol="1" anchor="ctr">
+              <a:noAutofit/>
+            </a:bodyPr>
+            <a:lstStyle/>
+            <a:p>
+              <a:pPr/>
+            </a:p>
+          </p:txBody>
+        </p:sp>
+        <p:sp>
+          <p:nvSpPr>
+            <p:cNvPr id="227" name="Circle"/>
+            <p:cNvSpPr/>
+            <p:nvPr/>
+          </p:nvSpPr>
+          <p:spPr>
+            <a:xfrm rot="16200000">
+              <a:off x="2709511" y="4963306"/>
+              <a:ext cx="243140" cy="242845"/>
+            </a:xfrm>
+            <a:prstGeom prst="ellipse">
+              <a:avLst/>
+            </a:prstGeom>
+            <a:solidFill>
+              <a:srgbClr val="000000"/>
+            </a:solidFill>
+            <a:ln w="12700" cap="flat">
+              <a:noFill/>
               <a:miter lim="400000"/>
             </a:ln>
             <a:effectLst/>
@@ -10097,17 +11371,15 @@
             </a:bodyPr>
             <a:lstStyle/>
             <a:p>
-              <a:pPr algn="l">
-                <a:lnSpc>
-                  <a:spcPct val="90000"/>
-                </a:lnSpc>
-                <a:spcBef>
-                  <a:spcPts val="4500"/>
-                </a:spcBef>
-                <a:defRPr sz="4800">
+              <a:pPr defTabSz="825500">
+                <a:defRPr sz="3200">
                   <a:solidFill>
-                    <a:srgbClr val="000000"/>
+                    <a:srgbClr val="FFFFFF"/>
                   </a:solidFill>
+                  <a:latin typeface="Helvetica Neue Medium"/>
+                  <a:ea typeface="Helvetica Neue Medium"/>
+                  <a:cs typeface="Helvetica Neue Medium"/>
+                  <a:sym typeface="Helvetica Neue Medium"/>
                 </a:defRPr>
               </a:pPr>
             </a:p>
@@ -10115,14 +11387,14 @@
         </p:sp>
         <p:sp>
           <p:nvSpPr>
-            <p:cNvPr id="204" name="Line"/>
+            <p:cNvPr id="228" name="Line"/>
             <p:cNvSpPr/>
             <p:nvPr/>
           </p:nvSpPr>
           <p:spPr>
-            <a:xfrm flipH="1" flipV="1">
-              <a:off x="1912208" y="3528669"/>
-              <a:ext cx="362191" cy="172912"/>
+            <a:xfrm>
+              <a:off x="8227136" y="6529535"/>
+              <a:ext cx="2397786" cy="730325"/>
             </a:xfrm>
             <a:prstGeom prst="line">
               <a:avLst/>
@@ -10130,9 +11402,163 @@
             <a:noFill/>
             <a:ln w="63500" cap="flat">
               <a:solidFill>
-                <a:srgbClr val="0433FF"/>
+                <a:schemeClr val="accent4">
+                  <a:hueOff val="-858837"/>
+                  <a:lumOff val="-9791"/>
+                </a:schemeClr>
               </a:solidFill>
               <a:prstDash val="solid"/>
+              <a:miter lim="400000"/>
+              <a:tailEnd type="triangle" w="med" len="med"/>
+            </a:ln>
+            <a:effectLst/>
+          </p:spPr>
+          <p:txBody>
+            <a:bodyPr wrap="square" lIns="50800" tIns="50800" rIns="50800" bIns="50800" numCol="1" anchor="ctr">
+              <a:noAutofit/>
+            </a:bodyPr>
+            <a:lstStyle/>
+            <a:p>
+              <a:pPr/>
+            </a:p>
+          </p:txBody>
+        </p:sp>
+        <p:sp>
+          <p:nvSpPr>
+            <p:cNvPr id="229" name="Line"/>
+            <p:cNvSpPr/>
+            <p:nvPr/>
+          </p:nvSpPr>
+          <p:spPr>
+            <a:xfrm flipH="1" flipV="1">
+              <a:off x="1192647" y="2782009"/>
+              <a:ext cx="1631634" cy="2256976"/>
+            </a:xfrm>
+            <a:prstGeom prst="line">
+              <a:avLst/>
+            </a:prstGeom>
+            <a:noFill/>
+            <a:ln w="63500" cap="flat">
+              <a:solidFill>
+                <a:schemeClr val="accent4">
+                  <a:hueOff val="-858837"/>
+                  <a:lumOff val="-9791"/>
+                </a:schemeClr>
+              </a:solidFill>
+              <a:prstDash val="solid"/>
+              <a:miter lim="400000"/>
+              <a:tailEnd type="triangle" w="med" len="med"/>
+            </a:ln>
+            <a:effectLst/>
+          </p:spPr>
+          <p:txBody>
+            <a:bodyPr wrap="square" lIns="50800" tIns="50800" rIns="50800" bIns="50800" numCol="1" anchor="ctr">
+              <a:noAutofit/>
+            </a:bodyPr>
+            <a:lstStyle/>
+            <a:p>
+              <a:pPr/>
+            </a:p>
+          </p:txBody>
+        </p:sp>
+        <p:sp>
+          <p:nvSpPr>
+            <p:cNvPr id="230" name="Line"/>
+            <p:cNvSpPr/>
+            <p:nvPr/>
+          </p:nvSpPr>
+          <p:spPr>
+            <a:xfrm rot="18496556">
+              <a:off x="2809167" y="4212686"/>
+              <a:ext cx="4738806" cy="4719490"/>
+            </a:xfrm>
+            <a:custGeom>
+              <a:avLst/>
+              <a:gdLst/>
+              <a:ahLst/>
+              <a:cxnLst>
+                <a:cxn ang="0">
+                  <a:pos x="wd2" y="hd2"/>
+                </a:cxn>
+                <a:cxn ang="5400000">
+                  <a:pos x="wd2" y="hd2"/>
+                </a:cxn>
+                <a:cxn ang="10800000">
+                  <a:pos x="wd2" y="hd2"/>
+                </a:cxn>
+                <a:cxn ang="16200000">
+                  <a:pos x="wd2" y="hd2"/>
+                </a:cxn>
+              </a:cxnLst>
+              <a:rect l="0" t="0" r="r" b="b"/>
+              <a:pathLst>
+                <a:path w="21482" h="21600" fill="norm" stroke="1" extrusionOk="0">
+                  <a:moveTo>
+                    <a:pt x="19126" y="21600"/>
+                  </a:moveTo>
+                  <a:cubicBezTo>
+                    <a:pt x="20616" y="20585"/>
+                    <a:pt x="21420" y="18876"/>
+                    <a:pt x="21479" y="17053"/>
+                  </a:cubicBezTo>
+                  <a:cubicBezTo>
+                    <a:pt x="21600" y="13242"/>
+                    <a:pt x="18777" y="10487"/>
+                    <a:pt x="16301" y="7865"/>
+                  </a:cubicBezTo>
+                  <a:cubicBezTo>
+                    <a:pt x="14535" y="5995"/>
+                    <a:pt x="12802" y="3910"/>
+                    <a:pt x="10477" y="2447"/>
+                  </a:cubicBezTo>
+                  <a:cubicBezTo>
+                    <a:pt x="7373" y="493"/>
+                    <a:pt x="3654" y="8"/>
+                    <a:pt x="0" y="0"/>
+                  </a:cubicBezTo>
+                </a:path>
+              </a:pathLst>
+            </a:custGeom>
+            <a:noFill/>
+            <a:ln w="63500" cap="flat">
+              <a:solidFill>
+                <a:srgbClr val="FF2600"/>
+              </a:solidFill>
+              <a:prstDash val="solid"/>
+              <a:miter lim="400000"/>
+              <a:tailEnd type="triangle" w="med" len="med"/>
+            </a:ln>
+            <a:effectLst/>
+          </p:spPr>
+          <p:txBody>
+            <a:bodyPr wrap="square" lIns="50800" tIns="50800" rIns="50800" bIns="50800" numCol="1" anchor="ctr">
+              <a:noAutofit/>
+            </a:bodyPr>
+            <a:lstStyle/>
+            <a:p>
+              <a:pPr/>
+            </a:p>
+          </p:txBody>
+        </p:sp>
+        <p:sp>
+          <p:nvSpPr>
+            <p:cNvPr id="231" name="Circle"/>
+            <p:cNvSpPr/>
+            <p:nvPr/>
+          </p:nvSpPr>
+          <p:spPr>
+            <a:xfrm rot="19190248">
+              <a:off x="8082812" y="6458802"/>
+              <a:ext cx="242968" cy="243018"/>
+            </a:xfrm>
+            <a:prstGeom prst="ellipse">
+              <a:avLst/>
+            </a:prstGeom>
+            <a:solidFill>
+              <a:srgbClr val="000000"/>
+            </a:solidFill>
+            <a:ln w="12700" cap="flat">
+              <a:noFill/>
               <a:miter lim="400000"/>
             </a:ln>
             <a:effectLst/>
@@ -10143,1134 +11569,21 @@
             </a:bodyPr>
             <a:lstStyle/>
             <a:p>
-              <a:pPr algn="l">
-                <a:lnSpc>
-                  <a:spcPct val="90000"/>
-                </a:lnSpc>
-                <a:spcBef>
-                  <a:spcPts val="4500"/>
-                </a:spcBef>
-                <a:defRPr sz="4800">
+              <a:pPr defTabSz="825500">
+                <a:defRPr sz="3200">
                   <a:solidFill>
-                    <a:srgbClr val="000000"/>
+                    <a:srgbClr val="FFFFFF"/>
                   </a:solidFill>
-                </a:defRPr>
-              </a:pPr>
-            </a:p>
-          </p:txBody>
-        </p:sp>
-        <p:sp>
-          <p:nvSpPr>
-            <p:cNvPr id="205" name="Line"/>
-            <p:cNvSpPr/>
-            <p:nvPr/>
-          </p:nvSpPr>
-          <p:spPr>
-            <a:xfrm flipH="1">
-              <a:off x="1782855" y="4840083"/>
-              <a:ext cx="397899" cy="52321"/>
-            </a:xfrm>
-            <a:prstGeom prst="line">
-              <a:avLst/>
-            </a:prstGeom>
-            <a:noFill/>
-            <a:ln w="63500" cap="flat">
-              <a:solidFill>
-                <a:srgbClr val="0433FF"/>
-              </a:solidFill>
-              <a:prstDash val="solid"/>
-              <a:miter lim="400000"/>
-            </a:ln>
-            <a:effectLst/>
-          </p:spPr>
-          <p:txBody>
-            <a:bodyPr wrap="square" lIns="50800" tIns="50800" rIns="50800" bIns="50800" numCol="1" anchor="ctr">
-              <a:noAutofit/>
-            </a:bodyPr>
-            <a:lstStyle/>
-            <a:p>
-              <a:pPr algn="l">
-                <a:lnSpc>
-                  <a:spcPct val="90000"/>
-                </a:lnSpc>
-                <a:spcBef>
-                  <a:spcPts val="4500"/>
-                </a:spcBef>
-                <a:defRPr sz="4800">
-                  <a:solidFill>
-                    <a:srgbClr val="000000"/>
-                  </a:solidFill>
-                </a:defRPr>
-              </a:pPr>
-            </a:p>
-          </p:txBody>
-        </p:sp>
-        <p:sp>
-          <p:nvSpPr>
-            <p:cNvPr id="206" name="Line"/>
-            <p:cNvSpPr/>
-            <p:nvPr/>
-          </p:nvSpPr>
-          <p:spPr>
-            <a:xfrm flipV="1">
-              <a:off x="2294362" y="5946610"/>
-              <a:ext cx="291051" cy="276413"/>
-            </a:xfrm>
-            <a:prstGeom prst="line">
-              <a:avLst/>
-            </a:prstGeom>
-            <a:noFill/>
-            <a:ln w="63500" cap="flat">
-              <a:solidFill>
-                <a:srgbClr val="0433FF"/>
-              </a:solidFill>
-              <a:prstDash val="solid"/>
-              <a:miter lim="400000"/>
-            </a:ln>
-            <a:effectLst/>
-          </p:spPr>
-          <p:txBody>
-            <a:bodyPr wrap="square" lIns="50800" tIns="50800" rIns="50800" bIns="50800" numCol="1" anchor="ctr">
-              <a:noAutofit/>
-            </a:bodyPr>
-            <a:lstStyle/>
-            <a:p>
-              <a:pPr algn="l">
-                <a:lnSpc>
-                  <a:spcPct val="90000"/>
-                </a:lnSpc>
-                <a:spcBef>
-                  <a:spcPts val="4500"/>
-                </a:spcBef>
-                <a:defRPr sz="4800">
-                  <a:solidFill>
-                    <a:srgbClr val="000000"/>
-                  </a:solidFill>
-                </a:defRPr>
-              </a:pPr>
-            </a:p>
-          </p:txBody>
-        </p:sp>
-        <p:sp>
-          <p:nvSpPr>
-            <p:cNvPr id="207" name="Line"/>
-            <p:cNvSpPr/>
-            <p:nvPr/>
-          </p:nvSpPr>
-          <p:spPr>
-            <a:xfrm flipV="1">
-              <a:off x="3513385" y="6307510"/>
-              <a:ext cx="59238" cy="397071"/>
-            </a:xfrm>
-            <a:prstGeom prst="line">
-              <a:avLst/>
-            </a:prstGeom>
-            <a:noFill/>
-            <a:ln w="63500" cap="flat">
-              <a:solidFill>
-                <a:srgbClr val="0433FF"/>
-              </a:solidFill>
-              <a:prstDash val="solid"/>
-              <a:miter lim="400000"/>
-            </a:ln>
-            <a:effectLst/>
-          </p:spPr>
-          <p:txBody>
-            <a:bodyPr wrap="square" lIns="50800" tIns="50800" rIns="50800" bIns="50800" numCol="1" anchor="ctr">
-              <a:noAutofit/>
-            </a:bodyPr>
-            <a:lstStyle/>
-            <a:p>
-              <a:pPr algn="l">
-                <a:lnSpc>
-                  <a:spcPct val="90000"/>
-                </a:lnSpc>
-                <a:spcBef>
-                  <a:spcPts val="4500"/>
-                </a:spcBef>
-                <a:defRPr sz="4800">
-                  <a:solidFill>
-                    <a:srgbClr val="000000"/>
-                  </a:solidFill>
-                </a:defRPr>
-              </a:pPr>
-            </a:p>
-          </p:txBody>
-        </p:sp>
-        <p:sp>
-          <p:nvSpPr>
-            <p:cNvPr id="208" name="Line"/>
-            <p:cNvSpPr/>
-            <p:nvPr/>
-          </p:nvSpPr>
-          <p:spPr>
-            <a:xfrm flipV="1">
-              <a:off x="4761355" y="6340316"/>
-              <a:ext cx="1" cy="401468"/>
-            </a:xfrm>
-            <a:prstGeom prst="line">
-              <a:avLst/>
-            </a:prstGeom>
-            <a:noFill/>
-            <a:ln w="63500" cap="flat">
-              <a:solidFill>
-                <a:srgbClr val="0433FF"/>
-              </a:solidFill>
-              <a:prstDash val="solid"/>
-              <a:miter lim="400000"/>
-            </a:ln>
-            <a:effectLst/>
-          </p:spPr>
-          <p:txBody>
-            <a:bodyPr wrap="square" lIns="50800" tIns="50800" rIns="50800" bIns="50800" numCol="1" anchor="ctr">
-              <a:noAutofit/>
-            </a:bodyPr>
-            <a:lstStyle/>
-            <a:p>
-              <a:pPr algn="l">
-                <a:lnSpc>
-                  <a:spcPct val="90000"/>
-                </a:lnSpc>
-                <a:spcBef>
-                  <a:spcPts val="4500"/>
-                </a:spcBef>
-                <a:defRPr sz="4800">
-                  <a:solidFill>
-                    <a:srgbClr val="000000"/>
-                  </a:solidFill>
-                </a:defRPr>
-              </a:pPr>
-            </a:p>
-          </p:txBody>
-        </p:sp>
-        <p:sp>
-          <p:nvSpPr>
-            <p:cNvPr id="209" name="Line"/>
-            <p:cNvSpPr/>
-            <p:nvPr/>
-          </p:nvSpPr>
-          <p:spPr>
-            <a:xfrm flipV="1">
-              <a:off x="5904050" y="6305312"/>
-              <a:ext cx="1" cy="401467"/>
-            </a:xfrm>
-            <a:prstGeom prst="line">
-              <a:avLst/>
-            </a:prstGeom>
-            <a:noFill/>
-            <a:ln w="63500" cap="flat">
-              <a:solidFill>
-                <a:srgbClr val="0433FF"/>
-              </a:solidFill>
-              <a:prstDash val="solid"/>
-              <a:miter lim="400000"/>
-            </a:ln>
-            <a:effectLst/>
-          </p:spPr>
-          <p:txBody>
-            <a:bodyPr wrap="square" lIns="50800" tIns="50800" rIns="50800" bIns="50800" numCol="1" anchor="ctr">
-              <a:noAutofit/>
-            </a:bodyPr>
-            <a:lstStyle/>
-            <a:p>
-              <a:pPr algn="l">
-                <a:lnSpc>
-                  <a:spcPct val="90000"/>
-                </a:lnSpc>
-                <a:spcBef>
-                  <a:spcPts val="4500"/>
-                </a:spcBef>
-                <a:defRPr sz="4800">
-                  <a:solidFill>
-                    <a:srgbClr val="000000"/>
-                  </a:solidFill>
-                </a:defRPr>
-              </a:pPr>
-            </a:p>
-          </p:txBody>
-        </p:sp>
-        <p:sp>
-          <p:nvSpPr>
-            <p:cNvPr id="210" name="Line"/>
-            <p:cNvSpPr/>
-            <p:nvPr/>
-          </p:nvSpPr>
-          <p:spPr>
-            <a:xfrm flipV="1">
-              <a:off x="7064428" y="6305312"/>
-              <a:ext cx="1" cy="401467"/>
-            </a:xfrm>
-            <a:prstGeom prst="line">
-              <a:avLst/>
-            </a:prstGeom>
-            <a:noFill/>
-            <a:ln w="63500" cap="flat">
-              <a:solidFill>
-                <a:srgbClr val="0433FF"/>
-              </a:solidFill>
-              <a:prstDash val="solid"/>
-              <a:miter lim="400000"/>
-            </a:ln>
-            <a:effectLst/>
-          </p:spPr>
-          <p:txBody>
-            <a:bodyPr wrap="square" lIns="50800" tIns="50800" rIns="50800" bIns="50800" numCol="1" anchor="ctr">
-              <a:noAutofit/>
-            </a:bodyPr>
-            <a:lstStyle/>
-            <a:p>
-              <a:pPr algn="l">
-                <a:lnSpc>
-                  <a:spcPct val="90000"/>
-                </a:lnSpc>
-                <a:spcBef>
-                  <a:spcPts val="4500"/>
-                </a:spcBef>
-                <a:defRPr sz="4800">
-                  <a:solidFill>
-                    <a:srgbClr val="000000"/>
-                  </a:solidFill>
-                </a:defRPr>
-              </a:pPr>
-            </a:p>
-          </p:txBody>
-        </p:sp>
-        <p:sp>
-          <p:nvSpPr>
-            <p:cNvPr id="211" name="Line"/>
-            <p:cNvSpPr/>
-            <p:nvPr/>
-          </p:nvSpPr>
-          <p:spPr>
-            <a:xfrm flipV="1">
-              <a:off x="8192671" y="6216859"/>
-              <a:ext cx="1" cy="401468"/>
-            </a:xfrm>
-            <a:prstGeom prst="line">
-              <a:avLst/>
-            </a:prstGeom>
-            <a:noFill/>
-            <a:ln w="63500" cap="flat">
-              <a:solidFill>
-                <a:srgbClr val="0433FF"/>
-              </a:solidFill>
-              <a:prstDash val="solid"/>
-              <a:miter lim="400000"/>
-            </a:ln>
-            <a:effectLst/>
-          </p:spPr>
-          <p:txBody>
-            <a:bodyPr wrap="square" lIns="50800" tIns="50800" rIns="50800" bIns="50800" numCol="1" anchor="ctr">
-              <a:noAutofit/>
-            </a:bodyPr>
-            <a:lstStyle/>
-            <a:p>
-              <a:pPr algn="l">
-                <a:lnSpc>
-                  <a:spcPct val="90000"/>
-                </a:lnSpc>
-                <a:spcBef>
-                  <a:spcPts val="4500"/>
-                </a:spcBef>
-                <a:defRPr sz="4800">
-                  <a:solidFill>
-                    <a:srgbClr val="000000"/>
-                  </a:solidFill>
-                </a:defRPr>
-              </a:pPr>
-            </a:p>
-          </p:txBody>
-        </p:sp>
-        <p:sp>
-          <p:nvSpPr>
-            <p:cNvPr id="212" name="Line"/>
-            <p:cNvSpPr/>
-            <p:nvPr/>
-          </p:nvSpPr>
-          <p:spPr>
-            <a:xfrm flipH="1" flipV="1">
-              <a:off x="9258296" y="5935892"/>
-              <a:ext cx="252561" cy="311999"/>
-            </a:xfrm>
-            <a:prstGeom prst="line">
-              <a:avLst/>
-            </a:prstGeom>
-            <a:noFill/>
-            <a:ln w="63500" cap="flat">
-              <a:solidFill>
-                <a:srgbClr val="0433FF"/>
-              </a:solidFill>
-              <a:prstDash val="solid"/>
-              <a:miter lim="400000"/>
-            </a:ln>
-            <a:effectLst/>
-          </p:spPr>
-          <p:txBody>
-            <a:bodyPr wrap="square" lIns="50800" tIns="50800" rIns="50800" bIns="50800" numCol="1" anchor="ctr">
-              <a:noAutofit/>
-            </a:bodyPr>
-            <a:lstStyle/>
-            <a:p>
-              <a:pPr algn="l">
-                <a:lnSpc>
-                  <a:spcPct val="90000"/>
-                </a:lnSpc>
-                <a:spcBef>
-                  <a:spcPts val="4500"/>
-                </a:spcBef>
-                <a:defRPr sz="4800">
-                  <a:solidFill>
-                    <a:srgbClr val="000000"/>
-                  </a:solidFill>
-                </a:defRPr>
-              </a:pPr>
-            </a:p>
-          </p:txBody>
-        </p:sp>
-        <p:sp>
-          <p:nvSpPr>
-            <p:cNvPr id="213" name="Line"/>
-            <p:cNvSpPr/>
-            <p:nvPr/>
-          </p:nvSpPr>
-          <p:spPr>
-            <a:xfrm flipH="1" flipV="1">
-              <a:off x="10059399" y="5082359"/>
-              <a:ext cx="374666" cy="143873"/>
-            </a:xfrm>
-            <a:prstGeom prst="line">
-              <a:avLst/>
-            </a:prstGeom>
-            <a:noFill/>
-            <a:ln w="63500" cap="flat">
-              <a:solidFill>
-                <a:srgbClr val="0433FF"/>
-              </a:solidFill>
-              <a:prstDash val="solid"/>
-              <a:miter lim="400000"/>
-            </a:ln>
-            <a:effectLst/>
-          </p:spPr>
-          <p:txBody>
-            <a:bodyPr wrap="square" lIns="50800" tIns="50800" rIns="50800" bIns="50800" numCol="1" anchor="ctr">
-              <a:noAutofit/>
-            </a:bodyPr>
-            <a:lstStyle/>
-            <a:p>
-              <a:pPr algn="l">
-                <a:lnSpc>
-                  <a:spcPct val="90000"/>
-                </a:lnSpc>
-                <a:spcBef>
-                  <a:spcPts val="4500"/>
-                </a:spcBef>
-                <a:defRPr sz="4800">
-                  <a:solidFill>
-                    <a:srgbClr val="000000"/>
-                  </a:solidFill>
-                </a:defRPr>
-              </a:pPr>
-            </a:p>
-          </p:txBody>
-        </p:sp>
-        <p:sp>
-          <p:nvSpPr>
-            <p:cNvPr id="214" name="Line"/>
-            <p:cNvSpPr/>
-            <p:nvPr/>
-          </p:nvSpPr>
-          <p:spPr>
-            <a:xfrm flipH="1">
-              <a:off x="10274032" y="3846038"/>
-              <a:ext cx="391036" cy="90312"/>
-            </a:xfrm>
-            <a:prstGeom prst="line">
-              <a:avLst/>
-            </a:prstGeom>
-            <a:noFill/>
-            <a:ln w="63500" cap="flat">
-              <a:solidFill>
-                <a:srgbClr val="0433FF"/>
-              </a:solidFill>
-              <a:prstDash val="solid"/>
-              <a:miter lim="400000"/>
-            </a:ln>
-            <a:effectLst/>
-          </p:spPr>
-          <p:txBody>
-            <a:bodyPr wrap="square" lIns="50800" tIns="50800" rIns="50800" bIns="50800" numCol="1" anchor="ctr">
-              <a:noAutofit/>
-            </a:bodyPr>
-            <a:lstStyle/>
-            <a:p>
-              <a:pPr algn="l">
-                <a:lnSpc>
-                  <a:spcPct val="90000"/>
-                </a:lnSpc>
-                <a:spcBef>
-                  <a:spcPts val="4500"/>
-                </a:spcBef>
-                <a:defRPr sz="4800">
-                  <a:solidFill>
-                    <a:srgbClr val="000000"/>
-                  </a:solidFill>
-                </a:defRPr>
-              </a:pPr>
-            </a:p>
-          </p:txBody>
-        </p:sp>
-        <p:sp>
-          <p:nvSpPr>
-            <p:cNvPr id="215" name="Line"/>
-            <p:cNvSpPr/>
-            <p:nvPr/>
-          </p:nvSpPr>
-          <p:spPr>
-            <a:xfrm flipH="1">
-              <a:off x="9762830" y="2609618"/>
-              <a:ext cx="302882" cy="263387"/>
-            </a:xfrm>
-            <a:prstGeom prst="line">
-              <a:avLst/>
-            </a:prstGeom>
-            <a:noFill/>
-            <a:ln w="63500" cap="flat">
-              <a:solidFill>
-                <a:srgbClr val="0433FF"/>
-              </a:solidFill>
-              <a:prstDash val="solid"/>
-              <a:miter lim="400000"/>
-            </a:ln>
-            <a:effectLst/>
-          </p:spPr>
-          <p:txBody>
-            <a:bodyPr wrap="square" lIns="50800" tIns="50800" rIns="50800" bIns="50800" numCol="1" anchor="ctr">
-              <a:noAutofit/>
-            </a:bodyPr>
-            <a:lstStyle/>
-            <a:p>
-              <a:pPr algn="l">
-                <a:lnSpc>
-                  <a:spcPct val="90000"/>
-                </a:lnSpc>
-                <a:spcBef>
-                  <a:spcPts val="4500"/>
-                </a:spcBef>
-                <a:defRPr sz="4800">
-                  <a:solidFill>
-                    <a:srgbClr val="000000"/>
-                  </a:solidFill>
-                </a:defRPr>
-              </a:pPr>
-            </a:p>
-          </p:txBody>
-        </p:sp>
-        <p:sp>
-          <p:nvSpPr>
-            <p:cNvPr id="216" name="Line"/>
-            <p:cNvSpPr/>
-            <p:nvPr/>
-          </p:nvSpPr>
-          <p:spPr>
-            <a:xfrm flipH="1">
-              <a:off x="8811404" y="1854336"/>
-              <a:ext cx="76577" cy="394092"/>
-            </a:xfrm>
-            <a:prstGeom prst="line">
-              <a:avLst/>
-            </a:prstGeom>
-            <a:noFill/>
-            <a:ln w="63500" cap="flat">
-              <a:solidFill>
-                <a:srgbClr val="0433FF"/>
-              </a:solidFill>
-              <a:prstDash val="solid"/>
-              <a:miter lim="400000"/>
-            </a:ln>
-            <a:effectLst/>
-          </p:spPr>
-          <p:txBody>
-            <a:bodyPr wrap="square" lIns="50800" tIns="50800" rIns="50800" bIns="50800" numCol="1" anchor="ctr">
-              <a:noAutofit/>
-            </a:bodyPr>
-            <a:lstStyle/>
-            <a:p>
-              <a:pPr algn="l">
-                <a:lnSpc>
-                  <a:spcPct val="90000"/>
-                </a:lnSpc>
-                <a:spcBef>
-                  <a:spcPts val="4500"/>
-                </a:spcBef>
-                <a:defRPr sz="4800">
-                  <a:solidFill>
-                    <a:srgbClr val="000000"/>
-                  </a:solidFill>
+                  <a:latin typeface="Helvetica Neue Medium"/>
+                  <a:ea typeface="Helvetica Neue Medium"/>
+                  <a:cs typeface="Helvetica Neue Medium"/>
+                  <a:sym typeface="Helvetica Neue Medium"/>
                 </a:defRPr>
               </a:pPr>
             </a:p>
           </p:txBody>
         </p:sp>
       </p:grpSp>
-      <p:sp>
-        <p:nvSpPr>
-          <p:cNvPr id="218" name="Triangle"/>
-          <p:cNvSpPr/>
-          <p:nvPr/>
-        </p:nvSpPr>
-        <p:spPr>
-          <a:xfrm rot="14158077">
-            <a:off x="14996045" y="10522593"/>
-            <a:ext cx="2499702" cy="1249851"/>
-          </a:xfrm>
-          <a:custGeom>
-            <a:avLst/>
-            <a:gdLst/>
-            <a:ahLst/>
-            <a:cxnLst>
-              <a:cxn ang="0">
-                <a:pos x="wd2" y="hd2"/>
-              </a:cxn>
-              <a:cxn ang="5400000">
-                <a:pos x="wd2" y="hd2"/>
-              </a:cxn>
-              <a:cxn ang="10800000">
-                <a:pos x="wd2" y="hd2"/>
-              </a:cxn>
-              <a:cxn ang="16200000">
-                <a:pos x="wd2" y="hd2"/>
-              </a:cxn>
-            </a:cxnLst>
-            <a:rect l="0" t="0" r="r" b="b"/>
-            <a:pathLst>
-              <a:path w="21600" h="21600" fill="norm" stroke="1" extrusionOk="0">
-                <a:moveTo>
-                  <a:pt x="0" y="0"/>
-                </a:moveTo>
-                <a:lnTo>
-                  <a:pt x="10800" y="21600"/>
-                </a:lnTo>
-                <a:lnTo>
-                  <a:pt x="21600" y="0"/>
-                </a:lnTo>
-                <a:lnTo>
-                  <a:pt x="0" y="0"/>
-                </a:lnTo>
-                <a:close/>
-              </a:path>
-            </a:pathLst>
-          </a:custGeom>
-          <a:solidFill>
-            <a:srgbClr val="009051">
-              <a:alpha val="51345"/>
-            </a:srgbClr>
-          </a:solidFill>
-          <a:ln w="12700">
-            <a:miter lim="400000"/>
-          </a:ln>
-        </p:spPr>
-        <p:txBody>
-          <a:bodyPr lIns="50800" tIns="50800" rIns="50800" bIns="50800" anchor="ctr"/>
-          <a:lstStyle/>
-          <a:p>
-            <a:pPr defTabSz="825500">
-              <a:defRPr sz="3200">
-                <a:solidFill>
-                  <a:srgbClr val="FFFFFF"/>
-                </a:solidFill>
-                <a:latin typeface="Helvetica Neue Medium"/>
-                <a:ea typeface="Helvetica Neue Medium"/>
-                <a:cs typeface="Helvetica Neue Medium"/>
-                <a:sym typeface="Helvetica Neue Medium"/>
-              </a:defRPr>
-            </a:pPr>
-          </a:p>
-        </p:txBody>
-      </p:sp>
-      <p:sp>
-        <p:nvSpPr>
-          <p:cNvPr id="219" name="Line"/>
-          <p:cNvSpPr/>
-          <p:nvPr/>
-        </p:nvSpPr>
-        <p:spPr>
-          <a:xfrm>
-            <a:off x="17353410" y="3310412"/>
-            <a:ext cx="4058565" cy="3206391"/>
-          </a:xfrm>
-          <a:prstGeom prst="line">
-            <a:avLst/>
-          </a:prstGeom>
-          <a:ln w="63500">
-            <a:solidFill>
-              <a:srgbClr val="FF2600"/>
-            </a:solidFill>
-            <a:miter lim="400000"/>
-            <a:tailEnd type="triangle"/>
-          </a:ln>
-        </p:spPr>
-        <p:txBody>
-          <a:bodyPr lIns="50800" tIns="50800" rIns="50800" bIns="50800" anchor="ctr"/>
-          <a:lstStyle/>
-          <a:p>
-            <a:pPr/>
-          </a:p>
-        </p:txBody>
-      </p:sp>
-      <p:sp>
-        <p:nvSpPr>
-          <p:cNvPr id="220" name="Line"/>
-          <p:cNvSpPr/>
-          <p:nvPr/>
-        </p:nvSpPr>
-        <p:spPr>
-          <a:xfrm>
-            <a:off x="16699763" y="10780557"/>
-            <a:ext cx="2360686" cy="1855500"/>
-          </a:xfrm>
-          <a:prstGeom prst="line">
-            <a:avLst/>
-          </a:prstGeom>
-          <a:ln w="63500">
-            <a:solidFill>
-              <a:schemeClr val="accent4">
-                <a:hueOff val="-858837"/>
-                <a:lumOff val="-9791"/>
-              </a:schemeClr>
-            </a:solidFill>
-            <a:miter lim="400000"/>
-            <a:tailEnd type="triangle"/>
-          </a:ln>
-        </p:spPr>
-        <p:txBody>
-          <a:bodyPr lIns="50800" tIns="50800" rIns="50800" bIns="50800" anchor="ctr"/>
-          <a:lstStyle/>
-          <a:p>
-            <a:pPr/>
-          </a:p>
-        </p:txBody>
-      </p:sp>
-      <p:sp>
-        <p:nvSpPr>
-          <p:cNvPr id="221" name="Line"/>
-          <p:cNvSpPr/>
-          <p:nvPr/>
-        </p:nvSpPr>
-        <p:spPr>
-          <a:xfrm rot="664785">
-            <a:off x="16806586" y="9536405"/>
-            <a:ext cx="4492337" cy="1927507"/>
-          </a:xfrm>
-          <a:custGeom>
-            <a:avLst/>
-            <a:gdLst/>
-            <a:ahLst/>
-            <a:cxnLst>
-              <a:cxn ang="0">
-                <a:pos x="wd2" y="hd2"/>
-              </a:cxn>
-              <a:cxn ang="5400000">
-                <a:pos x="wd2" y="hd2"/>
-              </a:cxn>
-              <a:cxn ang="10800000">
-                <a:pos x="wd2" y="hd2"/>
-              </a:cxn>
-              <a:cxn ang="16200000">
-                <a:pos x="wd2" y="hd2"/>
-              </a:cxn>
-            </a:cxnLst>
-            <a:rect l="0" t="0" r="r" b="b"/>
-            <a:pathLst>
-              <a:path w="21600" h="20897" fill="norm" stroke="1" extrusionOk="0">
-                <a:moveTo>
-                  <a:pt x="0" y="18787"/>
-                </a:moveTo>
-                <a:cubicBezTo>
-                  <a:pt x="3636" y="21529"/>
-                  <a:pt x="7565" y="21600"/>
-                  <a:pt x="11220" y="18990"/>
-                </a:cubicBezTo>
-                <a:cubicBezTo>
-                  <a:pt x="15621" y="15847"/>
-                  <a:pt x="19330" y="9062"/>
-                  <a:pt x="21600" y="0"/>
-                </a:cubicBezTo>
-              </a:path>
-            </a:pathLst>
-          </a:custGeom>
-          <a:ln w="63500">
-            <a:solidFill>
-              <a:srgbClr val="FF2600"/>
-            </a:solidFill>
-            <a:miter lim="400000"/>
-            <a:tailEnd type="triangle"/>
-          </a:ln>
-        </p:spPr>
-        <p:txBody>
-          <a:bodyPr lIns="50800" tIns="50800" rIns="50800" bIns="50800" anchor="ctr"/>
-          <a:lstStyle/>
-          <a:p>
-            <a:pPr/>
-          </a:p>
-        </p:txBody>
-      </p:sp>
-      <p:sp>
-        <p:nvSpPr>
-          <p:cNvPr id="222" name="Circle"/>
-          <p:cNvSpPr/>
-          <p:nvPr/>
-        </p:nvSpPr>
-        <p:spPr>
-          <a:xfrm>
-            <a:off x="16584550" y="10708765"/>
-            <a:ext cx="239522" cy="239522"/>
-          </a:xfrm>
-          <a:prstGeom prst="ellipse">
-            <a:avLst/>
-          </a:prstGeom>
-          <a:solidFill>
-            <a:srgbClr val="000000"/>
-          </a:solidFill>
-          <a:ln w="12700">
-            <a:miter lim="400000"/>
-          </a:ln>
-        </p:spPr>
-        <p:txBody>
-          <a:bodyPr lIns="50800" tIns="50800" rIns="50800" bIns="50800" anchor="ctr"/>
-          <a:lstStyle/>
-          <a:p>
-            <a:pPr defTabSz="825500">
-              <a:defRPr sz="3200">
-                <a:solidFill>
-                  <a:srgbClr val="FFFFFF"/>
-                </a:solidFill>
-                <a:latin typeface="Helvetica Neue Medium"/>
-                <a:ea typeface="Helvetica Neue Medium"/>
-                <a:cs typeface="Helvetica Neue Medium"/>
-                <a:sym typeface="Helvetica Neue Medium"/>
-              </a:defRPr>
-            </a:pPr>
-          </a:p>
-        </p:txBody>
-      </p:sp>
-      <p:sp>
-        <p:nvSpPr>
-          <p:cNvPr id="223" name="Triangle"/>
-          <p:cNvSpPr/>
-          <p:nvPr/>
-        </p:nvSpPr>
-        <p:spPr>
-          <a:xfrm rot="16183768">
-            <a:off x="14400953" y="8745526"/>
-            <a:ext cx="1988502" cy="1008269"/>
-          </a:xfrm>
-          <a:custGeom>
-            <a:avLst/>
-            <a:gdLst/>
-            <a:ahLst/>
-            <a:cxnLst>
-              <a:cxn ang="0">
-                <a:pos x="wd2" y="hd2"/>
-              </a:cxn>
-              <a:cxn ang="5400000">
-                <a:pos x="wd2" y="hd2"/>
-              </a:cxn>
-              <a:cxn ang="10800000">
-                <a:pos x="wd2" y="hd2"/>
-              </a:cxn>
-              <a:cxn ang="16200000">
-                <a:pos x="wd2" y="hd2"/>
-              </a:cxn>
-            </a:cxnLst>
-            <a:rect l="0" t="0" r="r" b="b"/>
-            <a:pathLst>
-              <a:path w="21600" h="21600" fill="norm" stroke="1" extrusionOk="0">
-                <a:moveTo>
-                  <a:pt x="0" y="0"/>
-                </a:moveTo>
-                <a:lnTo>
-                  <a:pt x="10800" y="21600"/>
-                </a:lnTo>
-                <a:lnTo>
-                  <a:pt x="21600" y="0"/>
-                </a:lnTo>
-                <a:lnTo>
-                  <a:pt x="0" y="0"/>
-                </a:lnTo>
-                <a:close/>
-              </a:path>
-            </a:pathLst>
-          </a:custGeom>
-          <a:solidFill>
-            <a:srgbClr val="009051">
-              <a:alpha val="51345"/>
-            </a:srgbClr>
-          </a:solidFill>
-          <a:ln w="12700">
-            <a:miter lim="400000"/>
-          </a:ln>
-        </p:spPr>
-        <p:txBody>
-          <a:bodyPr lIns="50800" tIns="50800" rIns="50800" bIns="50800" anchor="ctr"/>
-          <a:lstStyle/>
-          <a:p>
-            <a:pPr defTabSz="825500">
-              <a:defRPr sz="3200">
-                <a:solidFill>
-                  <a:srgbClr val="FFFFFF"/>
-                </a:solidFill>
-                <a:latin typeface="Helvetica Neue Medium"/>
-                <a:ea typeface="Helvetica Neue Medium"/>
-                <a:cs typeface="Helvetica Neue Medium"/>
-                <a:sym typeface="Helvetica Neue Medium"/>
-              </a:defRPr>
-            </a:pPr>
-          </a:p>
-        </p:txBody>
-      </p:sp>
-      <p:sp>
-        <p:nvSpPr>
-          <p:cNvPr id="224" name="Line"/>
-          <p:cNvSpPr/>
-          <p:nvPr/>
-        </p:nvSpPr>
-        <p:spPr>
-          <a:xfrm>
-            <a:off x="15877753" y="9256534"/>
-            <a:ext cx="5733881" cy="331615"/>
-          </a:xfrm>
-          <a:prstGeom prst="line">
-            <a:avLst/>
-          </a:prstGeom>
-          <a:ln w="63500">
-            <a:solidFill>
-              <a:srgbClr val="FF2600"/>
-            </a:solidFill>
-            <a:miter lim="400000"/>
-            <a:tailEnd type="triangle"/>
-          </a:ln>
-        </p:spPr>
-        <p:txBody>
-          <a:bodyPr lIns="50800" tIns="50800" rIns="50800" bIns="50800" anchor="ctr"/>
-          <a:lstStyle/>
-          <a:p>
-            <a:pPr/>
-          </a:p>
-        </p:txBody>
-      </p:sp>
-      <p:sp>
-        <p:nvSpPr>
-          <p:cNvPr id="225" name="Line"/>
-          <p:cNvSpPr/>
-          <p:nvPr/>
-        </p:nvSpPr>
-        <p:spPr>
-          <a:xfrm flipH="1" flipV="1">
-            <a:off x="15347345" y="3159299"/>
-            <a:ext cx="506952" cy="6133026"/>
-          </a:xfrm>
-          <a:prstGeom prst="line">
-            <a:avLst/>
-          </a:prstGeom>
-          <a:ln w="63500">
-            <a:solidFill>
-              <a:srgbClr val="FF2600"/>
-            </a:solidFill>
-            <a:miter lim="400000"/>
-            <a:tailEnd type="triangle"/>
-          </a:ln>
-        </p:spPr>
-        <p:txBody>
-          <a:bodyPr lIns="50800" tIns="50800" rIns="50800" bIns="50800" anchor="ctr"/>
-          <a:lstStyle/>
-          <a:p>
-            <a:pPr/>
-          </a:p>
-        </p:txBody>
-      </p:sp>
-      <p:sp>
-        <p:nvSpPr>
-          <p:cNvPr id="226" name="Circle"/>
-          <p:cNvSpPr/>
-          <p:nvPr/>
-        </p:nvSpPr>
-        <p:spPr>
-          <a:xfrm rot="2992306">
-            <a:off x="15707734" y="9126372"/>
-            <a:ext cx="239521" cy="239521"/>
-          </a:xfrm>
-          <a:prstGeom prst="ellipse">
-            <a:avLst/>
-          </a:prstGeom>
-          <a:solidFill>
-            <a:srgbClr val="000000"/>
-          </a:solidFill>
-          <a:ln w="12700">
-            <a:miter lim="400000"/>
-          </a:ln>
-        </p:spPr>
-        <p:txBody>
-          <a:bodyPr lIns="50800" tIns="50800" rIns="50800" bIns="50800" anchor="ctr"/>
-          <a:lstStyle/>
-          <a:p>
-            <a:pPr defTabSz="825500">
-              <a:defRPr sz="3200">
-                <a:solidFill>
-                  <a:srgbClr val="FFFFFF"/>
-                </a:solidFill>
-                <a:latin typeface="Helvetica Neue Medium"/>
-                <a:ea typeface="Helvetica Neue Medium"/>
-                <a:cs typeface="Helvetica Neue Medium"/>
-                <a:sym typeface="Helvetica Neue Medium"/>
-              </a:defRPr>
-            </a:pPr>
-          </a:p>
-        </p:txBody>
-      </p:sp>
-      <p:sp>
-        <p:nvSpPr>
-          <p:cNvPr id="227" name="Triangle"/>
-          <p:cNvSpPr/>
-          <p:nvPr/>
-        </p:nvSpPr>
-        <p:spPr>
-          <a:xfrm rot="20575036">
-            <a:off x="16112230" y="2261532"/>
-            <a:ext cx="2056315" cy="1089425"/>
-          </a:xfrm>
-          <a:custGeom>
-            <a:avLst/>
-            <a:gdLst/>
-            <a:ahLst/>
-            <a:cxnLst>
-              <a:cxn ang="0">
-                <a:pos x="wd2" y="hd2"/>
-              </a:cxn>
-              <a:cxn ang="5400000">
-                <a:pos x="wd2" y="hd2"/>
-              </a:cxn>
-              <a:cxn ang="10800000">
-                <a:pos x="wd2" y="hd2"/>
-              </a:cxn>
-              <a:cxn ang="16200000">
-                <a:pos x="wd2" y="hd2"/>
-              </a:cxn>
-            </a:cxnLst>
-            <a:rect l="0" t="0" r="r" b="b"/>
-            <a:pathLst>
-              <a:path w="21600" h="21600" fill="norm" stroke="1" extrusionOk="0">
-                <a:moveTo>
-                  <a:pt x="0" y="0"/>
-                </a:moveTo>
-                <a:lnTo>
-                  <a:pt x="10800" y="21600"/>
-                </a:lnTo>
-                <a:lnTo>
-                  <a:pt x="21600" y="0"/>
-                </a:lnTo>
-                <a:lnTo>
-                  <a:pt x="0" y="0"/>
-                </a:lnTo>
-                <a:close/>
-              </a:path>
-            </a:pathLst>
-          </a:custGeom>
-          <a:solidFill>
-            <a:srgbClr val="009051">
-              <a:alpha val="51345"/>
-            </a:srgbClr>
-          </a:solidFill>
-          <a:ln w="12700">
-            <a:miter lim="400000"/>
-          </a:ln>
-        </p:spPr>
-        <p:txBody>
-          <a:bodyPr lIns="50800" tIns="50800" rIns="50800" bIns="50800" anchor="ctr"/>
-          <a:lstStyle/>
-          <a:p>
-            <a:pPr defTabSz="825500">
-              <a:defRPr sz="3200">
-                <a:solidFill>
-                  <a:srgbClr val="FFFFFF"/>
-                </a:solidFill>
-                <a:latin typeface="Helvetica Neue Medium"/>
-                <a:ea typeface="Helvetica Neue Medium"/>
-                <a:cs typeface="Helvetica Neue Medium"/>
-                <a:sym typeface="Helvetica Neue Medium"/>
-              </a:defRPr>
-            </a:pPr>
-          </a:p>
-        </p:txBody>
-      </p:sp>
-      <p:sp>
-        <p:nvSpPr>
-          <p:cNvPr id="228" name="Line"/>
-          <p:cNvSpPr/>
-          <p:nvPr/>
-        </p:nvSpPr>
-        <p:spPr>
-          <a:xfrm flipV="1">
-            <a:off x="17353410" y="3295008"/>
-            <a:ext cx="3536016" cy="15404"/>
-          </a:xfrm>
-          <a:prstGeom prst="line">
-            <a:avLst/>
-          </a:prstGeom>
-          <a:ln w="63500">
-            <a:solidFill>
-              <a:srgbClr val="FF2600"/>
-            </a:solidFill>
-            <a:miter lim="400000"/>
-            <a:tailEnd type="triangle"/>
-          </a:ln>
-        </p:spPr>
-        <p:txBody>
-          <a:bodyPr lIns="50800" tIns="50800" rIns="50800" bIns="50800" anchor="ctr"/>
-          <a:lstStyle/>
-          <a:p>
-            <a:pPr/>
-          </a:p>
-        </p:txBody>
-      </p:sp>
-      <p:sp>
-        <p:nvSpPr>
-          <p:cNvPr id="229" name="Circle"/>
-          <p:cNvSpPr/>
-          <p:nvPr/>
-        </p:nvSpPr>
-        <p:spPr>
-          <a:xfrm>
-            <a:off x="17181056" y="3181374"/>
-            <a:ext cx="239522" cy="239522"/>
-          </a:xfrm>
-          <a:prstGeom prst="ellipse">
-            <a:avLst/>
-          </a:prstGeom>
-          <a:solidFill>
-            <a:srgbClr val="000000"/>
-          </a:solidFill>
-          <a:ln w="12700">
-            <a:miter lim="400000"/>
-          </a:ln>
-        </p:spPr>
-        <p:txBody>
-          <a:bodyPr lIns="50800" tIns="50800" rIns="50800" bIns="50800" anchor="ctr"/>
-          <a:lstStyle/>
-          <a:p>
-            <a:pPr defTabSz="825500">
-              <a:defRPr sz="3200">
-                <a:solidFill>
-                  <a:srgbClr val="FFFFFF"/>
-                </a:solidFill>
-                <a:latin typeface="Helvetica Neue Medium"/>
-                <a:ea typeface="Helvetica Neue Medium"/>
-                <a:cs typeface="Helvetica Neue Medium"/>
-                <a:sym typeface="Helvetica Neue Medium"/>
-              </a:defRPr>
-            </a:pPr>
-          </a:p>
-        </p:txBody>
-      </p:sp>
     </p:spTree>
   </p:cSld>
   <p:clrMapOvr>
@@ -11299,7 +11612,7 @@
       </p:grpSpPr>
       <p:sp>
         <p:nvSpPr>
-          <p:cNvPr id="231" name="Line"/>
+          <p:cNvPr id="234" name="Line"/>
           <p:cNvSpPr/>
           <p:nvPr/>
         </p:nvSpPr>
@@ -11330,7 +11643,7 @@
       </p:sp>
       <p:sp>
         <p:nvSpPr>
-          <p:cNvPr id="232" name="Line"/>
+          <p:cNvPr id="235" name="Line"/>
           <p:cNvSpPr/>
           <p:nvPr/>
         </p:nvSpPr>
@@ -11361,7 +11674,7 @@
       </p:sp>
       <p:sp>
         <p:nvSpPr>
-          <p:cNvPr id="233" name="Rectangle"/>
+          <p:cNvPr id="236" name="Rectangle"/>
           <p:cNvSpPr/>
           <p:nvPr/>
         </p:nvSpPr>
@@ -11403,7 +11716,7 @@
       </p:sp>
       <p:sp>
         <p:nvSpPr>
-          <p:cNvPr id="234" name="JRDA L2 gameplay can be difficult for players to play and for officials to officiate because what has the appearance of excellent derby can be illegal.…"/>
+          <p:cNvPr id="237" name="JRDA L2 gameplay can be difficult for players to play and for officials to officiate because what has the appearance of excellent derby can be illegal.…"/>
           <p:cNvSpPr txBox="1"/>
           <p:nvPr/>
         </p:nvSpPr>
@@ -11695,7 +12008,7 @@
       </p:sp>
       <p:sp>
         <p:nvSpPr>
-          <p:cNvPr id="235" name="JRDA L2-Specific Procedures Overvivew"/>
+          <p:cNvPr id="238" name="JRDA L2-Specific Procedures Overvivew"/>
           <p:cNvSpPr txBox="1"/>
           <p:nvPr/>
         </p:nvSpPr>
@@ -11741,7 +12054,7 @@
       </p:sp>
       <p:sp>
         <p:nvSpPr>
-          <p:cNvPr id="236" name="Blocker is legally blocking Jammer, discontinues their block momentarily, and starts a new block by swinging their shoulders, hips, or other legal blocking zones.…"/>
+          <p:cNvPr id="239" name="Blocker is legally blocking Jammer, discontinues their block momentarily, and starts a new block by swinging their shoulders, hips, or other legal blocking zones.…"/>
           <p:cNvSpPr txBox="1"/>
           <p:nvPr/>
         </p:nvSpPr>
@@ -11847,7 +12160,7 @@
       </p:sp>
       <p:sp>
         <p:nvSpPr>
-          <p:cNvPr id="237" name="Scenario #1 - Swinging of the Shoulders or Hips"/>
+          <p:cNvPr id="240" name="Scenario #1 - Swinging of the Shoulders or Hips"/>
           <p:cNvSpPr txBox="1"/>
           <p:nvPr/>
         </p:nvSpPr>
@@ -11893,7 +12206,7 @@
       </p:sp>
       <p:sp>
         <p:nvSpPr>
-          <p:cNvPr id="238" name="Jammer is navigating the pack with an established trajectory and Blocker moves to “catch” Jammer before they exit the pack and front engagement zone.…"/>
+          <p:cNvPr id="241" name="Jammer is navigating the pack with an established trajectory and Blocker moves to “catch” Jammer before they exit the pack and front engagement zone.…"/>
           <p:cNvSpPr txBox="1"/>
           <p:nvPr/>
         </p:nvSpPr>
@@ -12017,7 +12330,7 @@
       </p:sp>
       <p:sp>
         <p:nvSpPr>
-          <p:cNvPr id="239" name="Scenario #3 - Catching"/>
+          <p:cNvPr id="242" name="Scenario #3 - Catching"/>
           <p:cNvSpPr txBox="1"/>
           <p:nvPr/>
         </p:nvSpPr>
@@ -12063,7 +12376,7 @@
       </p:sp>
       <p:sp>
         <p:nvSpPr>
-          <p:cNvPr id="240" name="Jammer is navigating the pack with an established trajectory and Blocker positions themselves in Jammer’s path such that Jammer has no way to avoid making forceful contact to Blocker.…"/>
+          <p:cNvPr id="243" name="Jammer is navigating the pack with an established trajectory and Blocker positions themselves in Jammer’s path such that Jammer has no way to avoid making forceful contact to Blocker.…"/>
           <p:cNvSpPr txBox="1"/>
           <p:nvPr/>
         </p:nvSpPr>
@@ -12151,7 +12464,7 @@
       </p:sp>
       <p:sp>
         <p:nvSpPr>
-          <p:cNvPr id="241" name="Scenario #4 - Initiation Determination B"/>
+          <p:cNvPr id="244" name="Scenario #4 - Initiation Determination B"/>
           <p:cNvSpPr txBox="1"/>
           <p:nvPr/>
         </p:nvSpPr>
@@ -12197,7 +12510,7 @@
       </p:sp>
       <p:sp>
         <p:nvSpPr>
-          <p:cNvPr id="242" name="Jammer initiates forceful contact with Blocker, although due to a size or skill disparity, Blocker absorbs the contact without moving, and Jammer falls to the ground.…"/>
+          <p:cNvPr id="245" name="Jammer initiates forceful contact with Blocker, although due to a size or skill disparity, Blocker absorbs the contact without moving, and Jammer falls to the ground.…"/>
           <p:cNvSpPr txBox="1"/>
           <p:nvPr/>
         </p:nvSpPr>
@@ -12270,7 +12583,7 @@
       </p:sp>
       <p:sp>
         <p:nvSpPr>
-          <p:cNvPr id="243" name="Scenario #2 - Initiation Determination A"/>
+          <p:cNvPr id="246" name="Scenario #2 - Initiation Determination A"/>
           <p:cNvSpPr txBox="1"/>
           <p:nvPr/>
         </p:nvSpPr>
@@ -12316,7 +12629,7 @@
       </p:sp>
       <p:sp>
         <p:nvSpPr>
-          <p:cNvPr id="244" name="In the same scenario, we will allow Jammer to intentionally skate OOB to avoid forceful or potentially dangerous contact that would be unavoidable due to the way Blocker attempts to initiate a block.…"/>
+          <p:cNvPr id="247" name="In the same scenario, we will allow Jammer to intentionally skate OOB to avoid forceful or potentially dangerous contact that would be unavoidable due to the way Blocker attempts to initiate a block.…"/>
           <p:cNvSpPr txBox="1"/>
           <p:nvPr/>
         </p:nvSpPr>
@@ -12404,7 +12717,7 @@
       </p:sp>
       <p:sp>
         <p:nvSpPr>
-          <p:cNvPr id="245" name="Scenario #5 - Skating OOB to Avoid Hitting"/>
+          <p:cNvPr id="248" name="Scenario #5 - Skating OOB to Avoid Hitting"/>
           <p:cNvSpPr txBox="1"/>
           <p:nvPr/>
         </p:nvSpPr>
@@ -12450,7 +12763,7 @@
       </p:sp>
       <p:sp>
         <p:nvSpPr>
-          <p:cNvPr id="246" name="Jammer may approach the pack at any speed, although they are responsible for navigating the pack in a blockable position.…"/>
+          <p:cNvPr id="249" name="Jammer may approach the pack at any speed, although they are responsible for navigating the pack in a blockable position.…"/>
           <p:cNvSpPr txBox="1"/>
           <p:nvPr/>
         </p:nvSpPr>
@@ -12538,7 +12851,7 @@
       </p:sp>
       <p:sp>
         <p:nvSpPr>
-          <p:cNvPr id="247" name="Scenario #6 - Navigating the Pack at High Speed"/>
+          <p:cNvPr id="250" name="Scenario #6 - Navigating the Pack at High Speed"/>
           <p:cNvSpPr txBox="1"/>
           <p:nvPr/>
         </p:nvSpPr>
@@ -12584,7 +12897,7 @@
       </p:sp>
       <p:sp>
         <p:nvSpPr>
-          <p:cNvPr id="248" name="JRDA L2-Specific Procedures"/>
+          <p:cNvPr id="251" name="JRDA L2-Specific Procedures"/>
           <p:cNvSpPr txBox="1"/>
           <p:nvPr/>
         </p:nvSpPr>

--- a/hr-notes/powerpoint/hr-notes.pptx
+++ b/hr-notes/powerpoint/hr-notes.pptx
@@ -3972,14 +3972,14 @@
       </p:sp>
       <p:sp>
         <p:nvSpPr>
-          <p:cNvPr id="155" name="Medical benches.…"/>
+          <p:cNvPr id="155" name="Medical area location and emergency evacuation plan.…"/>
           <p:cNvSpPr txBox="1"/>
           <p:nvPr/>
         </p:nvSpPr>
         <p:spPr>
           <a:xfrm>
             <a:off x="668868" y="991259"/>
-            <a:ext cx="5588001" cy="2699987"/>
+            <a:ext cx="5588001" cy="2751337"/>
           </a:xfrm>
           <a:prstGeom prst="rect">
             <a:avLst/>
@@ -4017,7 +4017,7 @@
               </a:defRPr>
             </a:pPr>
             <a:r>
-              <a:t>Medical benches.</a:t>
+              <a:t>Medical area location and emergency evacuation plan.</a:t>
             </a:r>
           </a:p>
           <a:p>
@@ -4035,24 +4035,6 @@
               </a:defRPr>
             </a:pPr>
             <a:r>
-              <a:t>Fire/emergency evacuation plan.</a:t>
-            </a:r>
-          </a:p>
-          <a:p>
-            <a:pPr marL="254000" indent="-254000" algn="l">
-              <a:buSzPct val="100000"/>
-              <a:buAutoNum type="arabicPeriod" startAt="1"/>
-              <a:defRPr sz="1400">
-                <a:solidFill>
-                  <a:srgbClr val="000000"/>
-                </a:solidFill>
-                <a:latin typeface="Lucida Grande"/>
-                <a:ea typeface="Lucida Grande"/>
-                <a:cs typeface="Lucida Grande"/>
-                <a:sym typeface="Lucida Grande"/>
-              </a:defRPr>
-            </a:pPr>
-            <a:r>
               <a:t>Immediate call-off scenarios:</a:t>
             </a:r>
           </a:p>
@@ -4089,7 +4071,7 @@
               </a:defRPr>
             </a:pPr>
             <a:r>
-              <a:t>Obvious problem with the scoreboard or clocks.</a:t>
+              <a:t>Official clock or score failure/freeze.</a:t>
             </a:r>
           </a:p>
           <a:p>
@@ -4125,6 +4107,24 @@
               </a:defRPr>
             </a:pPr>
             <a:r>
+              <a:t>Loss of personal safety gear (mouthguard, helmet, etc.).</a:t>
+            </a:r>
+          </a:p>
+          <a:p>
+            <a:pPr lvl="1" marL="317500" indent="-190500" algn="l">
+              <a:buSzPct val="100000"/>
+              <a:buChar char="•"/>
+              <a:defRPr sz="1400">
+                <a:solidFill>
+                  <a:srgbClr val="000000"/>
+                </a:solidFill>
+                <a:latin typeface="Lucida Grande"/>
+                <a:ea typeface="Lucida Grande"/>
+                <a:cs typeface="Lucida Grande"/>
+                <a:sym typeface="Lucida Grande"/>
+              </a:defRPr>
+            </a:pPr>
+            <a:r>
               <a:t>Possible player injury, without affirmative response to the question, “Can you continue?”</a:t>
             </a:r>
           </a:p>
@@ -4143,7 +4143,7 @@
               </a:defRPr>
             </a:pPr>
             <a:r>
-              <a:t>Player or official forcefully strikes their head on the ground or appears concussed.</a:t>
+              <a:t>Player or non-player forcefully strikes their head on the ground or appears concussed.</a:t>
             </a:r>
           </a:p>
           <a:p>
@@ -4320,7 +4320,7 @@
               <a:t>JRs</a:t>
             </a:r>
             <a:r>
-              <a:t>: Check in with SKs and notify me afterward.</a:t>
+              <a:t>: Check in with SKs and inform me when complete.</a:t>
             </a:r>
           </a:p>
           <a:p>
@@ -4345,7 +4345,7 @@
               <a:t>JT</a:t>
             </a:r>
             <a:r>
-              <a:t>: Wait at least 30 seconds and HNSO instructions before ending a period or declaring the final score.</a:t>
+              <a:t>: Wait at least 30 seconds and for HNSO instructions before ending a period or declaring a final score.</a:t>
             </a:r>
           </a:p>
           <a:p>
@@ -4386,7 +4386,7 @@
             </a:pPr>
             <a:r>
               <a:rPr b="1"/>
-              <a:t>HR &amp; HNSO</a:t>
+              <a:t>HR</a:t>
             </a:r>
             <a:r>
               <a:t>: check in with coaches during intermission.</a:t>
@@ -4440,7 +4440,7 @@
               <a:t>HNSO &amp; HR</a:t>
             </a:r>
             <a:r>
-              <a:t>: check with the PBM to confirm all required players report.</a:t>
+              <a:t>: check with the PBM to confirm all required players report before starting period 2.</a:t>
             </a:r>
           </a:p>
           <a:p>
@@ -4487,7 +4487,7 @@
               <a:t>HNSO</a:t>
             </a:r>
             <a:r>
-              <a:t>: Declare the score final and instruct the SBO and JT to take the appropriate actions.</a:t>
+              <a:t>: Declare the score final when ready, and instruct the SBO and JT to take the appropriate actions.</a:t>
             </a:r>
           </a:p>
         </p:txBody>
@@ -4546,8 +4546,8 @@
         </p:nvSpPr>
         <p:spPr>
           <a:xfrm>
-            <a:off x="668868" y="4078862"/>
-            <a:ext cx="5588001" cy="9389921"/>
+            <a:off x="668868" y="4256662"/>
+            <a:ext cx="5588001" cy="9218508"/>
           </a:xfrm>
           <a:prstGeom prst="rect">
             <a:avLst/>
@@ -4612,7 +4612,7 @@
             </a:r>
             <a:r>
               <a:rPr u="sng"/>
-              <a:t>reformation</a:t>
+              <a:t>reformation/return</a:t>
             </a:r>
             <a:r>
               <a:t> penalties.</a:t>
@@ -4640,7 +4640,7 @@
               <a:t>illegal contact</a:t>
             </a:r>
             <a:r>
-              <a:t> penalties when there is game impact (down, OOB, etc.).</a:t>
+              <a:t> penalties for OOP blocks when there is game impact (down or OOB).</a:t>
             </a:r>
           </a:p>
           <a:p>
@@ -4658,7 +4658,7 @@
               </a:defRPr>
             </a:pPr>
             <a:r>
-              <a:t>Continued blocking w/o impact is insufficient for illegal contact, although you may point at players who are candidates for reformation penalties.</a:t>
+              <a:t>Continued blocking OOP w/o impact is insufficient for illegal contact, although you may point at players who are candidates for reformation/return penalties.</a:t>
             </a:r>
           </a:p>
           <a:p>
@@ -4750,7 +4750,7 @@
               </a:defRPr>
             </a:pPr>
             <a:r>
-              <a:t>Follow jammers to and from the penalty box.</a:t>
+              <a:t>Observe jammers to and from the penalty box to monitor for illegal exit/reentry, illegal contact, etc.</a:t>
             </a:r>
           </a:p>
           <a:p>
@@ -4771,7 +4771,7 @@
               </a:defRPr>
             </a:pPr>
             <a:r>
-              <a:t>Watch for illegal exit/reentry, illegal contact, etc.</a:t>
+              <a:t>Follow jammers to their bench after each jam.</a:t>
             </a:r>
           </a:p>
           <a:p>
@@ -4792,7 +4792,7 @@
               </a:defRPr>
             </a:pPr>
             <a:r>
-              <a:t>Follow jammers to their bench during lineups.</a:t>
+              <a:t>Report points at the 4th whistle whenever possible.</a:t>
             </a:r>
           </a:p>
           <a:p>
@@ -4813,7 +4813,7 @@
               </a:defRPr>
             </a:pPr>
             <a:r>
-              <a:t>Report points at the 4th whistle whenever possible.</a:t>
+              <a:t>If points aren’t earned, know which opposing player's numbers weren’t passed.</a:t>
             </a:r>
           </a:p>
           <a:p>
@@ -4834,7 +4834,7 @@
               </a:defRPr>
             </a:pPr>
             <a:r>
-              <a:t>If points aren’t earned, know which opposing player's numbers weren’t passed.</a:t>
+              <a:t>Check for NOTT points as quickly as possible.</a:t>
             </a:r>
           </a:p>
           <a:p>
@@ -4855,7 +4855,7 @@
               </a:defRPr>
             </a:pPr>
             <a:r>
-              <a:t>Check for NOTT points as quickly as possible.</a:t>
+              <a:t>If a star pass is incomplete, stay with your jammer and notify IPRs.</a:t>
             </a:r>
           </a:p>
           <a:p>
@@ -4876,7 +4876,29 @@
               </a:defRPr>
             </a:pPr>
             <a:r>
-              <a:t>If a star pass is incomplete, stay with your jammer and notify IPRs.</a:t>
+              <a:t>If your jammer leaves the track due to injury, equipment failure, etc., keep your eyes on them and notify the IPRs so we can end the jam if the other jammer is penalized or leaves the track.</a:t>
+            </a:r>
+          </a:p>
+          <a:p>
+            <a:pPr marL="228600" indent="-228600" algn="l">
+              <a:buClr>
+                <a:srgbClr val="000000"/>
+              </a:buClr>
+              <a:buSzPct val="100000"/>
+              <a:buAutoNum type="arabicPeriod" startAt="1"/>
+              <a:defRPr sz="1400">
+                <a:solidFill>
+                  <a:srgbClr val="000000"/>
+                </a:solidFill>
+                <a:latin typeface="Lucida Grande"/>
+                <a:ea typeface="Lucida Grande"/>
+                <a:cs typeface="Lucida Grande"/>
+                <a:sym typeface="Lucida Grande"/>
+              </a:defRPr>
+            </a:pPr>
+            <a:r>
+              <a:rPr b="1"/>
+              <a:t>OPRs:</a:t>
             </a:r>
           </a:p>
           <a:p>
@@ -4897,7 +4919,84 @@
               </a:defRPr>
             </a:pPr>
             <a:r>
-              <a:t>If your jammer leaves the track due to injury, equipment failure, etc., keep your eyes on them and notify the IPRs so we can end the jam if the other jammer is penalized or leaves the track.</a:t>
+              <a:t>Do not try to race a fast pack.</a:t>
+            </a:r>
+          </a:p>
+          <a:p>
+            <a:pPr lvl="1" marL="317500" indent="-190500" algn="l">
+              <a:buClr>
+                <a:srgbClr val="000000"/>
+              </a:buClr>
+              <a:buSzPct val="100000"/>
+              <a:buChar char="•"/>
+              <a:defRPr sz="1400">
+                <a:solidFill>
+                  <a:srgbClr val="000000"/>
+                </a:solidFill>
+                <a:latin typeface="Lucida Grande"/>
+                <a:ea typeface="Lucida Grande"/>
+                <a:cs typeface="Lucida Grande"/>
+                <a:sym typeface="Lucida Grande"/>
+              </a:defRPr>
+            </a:pPr>
+            <a:r>
+              <a:t>Drop </a:t>
+            </a:r>
+            <a:r>
+              <a:rPr u="sng"/>
+              <a:t>way</a:t>
+            </a:r>
+            <a:r>
+              <a:t> early, and </a:t>
+            </a:r>
+            <a:r>
+              <a:rPr u="sng"/>
+              <a:t>commit</a:t>
+            </a:r>
+            <a:r>
+              <a:t> to dropping in derby and non-derby directions.</a:t>
+            </a:r>
+          </a:p>
+          <a:p>
+            <a:pPr lvl="1" marL="317500" indent="-190500" algn="l">
+              <a:buClr>
+                <a:srgbClr val="000000"/>
+              </a:buClr>
+              <a:buSzPct val="100000"/>
+              <a:buChar char="•"/>
+              <a:defRPr sz="1400">
+                <a:solidFill>
+                  <a:srgbClr val="000000"/>
+                </a:solidFill>
+                <a:latin typeface="Lucida Grande"/>
+                <a:ea typeface="Lucida Grande"/>
+                <a:cs typeface="Lucida Grande"/>
+                <a:sym typeface="Lucida Grande"/>
+              </a:defRPr>
+            </a:pPr>
+            <a:r>
+              <a:t>If the pack is moving and you are behind your wall, you’ve already waited too long to drop.</a:t>
+            </a:r>
+          </a:p>
+          <a:p>
+            <a:pPr lvl="1" marL="317500" indent="-190500" algn="l">
+              <a:buClr>
+                <a:srgbClr val="000000"/>
+              </a:buClr>
+              <a:buSzPct val="100000"/>
+              <a:buChar char="•"/>
+              <a:defRPr sz="1400">
+                <a:solidFill>
+                  <a:srgbClr val="000000"/>
+                </a:solidFill>
+                <a:latin typeface="Lucida Grande"/>
+                <a:ea typeface="Lucida Grande"/>
+                <a:cs typeface="Lucida Grande"/>
+                <a:sym typeface="Lucida Grande"/>
+              </a:defRPr>
+            </a:pPr>
+            <a:r>
+              <a:t>Demonstrate your ability to drop and restore OPR coverage.</a:t>
             </a:r>
           </a:p>
           <a:p>
@@ -4919,7 +5018,7 @@
             </a:pPr>
             <a:r>
               <a:rPr b="1"/>
-              <a:t>OPRs:</a:t>
+              <a:t>JT:</a:t>
             </a:r>
           </a:p>
           <a:p>
@@ -4940,106 +5039,7 @@
               </a:defRPr>
             </a:pPr>
             <a:r>
-              <a:t>Drop </a:t>
-            </a:r>
-            <a:r>
-              <a:rPr u="sng"/>
-              <a:t>way</a:t>
-            </a:r>
-            <a:r>
-              <a:t> too early, and </a:t>
-            </a:r>
-            <a:r>
-              <a:rPr u="sng"/>
-              <a:t>commit</a:t>
-            </a:r>
-            <a:r>
-              <a:t> to the drop (in derby and non-derby directions).</a:t>
-            </a:r>
-          </a:p>
-          <a:p>
-            <a:pPr lvl="1" marL="317500" indent="-190500" algn="l">
-              <a:buClr>
-                <a:srgbClr val="000000"/>
-              </a:buClr>
-              <a:buSzPct val="100000"/>
-              <a:buChar char="•"/>
-              <a:defRPr sz="1400">
-                <a:solidFill>
-                  <a:srgbClr val="000000"/>
-                </a:solidFill>
-                <a:latin typeface="Lucida Grande"/>
-                <a:ea typeface="Lucida Grande"/>
-                <a:cs typeface="Lucida Grande"/>
-                <a:sym typeface="Lucida Grande"/>
-              </a:defRPr>
-            </a:pPr>
-            <a:r>
-              <a:t>If the pack is moving and you are behind your wall, you are already late.</a:t>
-            </a:r>
-          </a:p>
-          <a:p>
-            <a:pPr lvl="1" marL="317500" indent="-190500" algn="l">
-              <a:buClr>
-                <a:srgbClr val="000000"/>
-              </a:buClr>
-              <a:buSzPct val="100000"/>
-              <a:buChar char="•"/>
-              <a:defRPr sz="1400">
-                <a:solidFill>
-                  <a:srgbClr val="000000"/>
-                </a:solidFill>
-                <a:latin typeface="Lucida Grande"/>
-                <a:ea typeface="Lucida Grande"/>
-                <a:cs typeface="Lucida Grande"/>
-                <a:sym typeface="Lucida Grande"/>
-              </a:defRPr>
-            </a:pPr>
-            <a:r>
-              <a:t>Don’t show me you can individually keep or catch up, show me you can drop, reset your position, and support your crew mates.</a:t>
-            </a:r>
-          </a:p>
-          <a:p>
-            <a:pPr marL="228600" indent="-228600" algn="l">
-              <a:buClr>
-                <a:srgbClr val="000000"/>
-              </a:buClr>
-              <a:buSzPct val="100000"/>
-              <a:buAutoNum type="arabicPeriod" startAt="1"/>
-              <a:defRPr sz="1400">
-                <a:solidFill>
-                  <a:srgbClr val="000000"/>
-                </a:solidFill>
-                <a:latin typeface="Lucida Grande"/>
-                <a:ea typeface="Lucida Grande"/>
-                <a:cs typeface="Lucida Grande"/>
-                <a:sym typeface="Lucida Grande"/>
-              </a:defRPr>
-            </a:pPr>
-            <a:r>
-              <a:rPr b="1"/>
-              <a:t>JT:</a:t>
-            </a:r>
-          </a:p>
-          <a:p>
-            <a:pPr lvl="1" marL="317500" indent="-190500" algn="l">
-              <a:buClr>
-                <a:srgbClr val="000000"/>
-              </a:buClr>
-              <a:buSzPct val="100000"/>
-              <a:buChar char="•"/>
-              <a:defRPr sz="1400">
-                <a:solidFill>
-                  <a:srgbClr val="000000"/>
-                </a:solidFill>
-                <a:latin typeface="Lucida Grande"/>
-                <a:ea typeface="Lucida Grande"/>
-                <a:cs typeface="Lucida Grande"/>
-                <a:sym typeface="Lucida Grande"/>
-              </a:defRPr>
-            </a:pPr>
-            <a:r>
-              <a:t>Start a jam without me when JRs/IPR are in position.</a:t>
+              <a:t>Start a jam without me when JRs and IPR are in position.</a:t>
             </a:r>
           </a:p>
           <a:p>
@@ -5227,7 +5227,7 @@
         </p:nvSpPr>
         <p:spPr>
           <a:xfrm>
-            <a:off x="1689169" y="3703629"/>
+            <a:off x="1689169" y="3881429"/>
             <a:ext cx="3547398" cy="364320"/>
           </a:xfrm>
           <a:prstGeom prst="rect">
@@ -5312,7 +5312,14 @@
               </a:defRPr>
             </a:pPr>
             <a:r>
-              <a:t>Make every effort to keep players on track.</a:t>
+              <a:t>Make </a:t>
+            </a:r>
+            <a:r>
+              <a:rPr u="sng"/>
+              <a:t>every</a:t>
+            </a:r>
+            <a:r>
+              <a:t> effort to keep players on track.</a:t>
             </a:r>
           </a:p>
           <a:p>
@@ -5330,7 +5337,7 @@
               </a:defRPr>
             </a:pPr>
             <a:r>
-              <a:t>Be prepared to describe the action, initiation, and impact, including player numbers.</a:t>
+              <a:t>For any penalty, be prepared to describe the action, initiation, and impact, including player numbers.</a:t>
             </a:r>
           </a:p>
           <a:p>
@@ -5348,7 +5355,7 @@
               </a:defRPr>
             </a:pPr>
             <a:r>
-              <a:t>When in doubt, default to a no-call and discuss the action after a jam.</a:t>
+              <a:t>When in doubt, default to a no-call and discuss the action with your peers after a jam.</a:t>
             </a:r>
           </a:p>
           <a:p>
@@ -5384,7 +5391,7 @@
               </a:defRPr>
             </a:pPr>
             <a:r>
-              <a:t>Call penalties within your respective zones, and discuss out-of-zone penalties during lineups.</a:t>
+              <a:t>Call penalties within your respective zones, and discuss out-of-zone penalties with your peers during lineup time.</a:t>
             </a:r>
           </a:p>
           <a:p>
@@ -5420,7 +5427,7 @@
               </a:defRPr>
             </a:pPr>
             <a:r>
-              <a:t>The bar for skating OOB and intentionally adopting an illegal position penalties is </a:t>
+              <a:t>My bar for skating OOB and intentionally adopting an illegal position penalties is </a:t>
             </a:r>
             <a:r>
               <a:rPr u="sng"/>
@@ -5685,7 +5692,7 @@
               </a:defRPr>
             </a:pPr>
             <a:r>
-              <a:t>Check with me before issuing misconduct penalties.</a:t>
+              <a:t>Make sure I am aware if you issue misconduct penalties.</a:t>
             </a:r>
           </a:p>
           <a:p>
@@ -5778,7 +5785,7 @@
       </p:sp>
       <p:sp>
         <p:nvSpPr>
-          <p:cNvPr id="165" name="If the scoreboard indicates a tie score at the end of regulation after the JRs check in with their SKs, I want the SBO to immediately start the one-minute lineup clock.…"/>
+          <p:cNvPr id="165" name="If the scoreboard indicates a tie score at the end of regulation after the JRs check in with their SKs, the JT will immediately signal the SBO to start the OT lineup clock.…"/>
           <p:cNvSpPr txBox="1"/>
           <p:nvPr/>
         </p:nvSpPr>
@@ -5826,7 +5833,7 @@
               </a:defRPr>
             </a:pPr>
             <a:r>
-              <a:t>If the scoreboard indicates a tie score at the end of regulation after the JRs check in with their SKs, I want the SBO to immediately start the one-minute lineup clock.</a:t>
+              <a:t>If the scoreboard indicates a tie score at the end of regulation after the JRs check in with their SKs, the JT will immediately signal the SBO to start the OT lineup clock.</a:t>
             </a:r>
           </a:p>
           <a:p>
@@ -5847,7 +5854,7 @@
               </a:defRPr>
             </a:pPr>
             <a:r>
-              <a:t>We will have successive overtime jams until there is no longer a tie score at the end of a jam.</a:t>
+              <a:t>We will have OT jams until there is no longer a tie score at the end of an OT jam.</a:t>
             </a:r>
           </a:p>
           <a:p>
@@ -5931,7 +5938,7 @@
               </a:defRPr>
             </a:pPr>
             <a:r>
-              <a:t>Scoring points starts on each jammer’s initial trip.</a:t>
+              <a:t>Jammers begin scoring on their initial trip.</a:t>
             </a:r>
           </a:p>
         </p:txBody>
@@ -6082,8 +6089,8 @@
         </p:nvSpPr>
         <p:spPr>
           <a:xfrm>
-            <a:off x="12436074" y="2122360"/>
-            <a:ext cx="5588001" cy="3876311"/>
+            <a:off x="12436074" y="2135060"/>
+            <a:ext cx="5588001" cy="3667159"/>
           </a:xfrm>
           <a:prstGeom prst="rect">
             <a:avLst/>
@@ -6166,7 +6173,7 @@
               </a:defRPr>
             </a:pPr>
             <a:r>
-              <a:t>All other officials SO/NSO will meet at the designated official review location.</a:t>
+              <a:t>All other SOs and available NSOs will meet at the designated official review location.</a:t>
             </a:r>
           </a:p>
           <a:p>
@@ -6229,7 +6236,7 @@
               </a:defRPr>
             </a:pPr>
             <a:r>
-              <a:t>I will ask very specific questions to reach a conclusion quickly.</a:t>
+              <a:t>I will ask very specific questions to reach an outcome.</a:t>
             </a:r>
           </a:p>
           <a:p>
@@ -6347,7 +6354,7 @@
         </p:nvSpPr>
         <p:spPr>
           <a:xfrm>
-            <a:off x="13456375" y="1766557"/>
+            <a:off x="13456375" y="1791957"/>
             <a:ext cx="3547398" cy="358510"/>
           </a:xfrm>
           <a:prstGeom prst="rect">
@@ -7386,8 +7393,8 @@
         </p:nvSpPr>
         <p:spPr>
           <a:xfrm>
-            <a:off x="12436074" y="6348263"/>
-            <a:ext cx="5588001" cy="3221292"/>
+            <a:off x="12436074" y="6170463"/>
+            <a:ext cx="5588001" cy="3405029"/>
           </a:xfrm>
           <a:prstGeom prst="rect">
             <a:avLst/>
@@ -7533,7 +7540,7 @@
               </a:defRPr>
             </a:pPr>
             <a:r>
-              <a:t>“Helmet cover removed by natural gameplay.”</a:t>
+              <a:t>“On tape.”</a:t>
             </a:r>
           </a:p>
           <a:p>
@@ -7554,7 +7561,7 @@
               </a:defRPr>
             </a:pPr>
             <a:r>
-              <a:t>“One arm OOB”</a:t>
+              <a:t>“Helmet cover removed by natural gameplay.”</a:t>
             </a:r>
           </a:p>
           <a:p>
@@ -7575,7 +7582,7 @@
               </a:defRPr>
             </a:pPr>
             <a:r>
-              <a:t>“Pinning”</a:t>
+              <a:t>“One arm OOB”</a:t>
             </a:r>
           </a:p>
           <a:p>
@@ -7596,7 +7603,7 @@
               </a:defRPr>
             </a:pPr>
             <a:r>
-              <a:t>“Incomplete star pass.”</a:t>
+              <a:t>“Pinning” or “Illegal Hold.”</a:t>
             </a:r>
           </a:p>
           <a:p>
@@ -7617,7 +7624,28 @@
               </a:defRPr>
             </a:pPr>
             <a:r>
-              <a:t>“Non-initiator does not have superior position.”</a:t>
+              <a:t>“Incomplete star pass.”</a:t>
+            </a:r>
+          </a:p>
+          <a:p>
+            <a:pPr marL="254000" indent="-254000" algn="l">
+              <a:buClr>
+                <a:srgbClr val="000000"/>
+              </a:buClr>
+              <a:buSzPct val="100000"/>
+              <a:buAutoNum type="arabicPeriod" startAt="1"/>
+              <a:defRPr sz="1400">
+                <a:solidFill>
+                  <a:srgbClr val="000000"/>
+                </a:solidFill>
+                <a:latin typeface="Lucida Grande"/>
+                <a:ea typeface="Lucida Grande"/>
+                <a:cs typeface="Lucida Grande"/>
+                <a:sym typeface="Lucida Grande"/>
+              </a:defRPr>
+            </a:pPr>
+            <a:r>
+              <a:t>“Non-initiator did not have superior position.”</a:t>
             </a:r>
           </a:p>
           <a:p>
@@ -7714,7 +7742,7 @@
         </p:nvSpPr>
         <p:spPr>
           <a:xfrm>
-            <a:off x="13456375" y="5986806"/>
+            <a:off x="13456375" y="5809006"/>
             <a:ext cx="3547398" cy="345559"/>
           </a:xfrm>
           <a:prstGeom prst="rect">
@@ -7760,7 +7788,7 @@
         </p:nvSpPr>
         <p:spPr>
           <a:xfrm>
-            <a:off x="12436074" y="12489334"/>
+            <a:off x="12436074" y="12476634"/>
             <a:ext cx="5588001" cy="822923"/>
           </a:xfrm>
           <a:prstGeom prst="rect">
@@ -7864,7 +7892,7 @@
         </p:nvSpPr>
         <p:spPr>
           <a:xfrm>
-            <a:off x="13456375" y="12140577"/>
+            <a:off x="13456375" y="12127877"/>
             <a:ext cx="3547398" cy="345559"/>
           </a:xfrm>
           <a:prstGeom prst="rect">
@@ -8137,256 +8165,7 @@
       </p:sp>
       <p:sp>
         <p:nvSpPr>
-          <p:cNvPr id="185" name="Medical benches…"/>
-          <p:cNvSpPr txBox="1"/>
-          <p:nvPr/>
-        </p:nvSpPr>
-        <p:spPr>
-          <a:xfrm>
-            <a:off x="677815" y="991259"/>
-            <a:ext cx="5588001" cy="2716215"/>
-          </a:xfrm>
-          <a:prstGeom prst="rect">
-            <a:avLst/>
-          </a:prstGeom>
-          <a:solidFill>
-            <a:srgbClr val="FFFFFF"/>
-          </a:solidFill>
-          <a:ln w="12700">
-            <a:solidFill>
-              <a:srgbClr val="000000"/>
-            </a:solidFill>
-            <a:miter lim="400000"/>
-          </a:ln>
-          <a:extLst>
-            <a:ext uri="{C572A759-6A51-4108-AA02-DFA0A04FC94B}">
-              <ma14:wrappingTextBoxFlag xmlns:ma14="http://schemas.microsoft.com/office/mac/drawingml/2011/main" val="1"/>
-            </a:ext>
-          </a:extLst>
-        </p:spPr>
-        <p:txBody>
-          <a:bodyPr lIns="50800" tIns="50800" rIns="50800" bIns="50800"/>
-          <a:lstStyle/>
-          <a:p>
-            <a:pPr marL="254000" indent="-254000" algn="l">
-              <a:buSzPct val="100000"/>
-              <a:buAutoNum type="arabicPeriod" startAt="1"/>
-              <a:defRPr sz="1400">
-                <a:solidFill>
-                  <a:srgbClr val="000000"/>
-                </a:solidFill>
-                <a:latin typeface="Lucida Grande"/>
-                <a:ea typeface="Lucida Grande"/>
-                <a:cs typeface="Lucida Grande"/>
-                <a:sym typeface="Lucida Grande"/>
-              </a:defRPr>
-            </a:pPr>
-            <a:r>
-              <a:t>Medical benches</a:t>
-            </a:r>
-          </a:p>
-          <a:p>
-            <a:pPr marL="254000" indent="-254000" algn="l">
-              <a:buSzPct val="100000"/>
-              <a:buAutoNum type="arabicPeriod" startAt="1"/>
-              <a:defRPr sz="1400">
-                <a:solidFill>
-                  <a:srgbClr val="000000"/>
-                </a:solidFill>
-                <a:latin typeface="Lucida Grande"/>
-                <a:ea typeface="Lucida Grande"/>
-                <a:cs typeface="Lucida Grande"/>
-                <a:sym typeface="Lucida Grande"/>
-              </a:defRPr>
-            </a:pPr>
-            <a:r>
-              <a:t>Fire/emergency evacuation plan</a:t>
-            </a:r>
-          </a:p>
-          <a:p>
-            <a:pPr marL="254000" indent="-254000" algn="l">
-              <a:buSzPct val="100000"/>
-              <a:buAutoNum type="arabicPeriod" startAt="1"/>
-              <a:defRPr sz="1400">
-                <a:solidFill>
-                  <a:srgbClr val="000000"/>
-                </a:solidFill>
-                <a:latin typeface="Lucida Grande"/>
-                <a:ea typeface="Lucida Grande"/>
-                <a:cs typeface="Lucida Grande"/>
-                <a:sym typeface="Lucida Grande"/>
-              </a:defRPr>
-            </a:pPr>
-            <a:r>
-              <a:t>Immediate officiating call-off scenarios:</a:t>
-            </a:r>
-          </a:p>
-          <a:p>
-            <a:pPr lvl="1" marL="317500" indent="-190500" algn="l">
-              <a:buSzPct val="100000"/>
-              <a:buChar char="•"/>
-              <a:defRPr sz="1400">
-                <a:solidFill>
-                  <a:srgbClr val="000000"/>
-                </a:solidFill>
-                <a:latin typeface="Lucida Grande"/>
-                <a:ea typeface="Lucida Grande"/>
-                <a:cs typeface="Lucida Grande"/>
-                <a:sym typeface="Lucida Grande"/>
-              </a:defRPr>
-            </a:pPr>
-            <a:r>
-              <a:t>Medics unavailable to observe gameplay.</a:t>
-            </a:r>
-          </a:p>
-          <a:p>
-            <a:pPr lvl="1" marL="317500" indent="-190500" algn="l">
-              <a:buSzPct val="100000"/>
-              <a:buChar char="•"/>
-              <a:defRPr sz="1400">
-                <a:solidFill>
-                  <a:srgbClr val="000000"/>
-                </a:solidFill>
-                <a:latin typeface="Lucida Grande"/>
-                <a:ea typeface="Lucida Grande"/>
-                <a:cs typeface="Lucida Grande"/>
-                <a:sym typeface="Lucida Grande"/>
-              </a:defRPr>
-            </a:pPr>
-            <a:r>
-              <a:t>Obvious failure of the scoreboard or clocks.</a:t>
-            </a:r>
-          </a:p>
-          <a:p>
-            <a:pPr lvl="1" marL="317500" indent="-190500" algn="l">
-              <a:buSzPct val="100000"/>
-              <a:buChar char="•"/>
-              <a:defRPr sz="1400">
-                <a:solidFill>
-                  <a:srgbClr val="000000"/>
-                </a:solidFill>
-                <a:latin typeface="Lucida Grande"/>
-                <a:ea typeface="Lucida Grande"/>
-                <a:cs typeface="Lucida Grande"/>
-                <a:sym typeface="Lucida Grande"/>
-              </a:defRPr>
-            </a:pPr>
-            <a:r>
-              <a:t>Obvious player injury or any bleeding.</a:t>
-            </a:r>
-          </a:p>
-          <a:p>
-            <a:pPr lvl="1" marL="317500" indent="-190500" algn="l">
-              <a:buSzPct val="100000"/>
-              <a:buChar char="•"/>
-              <a:defRPr sz="1400">
-                <a:solidFill>
-                  <a:srgbClr val="000000"/>
-                </a:solidFill>
-                <a:latin typeface="Lucida Grande"/>
-                <a:ea typeface="Lucida Grande"/>
-                <a:cs typeface="Lucida Grande"/>
-                <a:sym typeface="Lucida Grande"/>
-              </a:defRPr>
-            </a:pPr>
-            <a:r>
-              <a:t>Possible player injury, without affirmative response to the question, “Can you continue?”</a:t>
-            </a:r>
-          </a:p>
-          <a:p>
-            <a:pPr lvl="1" marL="317500" indent="-190500" algn="l">
-              <a:buSzPct val="100000"/>
-              <a:buChar char="•"/>
-              <a:defRPr sz="1400">
-                <a:solidFill>
-                  <a:srgbClr val="000000"/>
-                </a:solidFill>
-                <a:latin typeface="Lucida Grande"/>
-                <a:ea typeface="Lucida Grande"/>
-                <a:cs typeface="Lucida Grande"/>
-                <a:sym typeface="Lucida Grande"/>
-              </a:defRPr>
-            </a:pPr>
-            <a:r>
-              <a:t>Player or official forcefully strikes their head on the ground or appears concussed.</a:t>
-            </a:r>
-          </a:p>
-          <a:p>
-            <a:pPr lvl="1" marL="317500" indent="-190500" algn="l">
-              <a:buSzPct val="100000"/>
-              <a:buChar char="•"/>
-              <a:defRPr sz="1400">
-                <a:solidFill>
-                  <a:srgbClr val="000000"/>
-                </a:solidFill>
-                <a:latin typeface="Lucida Grande"/>
-                <a:ea typeface="Lucida Grande"/>
-                <a:cs typeface="Lucida Grande"/>
-                <a:sym typeface="Lucida Grande"/>
-              </a:defRPr>
-            </a:pPr>
-            <a:r>
-              <a:t>Any </a:t>
-            </a:r>
-            <a:r>
-              <a:rPr u="sng"/>
-              <a:t>non-player</a:t>
-            </a:r>
-            <a:r>
-              <a:t> goes to the ground and does not immediately and actively return upright.</a:t>
-            </a:r>
-          </a:p>
-        </p:txBody>
-      </p:sp>
-      <p:sp>
-        <p:nvSpPr>
-          <p:cNvPr id="186" name="Game Administration"/>
-          <p:cNvSpPr txBox="1"/>
-          <p:nvPr/>
-        </p:nvSpPr>
-        <p:spPr>
-          <a:xfrm>
-            <a:off x="2244018" y="616026"/>
-            <a:ext cx="2455595" cy="364320"/>
-          </a:xfrm>
-          <a:prstGeom prst="rect">
-            <a:avLst/>
-          </a:prstGeom>
-          <a:ln w="12700">
-            <a:miter lim="400000"/>
-          </a:ln>
-          <a:extLst>
-            <a:ext uri="{C572A759-6A51-4108-AA02-DFA0A04FC94B}">
-              <ma14:wrappingTextBoxFlag xmlns:ma14="http://schemas.microsoft.com/office/mac/drawingml/2011/main" val="1"/>
-            </a:ext>
-          </a:extLst>
-        </p:spPr>
-        <p:txBody>
-          <a:bodyPr lIns="50800" tIns="50800" rIns="50800" bIns="50800" anchor="ctr"/>
-          <a:lstStyle>
-            <a:lvl1pPr>
-              <a:defRPr b="1" sz="1600">
-                <a:solidFill>
-                  <a:srgbClr val="000000"/>
-                </a:solidFill>
-                <a:latin typeface="Lucida Grande"/>
-                <a:ea typeface="Lucida Grande"/>
-                <a:cs typeface="Lucida Grande"/>
-                <a:sym typeface="Lucida Grande"/>
-              </a:defRPr>
-            </a:lvl1pPr>
-          </a:lstStyle>
-          <a:p>
-            <a:pPr/>
-            <a:r>
-              <a:t>Game Administration</a:t>
-            </a:r>
-          </a:p>
-        </p:txBody>
-      </p:sp>
-      <p:sp>
-        <p:nvSpPr>
-          <p:cNvPr id="187" name="If you have an official review available, I will ask you if you want to use it at the end of each period.…"/>
+          <p:cNvPr id="185" name="If you have an official review available, I will ask you if you want to use it at the end of each period.…"/>
           <p:cNvSpPr txBox="1"/>
           <p:nvPr/>
         </p:nvSpPr>
@@ -8459,7 +8238,7 @@
       </p:sp>
       <p:sp>
         <p:nvSpPr>
-          <p:cNvPr id="188" name="End-of-Period and Game Procedures"/>
+          <p:cNvPr id="186" name="End-of-Period and Game Procedures"/>
           <p:cNvSpPr txBox="1"/>
           <p:nvPr/>
         </p:nvSpPr>
@@ -8505,14 +8284,14 @@
       </p:sp>
       <p:sp>
         <p:nvSpPr>
-          <p:cNvPr id="189" name="Penalty avoidance:…"/>
+          <p:cNvPr id="187" name="Penalty avoidance:…"/>
           <p:cNvSpPr txBox="1"/>
           <p:nvPr/>
         </p:nvSpPr>
         <p:spPr>
           <a:xfrm>
-            <a:off x="677815" y="4083642"/>
-            <a:ext cx="5588001" cy="7558866"/>
+            <a:off x="677815" y="4109042"/>
+            <a:ext cx="5588001" cy="9199224"/>
           </a:xfrm>
           <a:prstGeom prst="rect">
             <a:avLst/>
@@ -8568,7 +8347,7 @@
               </a:defRPr>
             </a:pPr>
             <a:r>
-              <a:t>I want to help keep players out of the penalty box and on the track.</a:t>
+              <a:t>We will make every effort to keep players out of the penalty box and on the track.</a:t>
             </a:r>
           </a:p>
           <a:p>
@@ -8586,7 +8365,115 @@
               </a:defRPr>
             </a:pPr>
             <a:r>
+              <a:t>Illegal actions without sufficent game impact to warrant a penalty will go unpenalized.</a:t>
+            </a:r>
+          </a:p>
+          <a:p>
+            <a:pPr lvl="1" marL="381000" indent="-254000" algn="l">
+              <a:buSzPct val="100000"/>
+              <a:buChar char="•"/>
+              <a:defRPr sz="1400">
+                <a:solidFill>
+                  <a:srgbClr val="000000"/>
+                </a:solidFill>
+                <a:latin typeface="Lucida Grande"/>
+                <a:ea typeface="Lucida Grande"/>
+                <a:cs typeface="Lucida Grande"/>
+                <a:sym typeface="Lucida Grande"/>
+              </a:defRPr>
+            </a:pPr>
+            <a:r>
               <a:t>We will use warnings whenever possible to help players avoid penalization.</a:t>
+            </a:r>
+          </a:p>
+          <a:p>
+            <a:pPr lvl="1" marL="381000" indent="-254000" algn="l">
+              <a:buSzPct val="100000"/>
+              <a:buChar char="•"/>
+              <a:defRPr sz="1400">
+                <a:solidFill>
+                  <a:srgbClr val="000000"/>
+                </a:solidFill>
+                <a:latin typeface="Lucida Grande"/>
+                <a:ea typeface="Lucida Grande"/>
+                <a:cs typeface="Lucida Grande"/>
+                <a:sym typeface="Lucida Grande"/>
+              </a:defRPr>
+            </a:pPr>
+            <a:r>
+              <a:t>This may result in scenarios that can cause confusion:</a:t>
+            </a:r>
+          </a:p>
+          <a:p>
+            <a:pPr lvl="2" marL="444500" indent="-190500" algn="l">
+              <a:buSzPct val="100000"/>
+              <a:buChar char="•"/>
+              <a:defRPr sz="1400">
+                <a:solidFill>
+                  <a:srgbClr val="000000"/>
+                </a:solidFill>
+                <a:latin typeface="Lucida Grande"/>
+                <a:ea typeface="Lucida Grande"/>
+                <a:cs typeface="Lucida Grande"/>
+                <a:sym typeface="Lucida Grande"/>
+              </a:defRPr>
+            </a:pPr>
+            <a:r>
+              <a:t>Clearly visable illegal action goes unpenalized.</a:t>
+            </a:r>
+          </a:p>
+          <a:p>
+            <a:pPr lvl="2" marL="444500" indent="-190500" algn="l">
+              <a:buSzPct val="100000"/>
+              <a:buChar char="•"/>
+              <a:defRPr sz="1400">
+                <a:solidFill>
+                  <a:srgbClr val="000000"/>
+                </a:solidFill>
+                <a:latin typeface="Lucida Grande"/>
+                <a:ea typeface="Lucida Grande"/>
+                <a:cs typeface="Lucida Grande"/>
+                <a:sym typeface="Lucida Grande"/>
+              </a:defRPr>
+            </a:pPr>
+            <a:r>
+              <a:t>Player issued a penalty by one official and told to remain on or return to the track by another official.</a:t>
+            </a:r>
+          </a:p>
+          <a:p>
+            <a:pPr lvl="2" marL="444500" indent="-190500" algn="l">
+              <a:buSzPct val="100000"/>
+              <a:buChar char="•"/>
+              <a:defRPr sz="1400">
+                <a:solidFill>
+                  <a:srgbClr val="000000"/>
+                </a:solidFill>
+                <a:latin typeface="Lucida Grande"/>
+                <a:ea typeface="Lucida Grande"/>
+                <a:cs typeface="Lucida Grande"/>
+                <a:sym typeface="Lucida Grande"/>
+              </a:defRPr>
+            </a:pPr>
+            <a:r>
+              <a:t>Player penalized or re-penalized after a jam.</a:t>
+            </a:r>
+          </a:p>
+          <a:p>
+            <a:pPr lvl="2" marL="444500" indent="-190500" algn="l">
+              <a:buSzPct val="100000"/>
+              <a:buChar char="•"/>
+              <a:defRPr sz="1400">
+                <a:solidFill>
+                  <a:srgbClr val="000000"/>
+                </a:solidFill>
+                <a:latin typeface="Lucida Grande"/>
+                <a:ea typeface="Lucida Grande"/>
+                <a:cs typeface="Lucida Grande"/>
+                <a:sym typeface="Lucida Grande"/>
+              </a:defRPr>
+            </a:pPr>
+            <a:r>
+              <a:t>Penalty removed after a jam.</a:t>
             </a:r>
           </a:p>
           <a:p>
@@ -8650,7 +8537,7 @@
               </a:defRPr>
             </a:pPr>
             <a:r>
-              <a:t>We will issue illegal procedure penalties to penalized players who do not immediately exit the track to the outside when it is safe for them to do so.</a:t>
+              <a:t>We will issue illegal procedure penalties to penalized players who do not immediately exit to the outside of the track when it is safe for them to do so.</a:t>
             </a:r>
           </a:p>
           <a:p>
@@ -8671,7 +8558,7 @@
               </a:defRPr>
             </a:pPr>
             <a:r>
-              <a:t>The metric we will use affords players a 45-degree angle to the left or right as they face the outside of the track.</a:t>
+              <a:t>The metric we will use affords players a ≈45-degree angle to their left or right as they face the outside of the track.</a:t>
             </a:r>
           </a:p>
           <a:p>
@@ -8937,7 +8824,7 @@
               </a:defRPr>
             </a:pPr>
             <a:r>
-              <a:t>OPRs will hold their positions for ≈5 seconds after a jam ends.</a:t>
+              <a:t>OPRs will hold their positions for ≈5 seconds after a jam ends to help avoid contact with players.</a:t>
             </a:r>
           </a:p>
           <a:p>
@@ -8955,20 +8842,20 @@
               </a:defRPr>
             </a:pPr>
             <a:r>
-              <a:t>Forceful contact with an official that is negligent or avoidable may result in expulsion.</a:t>
+              <a:t>Forceful contact with an official that is negligent and avoidable may result in expulsion.</a:t>
             </a:r>
           </a:p>
         </p:txBody>
       </p:sp>
       <p:sp>
         <p:nvSpPr>
-          <p:cNvPr id="190" name="Gameplay Support"/>
+          <p:cNvPr id="188" name="Gameplay Support"/>
           <p:cNvSpPr txBox="1"/>
           <p:nvPr/>
         </p:nvSpPr>
         <p:spPr>
           <a:xfrm>
-            <a:off x="1698116" y="3721109"/>
+            <a:off x="1698116" y="3746509"/>
             <a:ext cx="3547398" cy="364320"/>
           </a:xfrm>
           <a:prstGeom prst="rect">
@@ -9008,7 +8895,7 @@
       </p:sp>
       <p:sp>
         <p:nvSpPr>
-          <p:cNvPr id="191" name="Captains and Alternates only for both teams, please meet at the designated official review area.…"/>
+          <p:cNvPr id="189" name="Captains and Alternates only for both teams, please meet at the designated official review area.…"/>
           <p:cNvSpPr txBox="1"/>
           <p:nvPr/>
         </p:nvSpPr>
@@ -9112,7 +8999,7 @@
       </p:sp>
       <p:sp>
         <p:nvSpPr>
-          <p:cNvPr id="192" name="Official Reviews"/>
+          <p:cNvPr id="190" name="Official Reviews"/>
           <p:cNvSpPr txBox="1"/>
           <p:nvPr/>
         </p:nvSpPr>
@@ -9158,7 +9045,7 @@
       </p:sp>
       <p:sp>
         <p:nvSpPr>
-          <p:cNvPr id="193" name="Players and coaches may ask any SO short, clarifying questions (≈5-8 seconds) during lineups, timeouts, etc.…"/>
+          <p:cNvPr id="191" name="Players and coaches may ask any SO short, clarifying questions (≈5-8 seconds) during lineups, timeouts, etc.…"/>
           <p:cNvSpPr txBox="1"/>
           <p:nvPr/>
         </p:nvSpPr>
@@ -9248,14 +9135,14 @@
               </a:defRPr>
             </a:pPr>
             <a:r>
-              <a:t>We will make mistakes, and I want to do the best we can to resolve those mistakes in a way that is as fair as possible.</a:t>
+              <a:t>We will make mistakes, and we do our best to resolve those mistakes in a way that is as fair as possible.</a:t>
             </a:r>
           </a:p>
         </p:txBody>
       </p:sp>
       <p:sp>
         <p:nvSpPr>
-          <p:cNvPr id="194" name="Communication With Officials"/>
+          <p:cNvPr id="192" name="Communication With Officials"/>
           <p:cNvSpPr txBox="1"/>
           <p:nvPr/>
         </p:nvSpPr>
@@ -9301,7 +9188,7 @@
       </p:sp>
       <p:sp>
         <p:nvSpPr>
-          <p:cNvPr id="195" name="If the scoreboard indicates a tie score at the end of regulation after the JRs check in with their SKs, the SBO will immediately start a one-minute lineup clock (counting up).…"/>
+          <p:cNvPr id="193" name="If the scoreboard indicates a tie score at the end of regulation after the JRs check in with their SKs, the JT will immediately signal the SBO to start the OT lineup clock.…"/>
           <p:cNvSpPr txBox="1"/>
           <p:nvPr/>
         </p:nvSpPr>
@@ -9349,7 +9236,7 @@
               </a:defRPr>
             </a:pPr>
             <a:r>
-              <a:t>If the scoreboard indicates a tie score at the end of regulation after the JRs check in with their SKs, the SBO will immediately start a one-minute lineup clock (counting up).</a:t>
+              <a:t>If the scoreboard indicates a tie score at the end of regulation after the JRs check in with their SKs, the JT will immediately signal the SBO to start the OT lineup clock.</a:t>
             </a:r>
           </a:p>
           <a:p>
@@ -9370,7 +9257,7 @@
               </a:defRPr>
             </a:pPr>
             <a:r>
-              <a:t>We will have successive overtime jams until there is no longer a tie score at the end of a jam.</a:t>
+              <a:t>We will have OT jams until there is no longer a tie score at the end of an OT jam.</a:t>
             </a:r>
           </a:p>
           <a:p>
@@ -9454,14 +9341,14 @@
               </a:defRPr>
             </a:pPr>
             <a:r>
-              <a:t>Scoring points starts on each jammer’s initial trip.</a:t>
+              <a:t>Jammers begin scoring on their initial trip.</a:t>
             </a:r>
           </a:p>
         </p:txBody>
       </p:sp>
       <p:sp>
         <p:nvSpPr>
-          <p:cNvPr id="196" name="Overtime Procedures"/>
+          <p:cNvPr id="194" name="Overtime Procedures"/>
           <p:cNvSpPr txBox="1"/>
           <p:nvPr/>
         </p:nvSpPr>
@@ -9507,21 +9394,21 @@
       </p:sp>
       <p:grpSp>
         <p:nvGrpSpPr>
-          <p:cNvPr id="232" name="Group"/>
+          <p:cNvPr id="230" name="Group"/>
           <p:cNvGrpSpPr/>
           <p:nvPr/>
         </p:nvGrpSpPr>
         <p:grpSpPr>
           <a:xfrm rot="16197861">
-            <a:off x="12554669" y="2114214"/>
-            <a:ext cx="12596172" cy="9894238"/>
+            <a:off x="12554669" y="2114215"/>
+            <a:ext cx="12596172" cy="9894237"/>
             <a:chOff x="-18" y="4"/>
             <a:chExt cx="12596170" cy="9894236"/>
           </a:xfrm>
         </p:grpSpPr>
         <p:grpSp>
           <p:nvGrpSpPr>
-            <p:cNvPr id="216" name="Track"/>
+            <p:cNvPr id="214" name="Track"/>
             <p:cNvGrpSpPr/>
             <p:nvPr/>
           </p:nvGrpSpPr>
@@ -9535,14 +9422,14 @@
           </p:grpSpPr>
           <p:sp>
             <p:nvSpPr>
-              <p:cNvPr id="197" name="Bumpers"/>
+              <p:cNvPr id="195" name="Bumpers"/>
               <p:cNvSpPr/>
               <p:nvPr/>
             </p:nvSpPr>
             <p:spPr>
               <a:xfrm rot="21600000">
                 <a:off x="-1" y="-1"/>
-                <a:ext cx="12595168" cy="8596199"/>
+                <a:ext cx="12595169" cy="8596199"/>
               </a:xfrm>
               <a:custGeom>
                 <a:avLst/>
@@ -9721,7 +9608,7 @@
           </p:sp>
           <p:sp>
             <p:nvSpPr>
-              <p:cNvPr id="198" name="Outside Boundary"/>
+              <p:cNvPr id="196" name="Outside Boundary"/>
               <p:cNvSpPr/>
               <p:nvPr/>
             </p:nvSpPr>
@@ -9891,7 +9778,7 @@
           </p:sp>
           <p:sp>
             <p:nvSpPr>
-              <p:cNvPr id="199" name="Inside Boundary"/>
+              <p:cNvPr id="197" name="Inside Boundary"/>
               <p:cNvSpPr/>
               <p:nvPr/>
             </p:nvSpPr>
@@ -9939,7 +9826,7 @@
           </p:sp>
           <p:sp>
             <p:nvSpPr>
-              <p:cNvPr id="200" name="Pivot Line"/>
+              <p:cNvPr id="198" name="Pivot Line"/>
               <p:cNvSpPr/>
               <p:nvPr/>
             </p:nvSpPr>
@@ -9985,14 +9872,106 @@
           </p:sp>
           <p:sp>
             <p:nvSpPr>
-              <p:cNvPr id="201" name="Jammer Line"/>
+              <p:cNvPr id="199" name="Jammer Line"/>
               <p:cNvSpPr/>
               <p:nvPr/>
             </p:nvSpPr>
             <p:spPr>
               <a:xfrm flipV="1">
                 <a:off x="7752241" y="1094227"/>
-                <a:ext cx="2" cy="1724143"/>
+                <a:ext cx="1" cy="1724143"/>
+              </a:xfrm>
+              <a:prstGeom prst="line">
+                <a:avLst/>
+              </a:prstGeom>
+              <a:noFill/>
+              <a:ln w="63500" cap="flat">
+                <a:solidFill>
+                  <a:srgbClr val="0433FF"/>
+                </a:solidFill>
+                <a:prstDash val="solid"/>
+                <a:miter lim="400000"/>
+              </a:ln>
+              <a:effectLst/>
+            </p:spPr>
+            <p:txBody>
+              <a:bodyPr wrap="square" lIns="50800" tIns="50800" rIns="50800" bIns="50800" numCol="1" anchor="ctr">
+                <a:noAutofit/>
+              </a:bodyPr>
+              <a:lstStyle/>
+              <a:p>
+                <a:pPr algn="l">
+                  <a:lnSpc>
+                    <a:spcPct val="90000"/>
+                  </a:lnSpc>
+                  <a:spcBef>
+                    <a:spcPts val="4500"/>
+                  </a:spcBef>
+                  <a:defRPr sz="4800">
+                    <a:solidFill>
+                      <a:srgbClr val="000000"/>
+                    </a:solidFill>
+                  </a:defRPr>
+                </a:pPr>
+              </a:p>
+            </p:txBody>
+          </p:sp>
+          <p:sp>
+            <p:nvSpPr>
+              <p:cNvPr id="200" name="Line"/>
+              <p:cNvSpPr/>
+              <p:nvPr/>
+            </p:nvSpPr>
+            <p:spPr>
+              <a:xfrm flipH="1" flipV="1">
+                <a:off x="2972724" y="2285423"/>
+                <a:ext cx="236214" cy="331828"/>
+              </a:xfrm>
+              <a:prstGeom prst="line">
+                <a:avLst/>
+              </a:prstGeom>
+              <a:noFill/>
+              <a:ln w="63500" cap="flat">
+                <a:solidFill>
+                  <a:srgbClr val="0433FF"/>
+                </a:solidFill>
+                <a:prstDash val="solid"/>
+                <a:miter lim="400000"/>
+              </a:ln>
+              <a:effectLst/>
+            </p:spPr>
+            <p:txBody>
+              <a:bodyPr wrap="square" lIns="50800" tIns="50800" rIns="50800" bIns="50800" numCol="1" anchor="ctr">
+                <a:noAutofit/>
+              </a:bodyPr>
+              <a:lstStyle/>
+              <a:p>
+                <a:pPr algn="l">
+                  <a:lnSpc>
+                    <a:spcPct val="90000"/>
+                  </a:lnSpc>
+                  <a:spcBef>
+                    <a:spcPts val="4500"/>
+                  </a:spcBef>
+                  <a:defRPr sz="4800">
+                    <a:solidFill>
+                      <a:srgbClr val="000000"/>
+                    </a:solidFill>
+                  </a:defRPr>
+                </a:pPr>
+              </a:p>
+            </p:txBody>
+          </p:sp>
+          <p:sp>
+            <p:nvSpPr>
+              <p:cNvPr id="201" name="Line"/>
+              <p:cNvSpPr/>
+              <p:nvPr/>
+            </p:nvSpPr>
+            <p:spPr>
+              <a:xfrm flipH="1" flipV="1">
+                <a:off x="1938741" y="3581983"/>
+                <a:ext cx="367218" cy="175525"/>
               </a:xfrm>
               <a:prstGeom prst="line">
                 <a:avLst/>
@@ -10036,9 +10015,9 @@
               <p:nvPr/>
             </p:nvSpPr>
             <p:spPr>
-              <a:xfrm flipH="1" flipV="1">
-                <a:off x="2972724" y="2285423"/>
-                <a:ext cx="236214" cy="331828"/>
+              <a:xfrm flipH="1">
+                <a:off x="1807594" y="4913211"/>
+                <a:ext cx="403420" cy="53112"/>
               </a:xfrm>
               <a:prstGeom prst="line">
                 <a:avLst/>
@@ -10082,9 +10061,9 @@
               <p:nvPr/>
             </p:nvSpPr>
             <p:spPr>
-              <a:xfrm flipH="1" flipV="1">
-                <a:off x="1938741" y="3581983"/>
-                <a:ext cx="367218" cy="175524"/>
+              <a:xfrm flipV="1">
+                <a:off x="2326198" y="6036457"/>
+                <a:ext cx="295090" cy="280589"/>
               </a:xfrm>
               <a:prstGeom prst="line">
                 <a:avLst/>
@@ -10128,9 +10107,9 @@
               <p:nvPr/>
             </p:nvSpPr>
             <p:spPr>
-              <a:xfrm flipH="1">
-                <a:off x="1807593" y="4913212"/>
-                <a:ext cx="403421" cy="53111"/>
+              <a:xfrm flipV="1">
+                <a:off x="3562137" y="6402810"/>
+                <a:ext cx="60060" cy="403070"/>
               </a:xfrm>
               <a:prstGeom prst="line">
                 <a:avLst/>
@@ -10175,8 +10154,8 @@
             </p:nvSpPr>
             <p:spPr>
               <a:xfrm flipV="1">
-                <a:off x="2326198" y="6036457"/>
-                <a:ext cx="295090" cy="280589"/>
+                <a:off x="4827424" y="6436112"/>
+                <a:ext cx="1" cy="407533"/>
               </a:xfrm>
               <a:prstGeom prst="line">
                 <a:avLst/>
@@ -10221,8 +10200,8 @@
             </p:nvSpPr>
             <p:spPr>
               <a:xfrm flipV="1">
-                <a:off x="3562137" y="6402810"/>
-                <a:ext cx="60060" cy="403069"/>
+                <a:off x="5985975" y="6400577"/>
+                <a:ext cx="1" cy="407534"/>
               </a:xfrm>
               <a:prstGeom prst="line">
                 <a:avLst/>
@@ -10267,7 +10246,7 @@
             </p:nvSpPr>
             <p:spPr>
               <a:xfrm flipV="1">
-                <a:off x="4827424" y="6436111"/>
+                <a:off x="7162455" y="6400577"/>
                 <a:ext cx="1" cy="407534"/>
               </a:xfrm>
               <a:prstGeom prst="line">
@@ -10313,8 +10292,8 @@
             </p:nvSpPr>
             <p:spPr>
               <a:xfrm flipV="1">
-                <a:off x="5985975" y="6400578"/>
-                <a:ext cx="1" cy="407533"/>
+                <a:off x="8306354" y="6310788"/>
+                <a:ext cx="1" cy="407534"/>
               </a:xfrm>
               <a:prstGeom prst="line">
                 <a:avLst/>
@@ -10358,9 +10337,9 @@
               <p:nvPr/>
             </p:nvSpPr>
             <p:spPr>
-              <a:xfrm flipV="1">
-                <a:off x="7162455" y="6400577"/>
-                <a:ext cx="1" cy="407534"/>
+              <a:xfrm flipH="1" flipV="1">
+                <a:off x="9386766" y="6025576"/>
+                <a:ext cx="256065" cy="316713"/>
               </a:xfrm>
               <a:prstGeom prst="line">
                 <a:avLst/>
@@ -10404,9 +10383,9 @@
               <p:nvPr/>
             </p:nvSpPr>
             <p:spPr>
-              <a:xfrm flipV="1">
-                <a:off x="8306354" y="6310788"/>
-                <a:ext cx="1" cy="407534"/>
+              <a:xfrm flipH="1" flipV="1">
+                <a:off x="10198986" y="5159146"/>
+                <a:ext cx="379865" cy="146048"/>
               </a:xfrm>
               <a:prstGeom prst="line">
                 <a:avLst/>
@@ -10450,9 +10429,9 @@
               <p:nvPr/>
             </p:nvSpPr>
             <p:spPr>
-              <a:xfrm flipH="1" flipV="1">
-                <a:off x="9386766" y="6025576"/>
-                <a:ext cx="256065" cy="316713"/>
+              <a:xfrm flipH="1">
+                <a:off x="10416597" y="3904147"/>
+                <a:ext cx="396462" cy="91675"/>
               </a:xfrm>
               <a:prstGeom prst="line">
                 <a:avLst/>
@@ -10496,9 +10475,9 @@
               <p:nvPr/>
             </p:nvSpPr>
             <p:spPr>
-              <a:xfrm flipH="1" flipV="1">
-                <a:off x="10198986" y="5159146"/>
-                <a:ext cx="379865" cy="146048"/>
+              <a:xfrm flipH="1">
+                <a:off x="9898302" y="2649046"/>
+                <a:ext cx="307084" cy="267366"/>
               </a:xfrm>
               <a:prstGeom prst="line">
                 <a:avLst/>
@@ -10543,98 +10522,6 @@
             </p:nvSpPr>
             <p:spPr>
               <a:xfrm flipH="1">
-                <a:off x="10416597" y="3904146"/>
-                <a:ext cx="396462" cy="91676"/>
-              </a:xfrm>
-              <a:prstGeom prst="line">
-                <a:avLst/>
-              </a:prstGeom>
-              <a:noFill/>
-              <a:ln w="63500" cap="flat">
-                <a:solidFill>
-                  <a:srgbClr val="0433FF"/>
-                </a:solidFill>
-                <a:prstDash val="solid"/>
-                <a:miter lim="400000"/>
-              </a:ln>
-              <a:effectLst/>
-            </p:spPr>
-            <p:txBody>
-              <a:bodyPr wrap="square" lIns="50800" tIns="50800" rIns="50800" bIns="50800" numCol="1" anchor="ctr">
-                <a:noAutofit/>
-              </a:bodyPr>
-              <a:lstStyle/>
-              <a:p>
-                <a:pPr algn="l">
-                  <a:lnSpc>
-                    <a:spcPct val="90000"/>
-                  </a:lnSpc>
-                  <a:spcBef>
-                    <a:spcPts val="4500"/>
-                  </a:spcBef>
-                  <a:defRPr sz="4800">
-                    <a:solidFill>
-                      <a:srgbClr val="000000"/>
-                    </a:solidFill>
-                  </a:defRPr>
-                </a:pPr>
-              </a:p>
-            </p:txBody>
-          </p:sp>
-          <p:sp>
-            <p:nvSpPr>
-              <p:cNvPr id="214" name="Line"/>
-              <p:cNvSpPr/>
-              <p:nvPr/>
-            </p:nvSpPr>
-            <p:spPr>
-              <a:xfrm flipH="1">
-                <a:off x="9898302" y="2649046"/>
-                <a:ext cx="307084" cy="267366"/>
-              </a:xfrm>
-              <a:prstGeom prst="line">
-                <a:avLst/>
-              </a:prstGeom>
-              <a:noFill/>
-              <a:ln w="63500" cap="flat">
-                <a:solidFill>
-                  <a:srgbClr val="0433FF"/>
-                </a:solidFill>
-                <a:prstDash val="solid"/>
-                <a:miter lim="400000"/>
-              </a:ln>
-              <a:effectLst/>
-            </p:spPr>
-            <p:txBody>
-              <a:bodyPr wrap="square" lIns="50800" tIns="50800" rIns="50800" bIns="50800" numCol="1" anchor="ctr">
-                <a:noAutofit/>
-              </a:bodyPr>
-              <a:lstStyle/>
-              <a:p>
-                <a:pPr algn="l">
-                  <a:lnSpc>
-                    <a:spcPct val="90000"/>
-                  </a:lnSpc>
-                  <a:spcBef>
-                    <a:spcPts val="4500"/>
-                  </a:spcBef>
-                  <a:defRPr sz="4800">
-                    <a:solidFill>
-                      <a:srgbClr val="000000"/>
-                    </a:solidFill>
-                  </a:defRPr>
-                </a:pPr>
-              </a:p>
-            </p:txBody>
-          </p:sp>
-          <p:sp>
-            <p:nvSpPr>
-              <p:cNvPr id="215" name="Line"/>
-              <p:cNvSpPr/>
-              <p:nvPr/>
-            </p:nvSpPr>
-            <p:spPr>
-              <a:xfrm flipH="1">
                 <a:off x="8933674" y="1882352"/>
                 <a:ext cx="77639" cy="400046"/>
               </a:xfrm>
@@ -10676,14 +10563,14 @@
         </p:grpSp>
         <p:sp>
           <p:nvSpPr>
-            <p:cNvPr id="217" name="Triangle"/>
+            <p:cNvPr id="215" name="Triangle"/>
             <p:cNvSpPr/>
             <p:nvPr/>
           </p:nvSpPr>
           <p:spPr>
             <a:xfrm rot="8756139">
-              <a:off x="8864389" y="5521462"/>
-              <a:ext cx="2535354" cy="1268252"/>
+              <a:off x="8864389" y="5521461"/>
+              <a:ext cx="2535354" cy="1268253"/>
             </a:xfrm>
             <a:custGeom>
               <a:avLst/>
@@ -10755,7 +10642,7 @@
         </p:sp>
         <p:sp>
           <p:nvSpPr>
-            <p:cNvPr id="218" name="Line"/>
+            <p:cNvPr id="216" name="Line"/>
             <p:cNvSpPr/>
             <p:nvPr/>
           </p:nvSpPr>
@@ -10824,7 +10711,7 @@
         </p:sp>
         <p:sp>
           <p:nvSpPr>
-            <p:cNvPr id="219" name="Line"/>
+            <p:cNvPr id="217" name="Line"/>
             <p:cNvSpPr/>
             <p:nvPr/>
           </p:nvSpPr>
@@ -10862,7 +10749,7 @@
         </p:sp>
         <p:sp>
           <p:nvSpPr>
-            <p:cNvPr id="220" name="Line"/>
+            <p:cNvPr id="218" name="Line"/>
             <p:cNvSpPr/>
             <p:nvPr/>
           </p:nvSpPr>
@@ -10931,14 +10818,14 @@
         </p:sp>
         <p:sp>
           <p:nvSpPr>
-            <p:cNvPr id="221" name="Circle"/>
+            <p:cNvPr id="219" name="Circle"/>
             <p:cNvSpPr/>
             <p:nvPr/>
           </p:nvSpPr>
           <p:spPr>
             <a:xfrm rot="16200000">
               <a:off x="9687076" y="5568824"/>
-              <a:ext cx="243141" cy="242846"/>
+              <a:ext cx="243141" cy="242845"/>
             </a:xfrm>
             <a:prstGeom prst="ellipse">
               <a:avLst/>
@@ -10974,7 +10861,7 @@
         </p:sp>
         <p:sp>
           <p:nvSpPr>
-            <p:cNvPr id="222" name="Triangle"/>
+            <p:cNvPr id="220" name="Triangle"/>
             <p:cNvSpPr/>
             <p:nvPr/>
           </p:nvSpPr>
@@ -11053,7 +10940,7 @@
         </p:sp>
         <p:sp>
           <p:nvSpPr>
-            <p:cNvPr id="223" name="Line"/>
+            <p:cNvPr id="221" name="Line"/>
             <p:cNvSpPr/>
             <p:nvPr/>
           </p:nvSpPr>
@@ -11122,14 +11009,14 @@
         </p:sp>
         <p:sp>
           <p:nvSpPr>
-            <p:cNvPr id="224" name="Line"/>
+            <p:cNvPr id="222" name="Line"/>
             <p:cNvSpPr/>
             <p:nvPr/>
           </p:nvSpPr>
           <p:spPr>
             <a:xfrm rot="10516140">
-              <a:off x="2648831" y="6784532"/>
-              <a:ext cx="5636283" cy="592712"/>
+              <a:off x="2648831" y="6784533"/>
+              <a:ext cx="5636283" cy="592711"/>
             </a:xfrm>
             <a:custGeom>
               <a:avLst/>
@@ -11196,7 +11083,7 @@
         </p:sp>
         <p:sp>
           <p:nvSpPr>
-            <p:cNvPr id="225" name="Triangle"/>
+            <p:cNvPr id="223" name="Triangle"/>
             <p:cNvSpPr/>
             <p:nvPr/>
           </p:nvSpPr>
@@ -11275,14 +11162,14 @@
         </p:sp>
         <p:sp>
           <p:nvSpPr>
-            <p:cNvPr id="226" name="Line"/>
+            <p:cNvPr id="224" name="Line"/>
             <p:cNvSpPr/>
             <p:nvPr/>
           </p:nvSpPr>
           <p:spPr>
-            <a:xfrm rot="16185042">
-              <a:off x="995173" y="2713267"/>
-              <a:ext cx="3904029" cy="731151"/>
+            <a:xfrm rot="16185044">
+              <a:off x="995173" y="2713266"/>
+              <a:ext cx="3904029" cy="731152"/>
             </a:xfrm>
             <a:custGeom>
               <a:avLst/>
@@ -11344,7 +11231,7 @@
         </p:sp>
         <p:sp>
           <p:nvSpPr>
-            <p:cNvPr id="227" name="Circle"/>
+            <p:cNvPr id="225" name="Circle"/>
             <p:cNvSpPr/>
             <p:nvPr/>
           </p:nvSpPr>
@@ -11387,14 +11274,14 @@
         </p:sp>
         <p:sp>
           <p:nvSpPr>
-            <p:cNvPr id="228" name="Line"/>
+            <p:cNvPr id="226" name="Line"/>
             <p:cNvSpPr/>
             <p:nvPr/>
           </p:nvSpPr>
           <p:spPr>
             <a:xfrm>
               <a:off x="8227136" y="6529535"/>
-              <a:ext cx="2397786" cy="730325"/>
+              <a:ext cx="2397785" cy="730326"/>
             </a:xfrm>
             <a:prstGeom prst="line">
               <a:avLst/>
@@ -11425,7 +11312,7 @@
         </p:sp>
         <p:sp>
           <p:nvSpPr>
-            <p:cNvPr id="229" name="Line"/>
+            <p:cNvPr id="227" name="Line"/>
             <p:cNvSpPr/>
             <p:nvPr/>
           </p:nvSpPr>
@@ -11463,7 +11350,7 @@
         </p:sp>
         <p:sp>
           <p:nvSpPr>
-            <p:cNvPr id="230" name="Line"/>
+            <p:cNvPr id="228" name="Line"/>
             <p:cNvSpPr/>
             <p:nvPr/>
           </p:nvSpPr>
@@ -11542,7 +11429,7 @@
         </p:sp>
         <p:sp>
           <p:nvSpPr>
-            <p:cNvPr id="231" name="Circle"/>
+            <p:cNvPr id="229" name="Circle"/>
             <p:cNvSpPr/>
             <p:nvPr/>
           </p:nvSpPr>
@@ -11584,6 +11471,255 @@
           </p:txBody>
         </p:sp>
       </p:grpSp>
+      <p:sp>
+        <p:nvSpPr>
+          <p:cNvPr id="231" name="Medical area location and emergency evacuation plan.…"/>
+          <p:cNvSpPr txBox="1"/>
+          <p:nvPr/>
+        </p:nvSpPr>
+        <p:spPr>
+          <a:xfrm>
+            <a:off x="668868" y="991259"/>
+            <a:ext cx="5588001" cy="2751337"/>
+          </a:xfrm>
+          <a:prstGeom prst="rect">
+            <a:avLst/>
+          </a:prstGeom>
+          <a:solidFill>
+            <a:srgbClr val="FFFFFF"/>
+          </a:solidFill>
+          <a:ln w="12700">
+            <a:solidFill>
+              <a:srgbClr val="000000"/>
+            </a:solidFill>
+            <a:miter lim="400000"/>
+          </a:ln>
+          <a:extLst>
+            <a:ext uri="{C572A759-6A51-4108-AA02-DFA0A04FC94B}">
+              <ma14:wrappingTextBoxFlag xmlns:ma14="http://schemas.microsoft.com/office/mac/drawingml/2011/main" val="1"/>
+            </a:ext>
+          </a:extLst>
+        </p:spPr>
+        <p:txBody>
+          <a:bodyPr lIns="50800" tIns="50800" rIns="50800" bIns="50800"/>
+          <a:lstStyle/>
+          <a:p>
+            <a:pPr marL="254000" indent="-254000" algn="l">
+              <a:buSzPct val="100000"/>
+              <a:buAutoNum type="arabicPeriod" startAt="1"/>
+              <a:defRPr sz="1400">
+                <a:solidFill>
+                  <a:srgbClr val="000000"/>
+                </a:solidFill>
+                <a:latin typeface="Lucida Grande"/>
+                <a:ea typeface="Lucida Grande"/>
+                <a:cs typeface="Lucida Grande"/>
+                <a:sym typeface="Lucida Grande"/>
+              </a:defRPr>
+            </a:pPr>
+            <a:r>
+              <a:t>Medical area location and emergency evacuation plan.</a:t>
+            </a:r>
+          </a:p>
+          <a:p>
+            <a:pPr marL="254000" indent="-254000" algn="l">
+              <a:buSzPct val="100000"/>
+              <a:buAutoNum type="arabicPeriod" startAt="1"/>
+              <a:defRPr sz="1400">
+                <a:solidFill>
+                  <a:srgbClr val="000000"/>
+                </a:solidFill>
+                <a:latin typeface="Lucida Grande"/>
+                <a:ea typeface="Lucida Grande"/>
+                <a:cs typeface="Lucida Grande"/>
+                <a:sym typeface="Lucida Grande"/>
+              </a:defRPr>
+            </a:pPr>
+            <a:r>
+              <a:t>Immediate call-off scenarios:</a:t>
+            </a:r>
+          </a:p>
+          <a:p>
+            <a:pPr lvl="1" marL="317500" indent="-190500" algn="l">
+              <a:buSzPct val="100000"/>
+              <a:buChar char="•"/>
+              <a:defRPr sz="1400">
+                <a:solidFill>
+                  <a:srgbClr val="000000"/>
+                </a:solidFill>
+                <a:latin typeface="Lucida Grande"/>
+                <a:ea typeface="Lucida Grande"/>
+                <a:cs typeface="Lucida Grande"/>
+                <a:sym typeface="Lucida Grande"/>
+              </a:defRPr>
+            </a:pPr>
+            <a:r>
+              <a:t>Medics unavailable to observe gameplay.</a:t>
+            </a:r>
+          </a:p>
+          <a:p>
+            <a:pPr lvl="1" marL="317500" indent="-190500" algn="l">
+              <a:buSzPct val="100000"/>
+              <a:buChar char="•"/>
+              <a:defRPr sz="1400">
+                <a:solidFill>
+                  <a:srgbClr val="000000"/>
+                </a:solidFill>
+                <a:latin typeface="Lucida Grande"/>
+                <a:ea typeface="Lucida Grande"/>
+                <a:cs typeface="Lucida Grande"/>
+                <a:sym typeface="Lucida Grande"/>
+              </a:defRPr>
+            </a:pPr>
+            <a:r>
+              <a:t>Official clock or score failure/freeze.</a:t>
+            </a:r>
+          </a:p>
+          <a:p>
+            <a:pPr lvl="1" marL="317500" indent="-190500" algn="l">
+              <a:buSzPct val="100000"/>
+              <a:buChar char="•"/>
+              <a:defRPr sz="1400">
+                <a:solidFill>
+                  <a:srgbClr val="000000"/>
+                </a:solidFill>
+                <a:latin typeface="Lucida Grande"/>
+                <a:ea typeface="Lucida Grande"/>
+                <a:cs typeface="Lucida Grande"/>
+                <a:sym typeface="Lucida Grande"/>
+              </a:defRPr>
+            </a:pPr>
+            <a:r>
+              <a:t>Obvious player injury or any bleeding.</a:t>
+            </a:r>
+          </a:p>
+          <a:p>
+            <a:pPr lvl="1" marL="317500" indent="-190500" algn="l">
+              <a:buSzPct val="100000"/>
+              <a:buChar char="•"/>
+              <a:defRPr sz="1400">
+                <a:solidFill>
+                  <a:srgbClr val="000000"/>
+                </a:solidFill>
+                <a:latin typeface="Lucida Grande"/>
+                <a:ea typeface="Lucida Grande"/>
+                <a:cs typeface="Lucida Grande"/>
+                <a:sym typeface="Lucida Grande"/>
+              </a:defRPr>
+            </a:pPr>
+            <a:r>
+              <a:t>Loss of personal safety gear (mouthguard, helmet, etc.).</a:t>
+            </a:r>
+          </a:p>
+          <a:p>
+            <a:pPr lvl="1" marL="317500" indent="-190500" algn="l">
+              <a:buSzPct val="100000"/>
+              <a:buChar char="•"/>
+              <a:defRPr sz="1400">
+                <a:solidFill>
+                  <a:srgbClr val="000000"/>
+                </a:solidFill>
+                <a:latin typeface="Lucida Grande"/>
+                <a:ea typeface="Lucida Grande"/>
+                <a:cs typeface="Lucida Grande"/>
+                <a:sym typeface="Lucida Grande"/>
+              </a:defRPr>
+            </a:pPr>
+            <a:r>
+              <a:t>Possible player injury, without affirmative response to the question, “Can you continue?”</a:t>
+            </a:r>
+          </a:p>
+          <a:p>
+            <a:pPr lvl="1" marL="317500" indent="-190500" algn="l">
+              <a:buSzPct val="100000"/>
+              <a:buChar char="•"/>
+              <a:defRPr sz="1400">
+                <a:solidFill>
+                  <a:srgbClr val="000000"/>
+                </a:solidFill>
+                <a:latin typeface="Lucida Grande"/>
+                <a:ea typeface="Lucida Grande"/>
+                <a:cs typeface="Lucida Grande"/>
+                <a:sym typeface="Lucida Grande"/>
+              </a:defRPr>
+            </a:pPr>
+            <a:r>
+              <a:t>Player or non-player forcefully strikes their head on the ground or appears concussed.</a:t>
+            </a:r>
+          </a:p>
+          <a:p>
+            <a:pPr lvl="1" marL="317500" indent="-190500" algn="l">
+              <a:buSzPct val="100000"/>
+              <a:buChar char="•"/>
+              <a:defRPr sz="1400">
+                <a:solidFill>
+                  <a:srgbClr val="000000"/>
+                </a:solidFill>
+                <a:latin typeface="Lucida Grande"/>
+                <a:ea typeface="Lucida Grande"/>
+                <a:cs typeface="Lucida Grande"/>
+                <a:sym typeface="Lucida Grande"/>
+              </a:defRPr>
+            </a:pPr>
+            <a:r>
+              <a:t>Any </a:t>
+            </a:r>
+            <a:r>
+              <a:rPr u="sng"/>
+              <a:t>non-player</a:t>
+            </a:r>
+            <a:r>
+              <a:t> goes to the ground and does not immediately and actively return upright.</a:t>
+            </a:r>
+          </a:p>
+        </p:txBody>
+      </p:sp>
+      <p:sp>
+        <p:nvSpPr>
+          <p:cNvPr id="232" name="Game Administration"/>
+          <p:cNvSpPr txBox="1"/>
+          <p:nvPr/>
+        </p:nvSpPr>
+        <p:spPr>
+          <a:xfrm>
+            <a:off x="2235071" y="621836"/>
+            <a:ext cx="2455595" cy="358510"/>
+          </a:xfrm>
+          <a:prstGeom prst="rect">
+            <a:avLst/>
+          </a:prstGeom>
+          <a:ln w="12700">
+            <a:miter lim="400000"/>
+          </a:ln>
+          <a:extLst>
+            <a:ext uri="{C572A759-6A51-4108-AA02-DFA0A04FC94B}">
+              <ma14:wrappingTextBoxFlag xmlns:ma14="http://schemas.microsoft.com/office/mac/drawingml/2011/main" val="1"/>
+            </a:ext>
+          </a:extLst>
+        </p:spPr>
+        <p:txBody>
+          <a:bodyPr lIns="50800" tIns="50800" rIns="50800" bIns="50800" anchor="ctr"/>
+          <a:lstStyle>
+            <a:lvl1pPr>
+              <a:defRPr b="1" sz="1600">
+                <a:solidFill>
+                  <a:srgbClr val="000000"/>
+                </a:solidFill>
+                <a:latin typeface="Lucida Grande"/>
+                <a:ea typeface="Lucida Grande"/>
+                <a:cs typeface="Lucida Grande"/>
+                <a:sym typeface="Lucida Grande"/>
+              </a:defRPr>
+            </a:lvl1pPr>
+          </a:lstStyle>
+          <a:p>
+            <a:pPr/>
+            <a:r>
+              <a:t>Game Administration</a:t>
+            </a:r>
+          </a:p>
+        </p:txBody>
+      </p:sp>
     </p:spTree>
   </p:cSld>
   <p:clrMapOvr>
@@ -12439,7 +12575,7 @@
               </a:defRPr>
             </a:pPr>
             <a:r>
-              <a:t>In this case, Blocker initiated forceful contact and we will penalize Blocker for Illegal Contact.</a:t>
+              <a:t>In this case, Blocker initiated forceful contact, and we will penalize Blocker for Illegal Contact.</a:t>
             </a:r>
           </a:p>
           <a:p>
@@ -12457,7 +12593,7 @@
               </a:defRPr>
             </a:pPr>
             <a:r>
-              <a:t>“Moving into” this sort of contact is illegal regardless of impact.</a:t>
+              <a:t>“Moving into” this sort of contact is illegal regardless of game impact.</a:t>
             </a:r>
           </a:p>
         </p:txBody>
@@ -12629,7 +12765,7 @@
       </p:sp>
       <p:sp>
         <p:nvSpPr>
-          <p:cNvPr id="247" name="In the same scenario, we will allow Jammer to intentionally skate OOB to avoid forceful or potentially dangerous contact that would be unavoidable due to the way Blocker attempts to initiate a block.…"/>
+          <p:cNvPr id="247" name="In the same situation as Scenario #4, we will allow Jammer to intentionally skate OOB to avoid forceful or potentially dangerous contact that would be unavoidable due to the way Blocker attempts to initiate a block.…"/>
           <p:cNvSpPr txBox="1"/>
           <p:nvPr/>
         </p:nvSpPr>
@@ -12674,7 +12810,7 @@
               </a:defRPr>
             </a:pPr>
             <a:r>
-              <a:t>In the same scenario, we will allow Jammer to intentionally skate OOB to avoid forceful or potentially dangerous contact that would be unavoidable due to the way Blocker attempts to initiate a block.</a:t>
+              <a:t>In the same situation as Scenario #4, we will allow Jammer to intentionally skate OOB to avoid forceful or potentially dangerous contact that would be unavoidable due to the way Blocker attempts to initiate a block.</a:t>
             </a:r>
           </a:p>
           <a:p>

--- a/hr-notes/powerpoint/hr-notes.pptx
+++ b/hr-notes/powerpoint/hr-notes.pptx
@@ -7788,7 +7788,7 @@
         </p:nvSpPr>
         <p:spPr>
           <a:xfrm>
-            <a:off x="12436074" y="12476634"/>
+            <a:off x="12436074" y="9932320"/>
             <a:ext cx="5588001" cy="822923"/>
           </a:xfrm>
           <a:prstGeom prst="rect">
@@ -7892,8 +7892,8 @@
         </p:nvSpPr>
         <p:spPr>
           <a:xfrm>
-            <a:off x="13456375" y="12127877"/>
-            <a:ext cx="3547398" cy="345559"/>
+            <a:off x="13456375" y="9583563"/>
+            <a:ext cx="3547398" cy="345560"/>
           </a:xfrm>
           <a:prstGeom prst="rect">
             <a:avLst/>
@@ -11852,14 +11852,14 @@
       </p:sp>
       <p:sp>
         <p:nvSpPr>
-          <p:cNvPr id="237" name="JRDA L2 gameplay can be difficult for players to play and for officials to officiate because what has the appearance of excellent derby can be illegal.…"/>
+          <p:cNvPr id="237" name="JRDA L2 gameplay can be difficult for players to play and for officials to officiate because contact that looks like normal derby gameplay can sometimes be illegal.…"/>
           <p:cNvSpPr txBox="1"/>
           <p:nvPr/>
         </p:nvSpPr>
         <p:spPr>
           <a:xfrm>
             <a:off x="676536" y="991259"/>
-            <a:ext cx="5588001" cy="5773029"/>
+            <a:ext cx="5588001" cy="5962487"/>
           </a:xfrm>
           <a:prstGeom prst="rect">
             <a:avLst/>
@@ -11897,7 +11897,7 @@
               </a:defRPr>
             </a:pPr>
             <a:r>
-              <a:t>JRDA L2 gameplay can be difficult for players to play and for officials to officiate because what has the appearance of excellent derby can be illegal.</a:t>
+              <a:t>JRDA L2 gameplay can be difficult for players to play and for officials to officiate because contact that looks like normal derby gameplay can sometimes be illegal.</a:t>
             </a:r>
           </a:p>
           <a:p>
@@ -11993,7 +11993,21 @@
               </a:defRPr>
             </a:pPr>
             <a:r>
-              <a:t>Making contact with any swinging of the shoulders, hips, or other legal blocking zones is hitting.</a:t>
+              <a:t>Making contact with any </a:t>
+            </a:r>
+            <a:r>
+              <a:rPr u="sng"/>
+              <a:t>swinging</a:t>
+            </a:r>
+            <a:r>
+              <a:t> of the shoulders, hips, or other </a:t>
+            </a:r>
+            <a:r>
+              <a:rPr u="sng"/>
+              <a:t>legal</a:t>
+            </a:r>
+            <a:r>
+              <a:t> blocking zones is hitting.</a:t>
             </a:r>
           </a:p>
           <a:p>
@@ -12014,7 +12028,7 @@
               </a:defRPr>
             </a:pPr>
             <a:r>
-              <a:t>We penalize for hitting even when players make contact with legal blocking zones to legal target zones.</a:t>
+              <a:t>We penalize for hitting even when players make forceful contact with legal blocking zones to legal target zones.</a:t>
             </a:r>
           </a:p>
           <a:p>
@@ -12035,7 +12049,7 @@
               </a:defRPr>
             </a:pPr>
             <a:r>
-              <a:t>We penalize for forceful contact regardless of game impact.</a:t>
+              <a:t>We penalize for hitting regardless of game impact.</a:t>
             </a:r>
           </a:p>
           <a:p>
@@ -12077,7 +12091,21 @@
               </a:defRPr>
             </a:pPr>
             <a:r>
-              <a:t>It is legal for players to make gentle contact and block using legal blocking zones to legal target zones.</a:t>
+              <a:t>It is </a:t>
+            </a:r>
+            <a:r>
+              <a:rPr u="sng"/>
+              <a:t>legal</a:t>
+            </a:r>
+            <a:r>
+              <a:t> for players to make non-forceful </a:t>
+            </a:r>
+            <a:r>
+              <a:rPr u="sng"/>
+              <a:t>initial</a:t>
+            </a:r>
+            <a:r>
+              <a:t> contact, and then push with force using legal blocking zones on legal target zones.</a:t>
             </a:r>
           </a:p>
           <a:p>
@@ -12098,7 +12126,14 @@
               </a:defRPr>
             </a:pPr>
             <a:r>
-              <a:t>Players may lean or push with force as long as they do not stop their block and initiate a new block with forceful contact.</a:t>
+              <a:t>Players may legally block by leaning on or pushing opposing players forcefully, as long as they do not stop their block and initiate a new block with forceful </a:t>
+            </a:r>
+            <a:r>
+              <a:rPr u="sng"/>
+              <a:t>initial</a:t>
+            </a:r>
+            <a:r>
+              <a:t> contact.</a:t>
             </a:r>
           </a:p>
           <a:p>
@@ -12116,7 +12151,21 @@
               </a:defRPr>
             </a:pPr>
             <a:r>
-              <a:t>In the JRDA L2 ruleset, it is illegal for players to position themselves such they cannot be blocked without an opposing player making forceful contact.</a:t>
+              <a:t>Note that it is </a:t>
+            </a:r>
+            <a:r>
+              <a:rPr u="sng"/>
+              <a:t>illegal</a:t>
+            </a:r>
+            <a:r>
+              <a:t> for players to position themselves in a way that prevents opposing players from having the opportunity to </a:t>
+            </a:r>
+            <a:r>
+              <a:rPr u="sng"/>
+              <a:t>legally</a:t>
+            </a:r>
+            <a:r>
+              <a:t> block them.</a:t>
             </a:r>
           </a:p>
           <a:p>
@@ -12190,13 +12239,13 @@
       </p:sp>
       <p:sp>
         <p:nvSpPr>
-          <p:cNvPr id="239" name="Blocker is legally blocking Jammer, discontinues their block momentarily, and starts a new block by swinging their shoulders, hips, or other legal blocking zones.…"/>
+          <p:cNvPr id="239" name="Blocker is legally blocking Jammer, discontinues their block momentarily, and initiates a new block by swinging their shoulders, hips, or other legal blocking zones.…"/>
           <p:cNvSpPr txBox="1"/>
           <p:nvPr/>
         </p:nvSpPr>
         <p:spPr>
           <a:xfrm>
-            <a:off x="676536" y="7146563"/>
+            <a:off x="676536" y="7337063"/>
             <a:ext cx="5588001" cy="2165169"/>
           </a:xfrm>
           <a:prstGeom prst="rect">
@@ -12235,7 +12284,7 @@
               </a:defRPr>
             </a:pPr>
             <a:r>
-              <a:t>Blocker is legally blocking Jammer, discontinues their block momentarily, and starts a new block by swinging their shoulders, hips, or other legal blocking zones.</a:t>
+              <a:t>Blocker is legally blocking Jammer, discontinues their block momentarily, and initiates a new block by swinging their shoulders, hips, or other legal blocking zones.</a:t>
             </a:r>
           </a:p>
           <a:p>
@@ -12271,7 +12320,7 @@
               </a:defRPr>
             </a:pPr>
             <a:r>
-              <a:t>Blocker may legally block with force as long as they first make gentle or non-forceful initial contact with Jammer.</a:t>
+              <a:t>Blocker must make gentle/non-forceful initial contact with Jammer before leaning or pushing with force.</a:t>
             </a:r>
           </a:p>
           <a:p>
@@ -12289,7 +12338,7 @@
               </a:defRPr>
             </a:pPr>
             <a:r>
-              <a:t>Blocker may legally disengage and reengage their block as long as each new block is non-forceful.</a:t>
+              <a:t>Blocker may legally disengage and re-engage their block as long as the initiation of each new block is non-forceful.</a:t>
             </a:r>
           </a:p>
         </p:txBody>
@@ -12302,7 +12351,7 @@
         </p:nvSpPr>
         <p:spPr>
           <a:xfrm>
-            <a:off x="713475" y="6757442"/>
+            <a:off x="713475" y="6947942"/>
             <a:ext cx="5514123" cy="449272"/>
           </a:xfrm>
           <a:prstGeom prst="rect">
@@ -12423,7 +12472,7 @@
               </a:defRPr>
             </a:pPr>
             <a:r>
-              <a:t>Blocker may legally “catch” Jammer with non-forceful contact and continue to legally block.</a:t>
+              <a:t>Blocker may legally “catch” Jammer with non-forceful contact, and then continue to legally block Jammer.</a:t>
             </a:r>
           </a:p>
           <a:p>
@@ -12441,7 +12490,7 @@
               </a:defRPr>
             </a:pPr>
             <a:r>
-              <a:t>Jammer is allowed to brace for contact although they may not initiate a forceful counter-block.</a:t>
+              <a:t>Jammer is allowed to brace for contact, although they may not initiate a forceful counter-block.</a:t>
             </a:r>
           </a:p>
           <a:p>
@@ -12575,7 +12624,7 @@
               </a:defRPr>
             </a:pPr>
             <a:r>
-              <a:t>In this case, Blocker initiated forceful contact, and we will penalize Blocker for Illegal Contact.</a:t>
+              <a:t>In this case, Blocker is responsible for initiating forceful contact, and we will penalize Blocker for Illegal Contact.</a:t>
             </a:r>
           </a:p>
           <a:p>
@@ -12593,7 +12642,7 @@
               </a:defRPr>
             </a:pPr>
             <a:r>
-              <a:t>“Moving into” this sort of contact is illegal regardless of game impact.</a:t>
+              <a:t>Blocker “moving into” this sort of contact is illegal, regardless of game impact.</a:t>
             </a:r>
           </a:p>
         </p:txBody>
@@ -12646,13 +12695,13 @@
       </p:sp>
       <p:sp>
         <p:nvSpPr>
-          <p:cNvPr id="245" name="Jammer initiates forceful contact with Blocker, although due to a size or skill disparity, Blocker absorbs the contact without moving, and Jammer falls to the ground.…"/>
+          <p:cNvPr id="245" name="Jammer approaches a wall of blockers and initiates forceful contact with Blocker.  Blocker absorbs the contact without moving, and Jammer falls to the ground.…"/>
           <p:cNvSpPr txBox="1"/>
           <p:nvPr/>
         </p:nvSpPr>
         <p:spPr>
           <a:xfrm>
-            <a:off x="676536" y="9706160"/>
+            <a:off x="676536" y="9896660"/>
             <a:ext cx="5588001" cy="1480814"/>
           </a:xfrm>
           <a:prstGeom prst="rect">
@@ -12706,13 +12755,13 @@
           <a:p>
             <a:pPr/>
             <a:r>
-              <a:t>Jammer initiates forceful contact with Blocker, although due to a size or skill disparity, Blocker absorbs the contact without moving, and Jammer falls to the ground.</a:t>
+              <a:t>Jammer approaches a wall of blockers and initiates forceful contact with Blocker.  Blocker absorbs the contact without moving, and Jammer falls to the ground.</a:t>
             </a:r>
           </a:p>
           <a:p>
             <a:pPr lvl="1"/>
             <a:r>
-              <a:t>In this case, we will penalize Jammer for initiating forceful contact regardless of the blocking zone, target zone, or game impact to Blocker.</a:t>
+              <a:t>In this case, we will penalize Jammer for initiating forceful contact, regardless of the blocking zone, target zone, or game impact to Blocker.</a:t>
             </a:r>
           </a:p>
         </p:txBody>
@@ -12725,7 +12774,7 @@
         </p:nvSpPr>
         <p:spPr>
           <a:xfrm>
-            <a:off x="713476" y="9317039"/>
+            <a:off x="713476" y="9507539"/>
             <a:ext cx="5514122" cy="449271"/>
           </a:xfrm>
           <a:prstGeom prst="rect">
